--- a/exports/pptx/lessons/middle-module-14-magic-squares/day-08-cross-cultural.pptx
+++ b/exports/pptx/lessons/middle-module-14-magic-squares/day-08-cross-cultural.pptx
@@ -17,9 +17,21 @@
     <p:sldId id="265" r:id="rId11"/>
     <p:sldId id="266" r:id="rId12"/>
     <p:sldId id="267" r:id="rId13"/>
+    <p:sldId id="268" r:id="rId14"/>
+    <p:sldId id="269" r:id="rId15"/>
+    <p:sldId id="270" r:id="rId16"/>
+    <p:sldId id="271" r:id="rId17"/>
+    <p:sldId id="272" r:id="rId18"/>
+    <p:sldId id="273" r:id="rId19"/>
+    <p:sldId id="274" r:id="rId20"/>
+    <p:sldId id="275" r:id="rId21"/>
+    <p:sldId id="276" r:id="rId22"/>
+    <p:sldId id="277" r:id="rId23"/>
+    <p:sldId id="278" r:id="rId24"/>
+    <p:sldId id="279" r:id="rId25"/>
   </p:sldIdLst>
   <p:notesMasterIdLst>
-    <p:notesMasterId r:id="rId14"/>
+    <p:notesMasterId r:id="rId26"/>
   </p:notesMasterIdLst>
   <p:sldSz cx="9144000" cy="5143500"/>
   <p:notesSz cx="5143500" cy="9144000"/>
@@ -819,6 +831,622 @@
 </p:notes>
 </file>
 
+<file path=ppt/notesSlides/notesSlide13.xml><?xml version="1.0" encoding="utf-8"?>
+<p:notes xmlns:a="http://schemas.openxmlformats.org/drawingml/2006/main" xmlns:r="http://schemas.openxmlformats.org/officeDocument/2006/relationships" xmlns:p="http://schemas.openxmlformats.org/presentationml/2006/main">
+  <p:cSld>
+    <p:spTree>
+      <p:nvGrpSpPr>
+        <p:cNvPr id="1" name=""/>
+        <p:cNvGrpSpPr/>
+        <p:nvPr/>
+      </p:nvGrpSpPr>
+      <p:grpSpPr>
+        <a:xfrm>
+          <a:off x="0" y="0"/>
+          <a:ext cx="0" cy="0"/>
+          <a:chOff x="0" y="0"/>
+          <a:chExt cx="0" cy="0"/>
+        </a:xfrm>
+      </p:grpSpPr>
+      <p:sp>
+        <p:nvSpPr>
+          <p:cNvPr id="2" name="Slide Image Placeholder 1"/>
+          <p:cNvSpPr>
+            <a:spLocks noGrp="1" noRot="1" noChangeAspect="1"/>
+          </p:cNvSpPr>
+          <p:nvPr>
+            <p:ph type="sldImg"/>
+          </p:nvPr>
+        </p:nvSpPr>
+        <p:spPr/>
+      </p:sp>
+      <p:sp>
+        <p:nvSpPr>
+          <p:cNvPr id="3" name="Notes Placeholder 2"/>
+          <p:cNvSpPr>
+            <a:spLocks noGrp="1"/>
+          </p:cNvSpPr>
+          <p:nvPr>
+            <p:ph type="body" idx="1"/>
+          </p:nvPr>
+        </p:nvSpPr>
+        <p:spPr/>
+        <p:txBody>
+          <a:bodyPr/>
+          <a:lstStyle/>
+          <a:p>
+            <a:r>
+              <a:rPr lang="en-US" dirty="0"/>
+              <a:t/>
+            </a:r>
+            <a:endParaRPr lang="en-US" dirty="0"/>
+          </a:p>
+        </p:txBody>
+      </p:sp>
+      <p:sp>
+        <p:nvSpPr>
+          <p:cNvPr id="4" name="Slide Number Placeholder 3"/>
+          <p:cNvSpPr>
+            <a:spLocks noGrp="1"/>
+          </p:cNvSpPr>
+          <p:nvPr>
+            <p:ph type="sldNum" sz="quarter" idx="10"/>
+          </p:nvPr>
+        </p:nvSpPr>
+        <p:spPr/>
+        <p:txBody>
+          <a:bodyPr/>
+          <a:lstStyle/>
+          <a:p>
+            <a:fld id="{F7021451-1387-4CA6-816F-3879F97B5CBC}" type="slidenum">
+              <a:rPr lang="en-US"/>
+              <a:t>13</a:t>
+            </a:fld>
+            <a:endParaRPr lang="en-US"/>
+          </a:p>
+        </p:txBody>
+      </p:sp>
+    </p:spTree>
+    <p:extLst>
+      <p:ext uri="{BB962C8B-B14F-4D97-AF65-F5344CB8AC3E}">
+        <p14:creationId xmlns:p14="http://schemas.microsoft.com/office/powerpoint/2010/main" val="1024086991"/>
+      </p:ext>
+    </p:extLst>
+  </p:cSld>
+  <p:clrMapOvr>
+    <a:masterClrMapping/>
+  </p:clrMapOvr>
+</p:notes>
+</file>
+
+<file path=ppt/notesSlides/notesSlide14.xml><?xml version="1.0" encoding="utf-8"?>
+<p:notes xmlns:a="http://schemas.openxmlformats.org/drawingml/2006/main" xmlns:r="http://schemas.openxmlformats.org/officeDocument/2006/relationships" xmlns:p="http://schemas.openxmlformats.org/presentationml/2006/main">
+  <p:cSld>
+    <p:spTree>
+      <p:nvGrpSpPr>
+        <p:cNvPr id="1" name=""/>
+        <p:cNvGrpSpPr/>
+        <p:nvPr/>
+      </p:nvGrpSpPr>
+      <p:grpSpPr>
+        <a:xfrm>
+          <a:off x="0" y="0"/>
+          <a:ext cx="0" cy="0"/>
+          <a:chOff x="0" y="0"/>
+          <a:chExt cx="0" cy="0"/>
+        </a:xfrm>
+      </p:grpSpPr>
+      <p:sp>
+        <p:nvSpPr>
+          <p:cNvPr id="2" name="Slide Image Placeholder 1"/>
+          <p:cNvSpPr>
+            <a:spLocks noGrp="1" noRot="1" noChangeAspect="1"/>
+          </p:cNvSpPr>
+          <p:nvPr>
+            <p:ph type="sldImg"/>
+          </p:nvPr>
+        </p:nvSpPr>
+        <p:spPr/>
+      </p:sp>
+      <p:sp>
+        <p:nvSpPr>
+          <p:cNvPr id="3" name="Notes Placeholder 2"/>
+          <p:cNvSpPr>
+            <a:spLocks noGrp="1"/>
+          </p:cNvSpPr>
+          <p:nvPr>
+            <p:ph type="body" idx="1"/>
+          </p:nvPr>
+        </p:nvSpPr>
+        <p:spPr/>
+        <p:txBody>
+          <a:bodyPr/>
+          <a:lstStyle/>
+          <a:p>
+            <a:r>
+              <a:rPr lang="en-US" dirty="0"/>
+              <a:t/>
+            </a:r>
+            <a:endParaRPr lang="en-US" dirty="0"/>
+          </a:p>
+        </p:txBody>
+      </p:sp>
+      <p:sp>
+        <p:nvSpPr>
+          <p:cNvPr id="4" name="Slide Number Placeholder 3"/>
+          <p:cNvSpPr>
+            <a:spLocks noGrp="1"/>
+          </p:cNvSpPr>
+          <p:nvPr>
+            <p:ph type="sldNum" sz="quarter" idx="10"/>
+          </p:nvPr>
+        </p:nvSpPr>
+        <p:spPr/>
+        <p:txBody>
+          <a:bodyPr/>
+          <a:lstStyle/>
+          <a:p>
+            <a:fld id="{F7021451-1387-4CA6-816F-3879F97B5CBC}" type="slidenum">
+              <a:rPr lang="en-US"/>
+              <a:t>14</a:t>
+            </a:fld>
+            <a:endParaRPr lang="en-US"/>
+          </a:p>
+        </p:txBody>
+      </p:sp>
+    </p:spTree>
+    <p:extLst>
+      <p:ext uri="{BB962C8B-B14F-4D97-AF65-F5344CB8AC3E}">
+        <p14:creationId xmlns:p14="http://schemas.microsoft.com/office/powerpoint/2010/main" val="1024086991"/>
+      </p:ext>
+    </p:extLst>
+  </p:cSld>
+  <p:clrMapOvr>
+    <a:masterClrMapping/>
+  </p:clrMapOvr>
+</p:notes>
+</file>
+
+<file path=ppt/notesSlides/notesSlide15.xml><?xml version="1.0" encoding="utf-8"?>
+<p:notes xmlns:a="http://schemas.openxmlformats.org/drawingml/2006/main" xmlns:r="http://schemas.openxmlformats.org/officeDocument/2006/relationships" xmlns:p="http://schemas.openxmlformats.org/presentationml/2006/main">
+  <p:cSld>
+    <p:spTree>
+      <p:nvGrpSpPr>
+        <p:cNvPr id="1" name=""/>
+        <p:cNvGrpSpPr/>
+        <p:nvPr/>
+      </p:nvGrpSpPr>
+      <p:grpSpPr>
+        <a:xfrm>
+          <a:off x="0" y="0"/>
+          <a:ext cx="0" cy="0"/>
+          <a:chOff x="0" y="0"/>
+          <a:chExt cx="0" cy="0"/>
+        </a:xfrm>
+      </p:grpSpPr>
+      <p:sp>
+        <p:nvSpPr>
+          <p:cNvPr id="2" name="Slide Image Placeholder 1"/>
+          <p:cNvSpPr>
+            <a:spLocks noGrp="1" noRot="1" noChangeAspect="1"/>
+          </p:cNvSpPr>
+          <p:nvPr>
+            <p:ph type="sldImg"/>
+          </p:nvPr>
+        </p:nvSpPr>
+        <p:spPr/>
+      </p:sp>
+      <p:sp>
+        <p:nvSpPr>
+          <p:cNvPr id="3" name="Notes Placeholder 2"/>
+          <p:cNvSpPr>
+            <a:spLocks noGrp="1"/>
+          </p:cNvSpPr>
+          <p:nvPr>
+            <p:ph type="body" idx="1"/>
+          </p:nvPr>
+        </p:nvSpPr>
+        <p:spPr/>
+        <p:txBody>
+          <a:bodyPr/>
+          <a:lstStyle/>
+          <a:p>
+            <a:r>
+              <a:rPr lang="en-US" dirty="0"/>
+              <a:t/>
+            </a:r>
+            <a:endParaRPr lang="en-US" dirty="0"/>
+          </a:p>
+        </p:txBody>
+      </p:sp>
+      <p:sp>
+        <p:nvSpPr>
+          <p:cNvPr id="4" name="Slide Number Placeholder 3"/>
+          <p:cNvSpPr>
+            <a:spLocks noGrp="1"/>
+          </p:cNvSpPr>
+          <p:nvPr>
+            <p:ph type="sldNum" sz="quarter" idx="10"/>
+          </p:nvPr>
+        </p:nvSpPr>
+        <p:spPr/>
+        <p:txBody>
+          <a:bodyPr/>
+          <a:lstStyle/>
+          <a:p>
+            <a:fld id="{F7021451-1387-4CA6-816F-3879F97B5CBC}" type="slidenum">
+              <a:rPr lang="en-US"/>
+              <a:t>15</a:t>
+            </a:fld>
+            <a:endParaRPr lang="en-US"/>
+          </a:p>
+        </p:txBody>
+      </p:sp>
+    </p:spTree>
+    <p:extLst>
+      <p:ext uri="{BB962C8B-B14F-4D97-AF65-F5344CB8AC3E}">
+        <p14:creationId xmlns:p14="http://schemas.microsoft.com/office/powerpoint/2010/main" val="1024086991"/>
+      </p:ext>
+    </p:extLst>
+  </p:cSld>
+  <p:clrMapOvr>
+    <a:masterClrMapping/>
+  </p:clrMapOvr>
+</p:notes>
+</file>
+
+<file path=ppt/notesSlides/notesSlide16.xml><?xml version="1.0" encoding="utf-8"?>
+<p:notes xmlns:a="http://schemas.openxmlformats.org/drawingml/2006/main" xmlns:r="http://schemas.openxmlformats.org/officeDocument/2006/relationships" xmlns:p="http://schemas.openxmlformats.org/presentationml/2006/main">
+  <p:cSld>
+    <p:spTree>
+      <p:nvGrpSpPr>
+        <p:cNvPr id="1" name=""/>
+        <p:cNvGrpSpPr/>
+        <p:nvPr/>
+      </p:nvGrpSpPr>
+      <p:grpSpPr>
+        <a:xfrm>
+          <a:off x="0" y="0"/>
+          <a:ext cx="0" cy="0"/>
+          <a:chOff x="0" y="0"/>
+          <a:chExt cx="0" cy="0"/>
+        </a:xfrm>
+      </p:grpSpPr>
+      <p:sp>
+        <p:nvSpPr>
+          <p:cNvPr id="2" name="Slide Image Placeholder 1"/>
+          <p:cNvSpPr>
+            <a:spLocks noGrp="1" noRot="1" noChangeAspect="1"/>
+          </p:cNvSpPr>
+          <p:nvPr>
+            <p:ph type="sldImg"/>
+          </p:nvPr>
+        </p:nvSpPr>
+        <p:spPr/>
+      </p:sp>
+      <p:sp>
+        <p:nvSpPr>
+          <p:cNvPr id="3" name="Notes Placeholder 2"/>
+          <p:cNvSpPr>
+            <a:spLocks noGrp="1"/>
+          </p:cNvSpPr>
+          <p:nvPr>
+            <p:ph type="body" idx="1"/>
+          </p:nvPr>
+        </p:nvSpPr>
+        <p:spPr/>
+        <p:txBody>
+          <a:bodyPr/>
+          <a:lstStyle/>
+          <a:p>
+            <a:r>
+              <a:rPr lang="en-US" dirty="0"/>
+              <a:t/>
+            </a:r>
+            <a:endParaRPr lang="en-US" dirty="0"/>
+          </a:p>
+        </p:txBody>
+      </p:sp>
+      <p:sp>
+        <p:nvSpPr>
+          <p:cNvPr id="4" name="Slide Number Placeholder 3"/>
+          <p:cNvSpPr>
+            <a:spLocks noGrp="1"/>
+          </p:cNvSpPr>
+          <p:nvPr>
+            <p:ph type="sldNum" sz="quarter" idx="10"/>
+          </p:nvPr>
+        </p:nvSpPr>
+        <p:spPr/>
+        <p:txBody>
+          <a:bodyPr/>
+          <a:lstStyle/>
+          <a:p>
+            <a:fld id="{F7021451-1387-4CA6-816F-3879F97B5CBC}" type="slidenum">
+              <a:rPr lang="en-US"/>
+              <a:t>16</a:t>
+            </a:fld>
+            <a:endParaRPr lang="en-US"/>
+          </a:p>
+        </p:txBody>
+      </p:sp>
+    </p:spTree>
+    <p:extLst>
+      <p:ext uri="{BB962C8B-B14F-4D97-AF65-F5344CB8AC3E}">
+        <p14:creationId xmlns:p14="http://schemas.microsoft.com/office/powerpoint/2010/main" val="1024086991"/>
+      </p:ext>
+    </p:extLst>
+  </p:cSld>
+  <p:clrMapOvr>
+    <a:masterClrMapping/>
+  </p:clrMapOvr>
+</p:notes>
+</file>
+
+<file path=ppt/notesSlides/notesSlide17.xml><?xml version="1.0" encoding="utf-8"?>
+<p:notes xmlns:a="http://schemas.openxmlformats.org/drawingml/2006/main" xmlns:r="http://schemas.openxmlformats.org/officeDocument/2006/relationships" xmlns:p="http://schemas.openxmlformats.org/presentationml/2006/main">
+  <p:cSld>
+    <p:spTree>
+      <p:nvGrpSpPr>
+        <p:cNvPr id="1" name=""/>
+        <p:cNvGrpSpPr/>
+        <p:nvPr/>
+      </p:nvGrpSpPr>
+      <p:grpSpPr>
+        <a:xfrm>
+          <a:off x="0" y="0"/>
+          <a:ext cx="0" cy="0"/>
+          <a:chOff x="0" y="0"/>
+          <a:chExt cx="0" cy="0"/>
+        </a:xfrm>
+      </p:grpSpPr>
+      <p:sp>
+        <p:nvSpPr>
+          <p:cNvPr id="2" name="Slide Image Placeholder 1"/>
+          <p:cNvSpPr>
+            <a:spLocks noGrp="1" noRot="1" noChangeAspect="1"/>
+          </p:cNvSpPr>
+          <p:nvPr>
+            <p:ph type="sldImg"/>
+          </p:nvPr>
+        </p:nvSpPr>
+        <p:spPr/>
+      </p:sp>
+      <p:sp>
+        <p:nvSpPr>
+          <p:cNvPr id="3" name="Notes Placeholder 2"/>
+          <p:cNvSpPr>
+            <a:spLocks noGrp="1"/>
+          </p:cNvSpPr>
+          <p:nvPr>
+            <p:ph type="body" idx="1"/>
+          </p:nvPr>
+        </p:nvSpPr>
+        <p:spPr/>
+        <p:txBody>
+          <a:bodyPr/>
+          <a:lstStyle/>
+          <a:p>
+            <a:r>
+              <a:rPr lang="en-US" dirty="0"/>
+              <a:t/>
+            </a:r>
+            <a:endParaRPr lang="en-US" dirty="0"/>
+          </a:p>
+        </p:txBody>
+      </p:sp>
+      <p:sp>
+        <p:nvSpPr>
+          <p:cNvPr id="4" name="Slide Number Placeholder 3"/>
+          <p:cNvSpPr>
+            <a:spLocks noGrp="1"/>
+          </p:cNvSpPr>
+          <p:nvPr>
+            <p:ph type="sldNum" sz="quarter" idx="10"/>
+          </p:nvPr>
+        </p:nvSpPr>
+        <p:spPr/>
+        <p:txBody>
+          <a:bodyPr/>
+          <a:lstStyle/>
+          <a:p>
+            <a:fld id="{F7021451-1387-4CA6-816F-3879F97B5CBC}" type="slidenum">
+              <a:rPr lang="en-US"/>
+              <a:t>17</a:t>
+            </a:fld>
+            <a:endParaRPr lang="en-US"/>
+          </a:p>
+        </p:txBody>
+      </p:sp>
+    </p:spTree>
+    <p:extLst>
+      <p:ext uri="{BB962C8B-B14F-4D97-AF65-F5344CB8AC3E}">
+        <p14:creationId xmlns:p14="http://schemas.microsoft.com/office/powerpoint/2010/main" val="1024086991"/>
+      </p:ext>
+    </p:extLst>
+  </p:cSld>
+  <p:clrMapOvr>
+    <a:masterClrMapping/>
+  </p:clrMapOvr>
+</p:notes>
+</file>
+
+<file path=ppt/notesSlides/notesSlide18.xml><?xml version="1.0" encoding="utf-8"?>
+<p:notes xmlns:a="http://schemas.openxmlformats.org/drawingml/2006/main" xmlns:r="http://schemas.openxmlformats.org/officeDocument/2006/relationships" xmlns:p="http://schemas.openxmlformats.org/presentationml/2006/main">
+  <p:cSld>
+    <p:spTree>
+      <p:nvGrpSpPr>
+        <p:cNvPr id="1" name=""/>
+        <p:cNvGrpSpPr/>
+        <p:nvPr/>
+      </p:nvGrpSpPr>
+      <p:grpSpPr>
+        <a:xfrm>
+          <a:off x="0" y="0"/>
+          <a:ext cx="0" cy="0"/>
+          <a:chOff x="0" y="0"/>
+          <a:chExt cx="0" cy="0"/>
+        </a:xfrm>
+      </p:grpSpPr>
+      <p:sp>
+        <p:nvSpPr>
+          <p:cNvPr id="2" name="Slide Image Placeholder 1"/>
+          <p:cNvSpPr>
+            <a:spLocks noGrp="1" noRot="1" noChangeAspect="1"/>
+          </p:cNvSpPr>
+          <p:nvPr>
+            <p:ph type="sldImg"/>
+          </p:nvPr>
+        </p:nvSpPr>
+        <p:spPr/>
+      </p:sp>
+      <p:sp>
+        <p:nvSpPr>
+          <p:cNvPr id="3" name="Notes Placeholder 2"/>
+          <p:cNvSpPr>
+            <a:spLocks noGrp="1"/>
+          </p:cNvSpPr>
+          <p:nvPr>
+            <p:ph type="body" idx="1"/>
+          </p:nvPr>
+        </p:nvSpPr>
+        <p:spPr/>
+        <p:txBody>
+          <a:bodyPr/>
+          <a:lstStyle/>
+          <a:p>
+            <a:r>
+              <a:rPr lang="en-US" dirty="0"/>
+              <a:t/>
+            </a:r>
+            <a:endParaRPr lang="en-US" dirty="0"/>
+          </a:p>
+        </p:txBody>
+      </p:sp>
+      <p:sp>
+        <p:nvSpPr>
+          <p:cNvPr id="4" name="Slide Number Placeholder 3"/>
+          <p:cNvSpPr>
+            <a:spLocks noGrp="1"/>
+          </p:cNvSpPr>
+          <p:nvPr>
+            <p:ph type="sldNum" sz="quarter" idx="10"/>
+          </p:nvPr>
+        </p:nvSpPr>
+        <p:spPr/>
+        <p:txBody>
+          <a:bodyPr/>
+          <a:lstStyle/>
+          <a:p>
+            <a:fld id="{F7021451-1387-4CA6-816F-3879F97B5CBC}" type="slidenum">
+              <a:rPr lang="en-US"/>
+              <a:t>18</a:t>
+            </a:fld>
+            <a:endParaRPr lang="en-US"/>
+          </a:p>
+        </p:txBody>
+      </p:sp>
+    </p:spTree>
+    <p:extLst>
+      <p:ext uri="{BB962C8B-B14F-4D97-AF65-F5344CB8AC3E}">
+        <p14:creationId xmlns:p14="http://schemas.microsoft.com/office/powerpoint/2010/main" val="1024086991"/>
+      </p:ext>
+    </p:extLst>
+  </p:cSld>
+  <p:clrMapOvr>
+    <a:masterClrMapping/>
+  </p:clrMapOvr>
+</p:notes>
+</file>
+
+<file path=ppt/notesSlides/notesSlide19.xml><?xml version="1.0" encoding="utf-8"?>
+<p:notes xmlns:a="http://schemas.openxmlformats.org/drawingml/2006/main" xmlns:r="http://schemas.openxmlformats.org/officeDocument/2006/relationships" xmlns:p="http://schemas.openxmlformats.org/presentationml/2006/main">
+  <p:cSld>
+    <p:spTree>
+      <p:nvGrpSpPr>
+        <p:cNvPr id="1" name=""/>
+        <p:cNvGrpSpPr/>
+        <p:nvPr/>
+      </p:nvGrpSpPr>
+      <p:grpSpPr>
+        <a:xfrm>
+          <a:off x="0" y="0"/>
+          <a:ext cx="0" cy="0"/>
+          <a:chOff x="0" y="0"/>
+          <a:chExt cx="0" cy="0"/>
+        </a:xfrm>
+      </p:grpSpPr>
+      <p:sp>
+        <p:nvSpPr>
+          <p:cNvPr id="2" name="Slide Image Placeholder 1"/>
+          <p:cNvSpPr>
+            <a:spLocks noGrp="1" noRot="1" noChangeAspect="1"/>
+          </p:cNvSpPr>
+          <p:nvPr>
+            <p:ph type="sldImg"/>
+          </p:nvPr>
+        </p:nvSpPr>
+        <p:spPr/>
+      </p:sp>
+      <p:sp>
+        <p:nvSpPr>
+          <p:cNvPr id="3" name="Notes Placeholder 2"/>
+          <p:cNvSpPr>
+            <a:spLocks noGrp="1"/>
+          </p:cNvSpPr>
+          <p:nvPr>
+            <p:ph type="body" idx="1"/>
+          </p:nvPr>
+        </p:nvSpPr>
+        <p:spPr/>
+        <p:txBody>
+          <a:bodyPr/>
+          <a:lstStyle/>
+          <a:p>
+            <a:r>
+              <a:rPr lang="en-US" dirty="0"/>
+              <a:t/>
+            </a:r>
+            <a:endParaRPr lang="en-US" dirty="0"/>
+          </a:p>
+        </p:txBody>
+      </p:sp>
+      <p:sp>
+        <p:nvSpPr>
+          <p:cNvPr id="4" name="Slide Number Placeholder 3"/>
+          <p:cNvSpPr>
+            <a:spLocks noGrp="1"/>
+          </p:cNvSpPr>
+          <p:nvPr>
+            <p:ph type="sldNum" sz="quarter" idx="10"/>
+          </p:nvPr>
+        </p:nvSpPr>
+        <p:spPr/>
+        <p:txBody>
+          <a:bodyPr/>
+          <a:lstStyle/>
+          <a:p>
+            <a:fld id="{F7021451-1387-4CA6-816F-3879F97B5CBC}" type="slidenum">
+              <a:rPr lang="en-US"/>
+              <a:t>19</a:t>
+            </a:fld>
+            <a:endParaRPr lang="en-US"/>
+          </a:p>
+        </p:txBody>
+      </p:sp>
+    </p:spTree>
+    <p:extLst>
+      <p:ext uri="{BB962C8B-B14F-4D97-AF65-F5344CB8AC3E}">
+        <p14:creationId xmlns:p14="http://schemas.microsoft.com/office/powerpoint/2010/main" val="1024086991"/>
+      </p:ext>
+    </p:extLst>
+  </p:cSld>
+  <p:clrMapOvr>
+    <a:masterClrMapping/>
+  </p:clrMapOvr>
+</p:notes>
+</file>
+
 <file path=ppt/notesSlides/notesSlide2.xml><?xml version="1.0" encoding="utf-8"?>
 <p:notes xmlns:a="http://schemas.openxmlformats.org/drawingml/2006/main" xmlns:r="http://schemas.openxmlformats.org/officeDocument/2006/relationships" xmlns:p="http://schemas.openxmlformats.org/presentationml/2006/main">
   <p:cSld>
@@ -889,6 +1517,446 @@
             <a:fld id="{F7021451-1387-4CA6-816F-3879F97B5CBC}" type="slidenum">
               <a:rPr lang="en-US"/>
               <a:t>2</a:t>
+            </a:fld>
+            <a:endParaRPr lang="en-US"/>
+          </a:p>
+        </p:txBody>
+      </p:sp>
+    </p:spTree>
+    <p:extLst>
+      <p:ext uri="{BB962C8B-B14F-4D97-AF65-F5344CB8AC3E}">
+        <p14:creationId xmlns:p14="http://schemas.microsoft.com/office/powerpoint/2010/main" val="1024086991"/>
+      </p:ext>
+    </p:extLst>
+  </p:cSld>
+  <p:clrMapOvr>
+    <a:masterClrMapping/>
+  </p:clrMapOvr>
+</p:notes>
+</file>
+
+<file path=ppt/notesSlides/notesSlide20.xml><?xml version="1.0" encoding="utf-8"?>
+<p:notes xmlns:a="http://schemas.openxmlformats.org/drawingml/2006/main" xmlns:r="http://schemas.openxmlformats.org/officeDocument/2006/relationships" xmlns:p="http://schemas.openxmlformats.org/presentationml/2006/main">
+  <p:cSld>
+    <p:spTree>
+      <p:nvGrpSpPr>
+        <p:cNvPr id="1" name=""/>
+        <p:cNvGrpSpPr/>
+        <p:nvPr/>
+      </p:nvGrpSpPr>
+      <p:grpSpPr>
+        <a:xfrm>
+          <a:off x="0" y="0"/>
+          <a:ext cx="0" cy="0"/>
+          <a:chOff x="0" y="0"/>
+          <a:chExt cx="0" cy="0"/>
+        </a:xfrm>
+      </p:grpSpPr>
+      <p:sp>
+        <p:nvSpPr>
+          <p:cNvPr id="2" name="Slide Image Placeholder 1"/>
+          <p:cNvSpPr>
+            <a:spLocks noGrp="1" noRot="1" noChangeAspect="1"/>
+          </p:cNvSpPr>
+          <p:nvPr>
+            <p:ph type="sldImg"/>
+          </p:nvPr>
+        </p:nvSpPr>
+        <p:spPr/>
+      </p:sp>
+      <p:sp>
+        <p:nvSpPr>
+          <p:cNvPr id="3" name="Notes Placeholder 2"/>
+          <p:cNvSpPr>
+            <a:spLocks noGrp="1"/>
+          </p:cNvSpPr>
+          <p:nvPr>
+            <p:ph type="body" idx="1"/>
+          </p:nvPr>
+        </p:nvSpPr>
+        <p:spPr/>
+        <p:txBody>
+          <a:bodyPr/>
+          <a:lstStyle/>
+          <a:p>
+            <a:r>
+              <a:rPr lang="en-US" dirty="0"/>
+              <a:t/>
+            </a:r>
+            <a:endParaRPr lang="en-US" dirty="0"/>
+          </a:p>
+        </p:txBody>
+      </p:sp>
+      <p:sp>
+        <p:nvSpPr>
+          <p:cNvPr id="4" name="Slide Number Placeholder 3"/>
+          <p:cNvSpPr>
+            <a:spLocks noGrp="1"/>
+          </p:cNvSpPr>
+          <p:nvPr>
+            <p:ph type="sldNum" sz="quarter" idx="10"/>
+          </p:nvPr>
+        </p:nvSpPr>
+        <p:spPr/>
+        <p:txBody>
+          <a:bodyPr/>
+          <a:lstStyle/>
+          <a:p>
+            <a:fld id="{F7021451-1387-4CA6-816F-3879F97B5CBC}" type="slidenum">
+              <a:rPr lang="en-US"/>
+              <a:t>20</a:t>
+            </a:fld>
+            <a:endParaRPr lang="en-US"/>
+          </a:p>
+        </p:txBody>
+      </p:sp>
+    </p:spTree>
+    <p:extLst>
+      <p:ext uri="{BB962C8B-B14F-4D97-AF65-F5344CB8AC3E}">
+        <p14:creationId xmlns:p14="http://schemas.microsoft.com/office/powerpoint/2010/main" val="1024086991"/>
+      </p:ext>
+    </p:extLst>
+  </p:cSld>
+  <p:clrMapOvr>
+    <a:masterClrMapping/>
+  </p:clrMapOvr>
+</p:notes>
+</file>
+
+<file path=ppt/notesSlides/notesSlide21.xml><?xml version="1.0" encoding="utf-8"?>
+<p:notes xmlns:a="http://schemas.openxmlformats.org/drawingml/2006/main" xmlns:r="http://schemas.openxmlformats.org/officeDocument/2006/relationships" xmlns:p="http://schemas.openxmlformats.org/presentationml/2006/main">
+  <p:cSld>
+    <p:spTree>
+      <p:nvGrpSpPr>
+        <p:cNvPr id="1" name=""/>
+        <p:cNvGrpSpPr/>
+        <p:nvPr/>
+      </p:nvGrpSpPr>
+      <p:grpSpPr>
+        <a:xfrm>
+          <a:off x="0" y="0"/>
+          <a:ext cx="0" cy="0"/>
+          <a:chOff x="0" y="0"/>
+          <a:chExt cx="0" cy="0"/>
+        </a:xfrm>
+      </p:grpSpPr>
+      <p:sp>
+        <p:nvSpPr>
+          <p:cNvPr id="2" name="Slide Image Placeholder 1"/>
+          <p:cNvSpPr>
+            <a:spLocks noGrp="1" noRot="1" noChangeAspect="1"/>
+          </p:cNvSpPr>
+          <p:nvPr>
+            <p:ph type="sldImg"/>
+          </p:nvPr>
+        </p:nvSpPr>
+        <p:spPr/>
+      </p:sp>
+      <p:sp>
+        <p:nvSpPr>
+          <p:cNvPr id="3" name="Notes Placeholder 2"/>
+          <p:cNvSpPr>
+            <a:spLocks noGrp="1"/>
+          </p:cNvSpPr>
+          <p:nvPr>
+            <p:ph type="body" idx="1"/>
+          </p:nvPr>
+        </p:nvSpPr>
+        <p:spPr/>
+        <p:txBody>
+          <a:bodyPr/>
+          <a:lstStyle/>
+          <a:p>
+            <a:r>
+              <a:rPr lang="en-US" dirty="0"/>
+              <a:t/>
+            </a:r>
+            <a:endParaRPr lang="en-US" dirty="0"/>
+          </a:p>
+        </p:txBody>
+      </p:sp>
+      <p:sp>
+        <p:nvSpPr>
+          <p:cNvPr id="4" name="Slide Number Placeholder 3"/>
+          <p:cNvSpPr>
+            <a:spLocks noGrp="1"/>
+          </p:cNvSpPr>
+          <p:nvPr>
+            <p:ph type="sldNum" sz="quarter" idx="10"/>
+          </p:nvPr>
+        </p:nvSpPr>
+        <p:spPr/>
+        <p:txBody>
+          <a:bodyPr/>
+          <a:lstStyle/>
+          <a:p>
+            <a:fld id="{F7021451-1387-4CA6-816F-3879F97B5CBC}" type="slidenum">
+              <a:rPr lang="en-US"/>
+              <a:t>21</a:t>
+            </a:fld>
+            <a:endParaRPr lang="en-US"/>
+          </a:p>
+        </p:txBody>
+      </p:sp>
+    </p:spTree>
+    <p:extLst>
+      <p:ext uri="{BB962C8B-B14F-4D97-AF65-F5344CB8AC3E}">
+        <p14:creationId xmlns:p14="http://schemas.microsoft.com/office/powerpoint/2010/main" val="1024086991"/>
+      </p:ext>
+    </p:extLst>
+  </p:cSld>
+  <p:clrMapOvr>
+    <a:masterClrMapping/>
+  </p:clrMapOvr>
+</p:notes>
+</file>
+
+<file path=ppt/notesSlides/notesSlide22.xml><?xml version="1.0" encoding="utf-8"?>
+<p:notes xmlns:a="http://schemas.openxmlformats.org/drawingml/2006/main" xmlns:r="http://schemas.openxmlformats.org/officeDocument/2006/relationships" xmlns:p="http://schemas.openxmlformats.org/presentationml/2006/main">
+  <p:cSld>
+    <p:spTree>
+      <p:nvGrpSpPr>
+        <p:cNvPr id="1" name=""/>
+        <p:cNvGrpSpPr/>
+        <p:nvPr/>
+      </p:nvGrpSpPr>
+      <p:grpSpPr>
+        <a:xfrm>
+          <a:off x="0" y="0"/>
+          <a:ext cx="0" cy="0"/>
+          <a:chOff x="0" y="0"/>
+          <a:chExt cx="0" cy="0"/>
+        </a:xfrm>
+      </p:grpSpPr>
+      <p:sp>
+        <p:nvSpPr>
+          <p:cNvPr id="2" name="Slide Image Placeholder 1"/>
+          <p:cNvSpPr>
+            <a:spLocks noGrp="1" noRot="1" noChangeAspect="1"/>
+          </p:cNvSpPr>
+          <p:nvPr>
+            <p:ph type="sldImg"/>
+          </p:nvPr>
+        </p:nvSpPr>
+        <p:spPr/>
+      </p:sp>
+      <p:sp>
+        <p:nvSpPr>
+          <p:cNvPr id="3" name="Notes Placeholder 2"/>
+          <p:cNvSpPr>
+            <a:spLocks noGrp="1"/>
+          </p:cNvSpPr>
+          <p:nvPr>
+            <p:ph type="body" idx="1"/>
+          </p:nvPr>
+        </p:nvSpPr>
+        <p:spPr/>
+        <p:txBody>
+          <a:bodyPr/>
+          <a:lstStyle/>
+          <a:p>
+            <a:r>
+              <a:rPr lang="en-US" dirty="0"/>
+              <a:t/>
+            </a:r>
+            <a:endParaRPr lang="en-US" dirty="0"/>
+          </a:p>
+        </p:txBody>
+      </p:sp>
+      <p:sp>
+        <p:nvSpPr>
+          <p:cNvPr id="4" name="Slide Number Placeholder 3"/>
+          <p:cNvSpPr>
+            <a:spLocks noGrp="1"/>
+          </p:cNvSpPr>
+          <p:nvPr>
+            <p:ph type="sldNum" sz="quarter" idx="10"/>
+          </p:nvPr>
+        </p:nvSpPr>
+        <p:spPr/>
+        <p:txBody>
+          <a:bodyPr/>
+          <a:lstStyle/>
+          <a:p>
+            <a:fld id="{F7021451-1387-4CA6-816F-3879F97B5CBC}" type="slidenum">
+              <a:rPr lang="en-US"/>
+              <a:t>22</a:t>
+            </a:fld>
+            <a:endParaRPr lang="en-US"/>
+          </a:p>
+        </p:txBody>
+      </p:sp>
+    </p:spTree>
+    <p:extLst>
+      <p:ext uri="{BB962C8B-B14F-4D97-AF65-F5344CB8AC3E}">
+        <p14:creationId xmlns:p14="http://schemas.microsoft.com/office/powerpoint/2010/main" val="1024086991"/>
+      </p:ext>
+    </p:extLst>
+  </p:cSld>
+  <p:clrMapOvr>
+    <a:masterClrMapping/>
+  </p:clrMapOvr>
+</p:notes>
+</file>
+
+<file path=ppt/notesSlides/notesSlide23.xml><?xml version="1.0" encoding="utf-8"?>
+<p:notes xmlns:a="http://schemas.openxmlformats.org/drawingml/2006/main" xmlns:r="http://schemas.openxmlformats.org/officeDocument/2006/relationships" xmlns:p="http://schemas.openxmlformats.org/presentationml/2006/main">
+  <p:cSld>
+    <p:spTree>
+      <p:nvGrpSpPr>
+        <p:cNvPr id="1" name=""/>
+        <p:cNvGrpSpPr/>
+        <p:nvPr/>
+      </p:nvGrpSpPr>
+      <p:grpSpPr>
+        <a:xfrm>
+          <a:off x="0" y="0"/>
+          <a:ext cx="0" cy="0"/>
+          <a:chOff x="0" y="0"/>
+          <a:chExt cx="0" cy="0"/>
+        </a:xfrm>
+      </p:grpSpPr>
+      <p:sp>
+        <p:nvSpPr>
+          <p:cNvPr id="2" name="Slide Image Placeholder 1"/>
+          <p:cNvSpPr>
+            <a:spLocks noGrp="1" noRot="1" noChangeAspect="1"/>
+          </p:cNvSpPr>
+          <p:nvPr>
+            <p:ph type="sldImg"/>
+          </p:nvPr>
+        </p:nvSpPr>
+        <p:spPr/>
+      </p:sp>
+      <p:sp>
+        <p:nvSpPr>
+          <p:cNvPr id="3" name="Notes Placeholder 2"/>
+          <p:cNvSpPr>
+            <a:spLocks noGrp="1"/>
+          </p:cNvSpPr>
+          <p:nvPr>
+            <p:ph type="body" idx="1"/>
+          </p:nvPr>
+        </p:nvSpPr>
+        <p:spPr/>
+        <p:txBody>
+          <a:bodyPr/>
+          <a:lstStyle/>
+          <a:p>
+            <a:r>
+              <a:rPr lang="en-US" dirty="0"/>
+              <a:t/>
+            </a:r>
+            <a:endParaRPr lang="en-US" dirty="0"/>
+          </a:p>
+        </p:txBody>
+      </p:sp>
+      <p:sp>
+        <p:nvSpPr>
+          <p:cNvPr id="4" name="Slide Number Placeholder 3"/>
+          <p:cNvSpPr>
+            <a:spLocks noGrp="1"/>
+          </p:cNvSpPr>
+          <p:nvPr>
+            <p:ph type="sldNum" sz="quarter" idx="10"/>
+          </p:nvPr>
+        </p:nvSpPr>
+        <p:spPr/>
+        <p:txBody>
+          <a:bodyPr/>
+          <a:lstStyle/>
+          <a:p>
+            <a:fld id="{F7021451-1387-4CA6-816F-3879F97B5CBC}" type="slidenum">
+              <a:rPr lang="en-US"/>
+              <a:t>23</a:t>
+            </a:fld>
+            <a:endParaRPr lang="en-US"/>
+          </a:p>
+        </p:txBody>
+      </p:sp>
+    </p:spTree>
+    <p:extLst>
+      <p:ext uri="{BB962C8B-B14F-4D97-AF65-F5344CB8AC3E}">
+        <p14:creationId xmlns:p14="http://schemas.microsoft.com/office/powerpoint/2010/main" val="1024086991"/>
+      </p:ext>
+    </p:extLst>
+  </p:cSld>
+  <p:clrMapOvr>
+    <a:masterClrMapping/>
+  </p:clrMapOvr>
+</p:notes>
+</file>
+
+<file path=ppt/notesSlides/notesSlide24.xml><?xml version="1.0" encoding="utf-8"?>
+<p:notes xmlns:a="http://schemas.openxmlformats.org/drawingml/2006/main" xmlns:r="http://schemas.openxmlformats.org/officeDocument/2006/relationships" xmlns:p="http://schemas.openxmlformats.org/presentationml/2006/main">
+  <p:cSld>
+    <p:spTree>
+      <p:nvGrpSpPr>
+        <p:cNvPr id="1" name=""/>
+        <p:cNvGrpSpPr/>
+        <p:nvPr/>
+      </p:nvGrpSpPr>
+      <p:grpSpPr>
+        <a:xfrm>
+          <a:off x="0" y="0"/>
+          <a:ext cx="0" cy="0"/>
+          <a:chOff x="0" y="0"/>
+          <a:chExt cx="0" cy="0"/>
+        </a:xfrm>
+      </p:grpSpPr>
+      <p:sp>
+        <p:nvSpPr>
+          <p:cNvPr id="2" name="Slide Image Placeholder 1"/>
+          <p:cNvSpPr>
+            <a:spLocks noGrp="1" noRot="1" noChangeAspect="1"/>
+          </p:cNvSpPr>
+          <p:nvPr>
+            <p:ph type="sldImg"/>
+          </p:nvPr>
+        </p:nvSpPr>
+        <p:spPr/>
+      </p:sp>
+      <p:sp>
+        <p:nvSpPr>
+          <p:cNvPr id="3" name="Notes Placeholder 2"/>
+          <p:cNvSpPr>
+            <a:spLocks noGrp="1"/>
+          </p:cNvSpPr>
+          <p:nvPr>
+            <p:ph type="body" idx="1"/>
+          </p:nvPr>
+        </p:nvSpPr>
+        <p:spPr/>
+        <p:txBody>
+          <a:bodyPr/>
+          <a:lstStyle/>
+          <a:p>
+            <a:r>
+              <a:rPr lang="en-US" dirty="0"/>
+              <a:t/>
+            </a:r>
+            <a:endParaRPr lang="en-US" dirty="0"/>
+          </a:p>
+        </p:txBody>
+      </p:sp>
+      <p:sp>
+        <p:nvSpPr>
+          <p:cNvPr id="4" name="Slide Number Placeholder 3"/>
+          <p:cNvSpPr>
+            <a:spLocks noGrp="1"/>
+          </p:cNvSpPr>
+          <p:nvPr>
+            <p:ph type="sldNum" sz="quarter" idx="10"/>
+          </p:nvPr>
+        </p:nvSpPr>
+        <p:spPr/>
+        <p:txBody>
+          <a:bodyPr/>
+          <a:lstStyle/>
+          <a:p>
+            <a:fld id="{F7021451-1387-4CA6-816F-3879F97B5CBC}" type="slidenum">
+              <a:rPr lang="en-US"/>
+              <a:t>24</a:t>
             </a:fld>
             <a:endParaRPr lang="en-US"/>
           </a:p>
@@ -2146,194 +3214,6 @@
         </p:nvSpPr>
         <p:spPr>
           <a:xfrm>
-            <a:off x="406301" y="1223963"/>
-            <a:ext cx="8498026" cy="274290"/>
-          </a:xfrm>
-          <a:prstGeom prst="rect">
-            <a:avLst/>
-          </a:prstGeom>
-          <a:noFill/>
-          <a:ln/>
-        </p:spPr>
-        <p:txBody>
-          <a:bodyPr wrap="square" lIns="0" tIns="0" rIns="0" bIns="0" rtlCol="0" anchor="t"/>
-          <a:lstStyle/>
-          <a:p>
-            <a:pPr algn="l" indent="0" marL="0">
-              <a:lnSpc>
-                <a:spcPts val="2160"/>
-              </a:lnSpc>
-              <a:spcBef>
-                <a:spcPts val="600"/>
-              </a:spcBef>
-              <a:spcAft>
-                <a:spcPts val="800"/>
-              </a:spcAft>
-              <a:buNone/>
-            </a:pPr>
-            <a:r>
-              <a:rPr lang="en-US" sz="1800" b="1" dirty="0">
-                <a:solidFill>
-                  <a:srgbClr val="FE4447"/>
-                </a:solidFill>
-                <a:latin typeface="Georgia" pitchFamily="34" charset="0"/>
-                <a:ea typeface="Georgia" pitchFamily="34" charset="-122"/>
-                <a:cs typeface="Georgia" pitchFamily="34" charset="-120"/>
-              </a:rPr>
-              <a:t>Learning objective</a:t>
-            </a:r>
-            <a:endParaRPr lang="en-US" sz="1800" dirty="0"/>
-          </a:p>
-        </p:txBody>
-      </p:sp>
-      <p:sp>
-        <p:nvSpPr>
-          <p:cNvPr id="6" name="Text 4"/>
-          <p:cNvSpPr/>
-          <p:nvPr/>
-        </p:nvSpPr>
-        <p:spPr>
-          <a:xfrm>
-            <a:off x="406301" y="1637854"/>
-            <a:ext cx="8498026" cy="426541"/>
-          </a:xfrm>
-          <a:prstGeom prst="rect">
-            <a:avLst/>
-          </a:prstGeom>
-          <a:noFill/>
-          <a:ln/>
-        </p:spPr>
-        <p:txBody>
-          <a:bodyPr wrap="square" lIns="0" tIns="0" rIns="0" bIns="0" rtlCol="0" anchor="t"/>
-          <a:lstStyle/>
-          <a:p>
-            <a:pPr algn="l" indent="0" marL="0">
-              <a:lnSpc>
-                <a:spcPts val="1680"/>
-              </a:lnSpc>
-              <a:spcBef>
-                <a:spcPts val="300"/>
-              </a:spcBef>
-              <a:spcAft>
-                <a:spcPts val="300"/>
-              </a:spcAft>
-              <a:buNone/>
-            </a:pPr>
-            <a:r>
-              <a:rPr lang="en-US" sz="1200" dirty="0">
-                <a:solidFill>
-                  <a:srgbClr val="1C2833"/>
-                </a:solidFill>
-                <a:latin typeface="Arial" pitchFamily="34" charset="0"/>
-                <a:ea typeface="Arial" pitchFamily="34" charset="-122"/>
-                <a:cs typeface="Arial" pitchFamily="34" charset="-120"/>
-              </a:rPr>
-              <a:t>By the end of this lesson, students will (a) identify the Chinese </a:t>
-            </a:r>
-            <a:pPr algn="l" indent="0" marL="0">
-              <a:lnSpc>
-                <a:spcPts val="1680"/>
-              </a:lnSpc>
-              <a:spcBef>
-                <a:spcPts val="300"/>
-              </a:spcBef>
-              <a:spcAft>
-                <a:spcPts val="300"/>
-              </a:spcAft>
-              <a:buNone/>
-            </a:pPr>
-            <a:r>
-              <a:rPr lang="en-US" sz="1200" i="1" dirty="0">
-                <a:solidFill>
-                  <a:srgbClr val="1C2833"/>
-                </a:solidFill>
-                <a:latin typeface="Arial" pitchFamily="34" charset="0"/>
-                <a:ea typeface="Arial" pitchFamily="34" charset="-122"/>
-                <a:cs typeface="Arial" pitchFamily="34" charset="-120"/>
-              </a:rPr>
-              <a:t>Lo Shu</a:t>
-            </a:r>
-            <a:pPr algn="l" indent="0" marL="0">
-              <a:lnSpc>
-                <a:spcPts val="1680"/>
-              </a:lnSpc>
-              <a:spcBef>
-                <a:spcPts val="300"/>
-              </a:spcBef>
-              <a:spcAft>
-                <a:spcPts val="300"/>
-              </a:spcAft>
-              <a:buNone/>
-            </a:pPr>
-            <a:r>
-              <a:rPr lang="en-US" sz="1200" dirty="0">
-                <a:solidFill>
-                  <a:srgbClr val="1C2833"/>
-                </a:solidFill>
-                <a:latin typeface="Arial" pitchFamily="34" charset="0"/>
-                <a:ea typeface="Arial" pitchFamily="34" charset="-122"/>
-                <a:cs typeface="Arial" pitchFamily="34" charset="-120"/>
-              </a:rPr>
-              <a:t> and Albrecht Dürer's </a:t>
-            </a:r>
-            <a:pPr algn="l" indent="0" marL="0">
-              <a:lnSpc>
-                <a:spcPts val="1680"/>
-              </a:lnSpc>
-              <a:spcBef>
-                <a:spcPts val="300"/>
-              </a:spcBef>
-              <a:spcAft>
-                <a:spcPts val="300"/>
-              </a:spcAft>
-              <a:buNone/>
-            </a:pPr>
-            <a:r>
-              <a:rPr lang="en-US" sz="1200" i="1" dirty="0">
-                <a:solidFill>
-                  <a:srgbClr val="1C2833"/>
-                </a:solidFill>
-                <a:latin typeface="Arial" pitchFamily="34" charset="0"/>
-                <a:ea typeface="Arial" pitchFamily="34" charset="-122"/>
-                <a:cs typeface="Arial" pitchFamily="34" charset="-120"/>
-              </a:rPr>
-              <a:t>Melencolia I</a:t>
-            </a:r>
-            <a:pPr algn="l" indent="0" marL="0">
-              <a:lnSpc>
-                <a:spcPts val="1680"/>
-              </a:lnSpc>
-              <a:spcBef>
-                <a:spcPts val="300"/>
-              </a:spcBef>
-              <a:spcAft>
-                <a:spcPts val="300"/>
-              </a:spcAft>
-              <a:buNone/>
-            </a:pPr>
-            <a:r>
-              <a:rPr lang="en-US" sz="1200" dirty="0">
-                <a:solidFill>
-                  <a:srgbClr val="1C2833"/>
-                </a:solidFill>
-                <a:latin typeface="Arial" pitchFamily="34" charset="0"/>
-                <a:ea typeface="Arial" pitchFamily="34" charset="-122"/>
-                <a:cs typeface="Arial" pitchFamily="34" charset="-120"/>
-              </a:rPr>
-              <a:t> magic squares, (b) note structural similarities and differences across cultures, and (c) begin their project planning.</a:t>
-            </a:r>
-            <a:endParaRPr lang="en-US" sz="1200" dirty="0"/>
-          </a:p>
-        </p:txBody>
-      </p:sp>
-      <p:sp>
-        <p:nvSpPr>
-          <p:cNvPr id="7" name="Text 5"/>
-          <p:cNvSpPr/>
-          <p:nvPr/>
-        </p:nvSpPr>
-        <p:spPr>
-          <a:xfrm>
             <a:off x="406301" y="4434929"/>
             <a:ext cx="8498026" cy="213271"/>
           </a:xfrm>
@@ -2478,7 +3358,7 @@
                 <a:ea typeface="Georgia" pitchFamily="34" charset="-122"/>
                 <a:cs typeface="Georgia" pitchFamily="34" charset="-120"/>
               </a:rPr>
-              <a:t>Differentiation</a:t>
+              <a:t>Core (20 min) (cont.)</a:t>
             </a:r>
             <a:endParaRPr lang="en-US" sz="1800" dirty="0"/>
           </a:p>
@@ -2493,7 +3373,7 @@
         <p:spPr>
           <a:xfrm>
             <a:off x="634901" y="883593"/>
-            <a:ext cx="8102798" cy="937022"/>
+            <a:ext cx="8102798" cy="281880"/>
           </a:xfrm>
           <a:prstGeom prst="rect">
             <a:avLst/>
@@ -2515,17 +3395,6 @@
               <a:buSzPct val="100000"/>
               <a:buChar char="•"/>
             </a:pPr>
-            <a:r>
-              <a:rPr lang="en-US" sz="1200" b="1" dirty="0">
-                <a:solidFill>
-                  <a:srgbClr val="1C2833"/>
-                </a:solidFill>
-                <a:latin typeface="Arial" pitchFamily="34" charset="0"/>
-                <a:ea typeface="Arial" pitchFamily="34" charset="-122"/>
-                <a:cs typeface="Arial" pitchFamily="34" charset="-120"/>
-              </a:rPr>
-              <a:t>One tier up:</a:t>
-            </a:r>
             <a:pPr algn="l" indent="0" marL="0">
               <a:lnSpc>
                 <a:spcPts val="1620"/>
@@ -2536,6 +3405,26 @@
               <a:buNone/>
             </a:pPr>
             <a:r>
+              <a:rPr lang="en-US" sz="1200" i="1" dirty="0">
+                <a:solidFill>
+                  <a:srgbClr val="1C2833"/>
+                </a:solidFill>
+                <a:latin typeface="Arial" pitchFamily="34" charset="0"/>
+                <a:ea typeface="Arial" pitchFamily="34" charset="-122"/>
+                <a:cs typeface="Arial" pitchFamily="34" charset="-120"/>
+              </a:rPr>
+              <a:t>Dürer's</a:t>
+            </a:r>
+            <a:pPr algn="l" indent="0" marL="0">
+              <a:lnSpc>
+                <a:spcPts val="1620"/>
+              </a:lnSpc>
+              <a:spcAft>
+                <a:spcPts val="300"/>
+              </a:spcAft>
+              <a:buNone/>
+            </a:pPr>
+            <a:r>
               <a:rPr lang="en-US" sz="1200" dirty="0">
                 <a:solidFill>
                   <a:srgbClr val="1C2833"/>
@@ -2544,7 +3433,7 @@
                 <a:ea typeface="Arial" pitchFamily="34" charset="-122"/>
                 <a:cs typeface="Arial" pitchFamily="34" charset="-120"/>
               </a:rPr>
-              <a:t> Look up one more cultural example (e.g. al-Bīrūnī's magic squares, or the Jain </a:t>
+              <a:t>Melencolia I</a:t>
             </a:r>
             <a:pPr algn="l" indent="0" marL="0">
               <a:lnSpc>
@@ -2564,7 +3453,7 @@
                 <a:ea typeface="Arial" pitchFamily="34" charset="-122"/>
                 <a:cs typeface="Arial" pitchFamily="34" charset="-120"/>
               </a:rPr>
-              <a:t>Pārśvanātha</a:t>
+              <a:t> (Germany, 1514 CE).</a:t>
             </a:r>
             <a:pPr algn="l" indent="0" marL="0">
               <a:lnSpc>
@@ -2584,36 +3473,40 @@
                 <a:ea typeface="Arial" pitchFamily="34" charset="-122"/>
                 <a:cs typeface="Arial" pitchFamily="34" charset="-120"/>
               </a:rPr>
-              <a:t> yantra). Bring an image and a verified magic constant.</a:t>
+              <a:t>*</a:t>
             </a:r>
             <a:endParaRPr lang="en-US" sz="1200" dirty="0"/>
           </a:p>
-          <a:p>
-            <a:pPr algn="l" marL="342900" indent="-342900">
-              <a:lnSpc>
-                <a:spcPts val="1620"/>
-              </a:lnSpc>
-              <a:spcAft>
-                <a:spcPts val="300"/>
-              </a:spcAft>
-              <a:buSzPct val="100000"/>
-              <a:buChar char="•"/>
-            </a:pPr>
-            <a:r>
-              <a:rPr lang="en-US" sz="1200" b="1" dirty="0">
-                <a:solidFill>
-                  <a:srgbClr val="1C2833"/>
-                </a:solidFill>
-                <a:latin typeface="Arial" pitchFamily="34" charset="0"/>
-                <a:ea typeface="Arial" pitchFamily="34" charset="-122"/>
-                <a:cs typeface="Arial" pitchFamily="34" charset="-120"/>
-              </a:rPr>
-              <a:t>One tier down:</a:t>
-            </a:r>
-            <a:pPr algn="l" indent="0" marL="0">
-              <a:lnSpc>
-                <a:spcPts val="1620"/>
-              </a:lnSpc>
+        </p:txBody>
+      </p:sp>
+      <p:sp>
+        <p:nvSpPr>
+          <p:cNvPr id="5" name="Text 3"/>
+          <p:cNvSpPr/>
+          <p:nvPr/>
+        </p:nvSpPr>
+        <p:spPr>
+          <a:xfrm>
+            <a:off x="406301" y="1254323"/>
+            <a:ext cx="8498026" cy="213271"/>
+          </a:xfrm>
+          <a:prstGeom prst="rect">
+            <a:avLst/>
+          </a:prstGeom>
+          <a:noFill/>
+          <a:ln/>
+        </p:spPr>
+        <p:txBody>
+          <a:bodyPr wrap="square" lIns="0" tIns="0" rIns="0" bIns="0" rtlCol="0" anchor="t"/>
+          <a:lstStyle/>
+          <a:p>
+            <a:pPr algn="l" indent="0" marL="0">
+              <a:lnSpc>
+                <a:spcPts val="1680"/>
+              </a:lnSpc>
+              <a:spcBef>
+                <a:spcPts val="300"/>
+              </a:spcBef>
               <a:spcAft>
                 <a:spcPts val="300"/>
               </a:spcAft>
@@ -2628,7 +3521,7 @@
                 <a:ea typeface="Arial" pitchFamily="34" charset="-122"/>
                 <a:cs typeface="Arial" pitchFamily="34" charset="-120"/>
               </a:rPr>
-              <a:t> Focus on one comparison: how is the Lo Shu the same as our Day-1 square? Trace the rotation that takes one into the other.</a:t>
+              <a:t>The 4×4 in Dürer's engraving:</a:t>
             </a:r>
             <a:endParaRPr lang="en-US" sz="1200" dirty="0"/>
           </a:p>
@@ -2636,7 +3529,7 @@
       </p:sp>
       <p:sp>
         <p:nvSpPr>
-          <p:cNvPr id="5" name="Text 3"/>
+          <p:cNvPr id="6" name="Text 4"/>
           <p:cNvSpPr/>
           <p:nvPr/>
         </p:nvSpPr>
@@ -2786,7 +3679,7 @@
                 <a:ea typeface="Georgia" pitchFamily="34" charset="-122"/>
                 <a:cs typeface="Georgia" pitchFamily="34" charset="-120"/>
               </a:rPr>
-              <a:t>Teacher notes</a:t>
+              <a:t>Core (20 min) (cont.)</a:t>
             </a:r>
             <a:endParaRPr lang="en-US" sz="1800" dirty="0"/>
           </a:p>
@@ -2800,13 +3693,66 @@
         </p:nvSpPr>
         <p:spPr>
           <a:xfrm>
-            <a:off x="406301" y="870942"/>
-            <a:ext cx="8498026" cy="1066354"/>
-          </a:xfrm>
-          <a:prstGeom prst="rect">
+            <a:off x="406301" y="883593"/>
+            <a:ext cx="8331398" cy="1475929"/>
+          </a:xfrm>
+          <a:prstGeom prst="rect">
+            <a:avLst/>
+          </a:prstGeom>
+          <a:solidFill>
+            <a:srgbClr val="F4F8F9"/>
+          </a:solidFill>
+          <a:ln/>
+        </p:spPr>
+        <p:txBody>
+          <a:bodyPr wrap="square" rtlCol="0" anchor="ctr"/>
+          <a:lstStyle/>
+          <a:p>
+            <a:pPr indent="0" marL="0">
+              <a:buNone/>
+            </a:pPr>
+            <a:endParaRPr lang="en-US" dirty="0"/>
+          </a:p>
+        </p:txBody>
+      </p:sp>
+      <p:sp>
+        <p:nvSpPr>
+          <p:cNvPr id="5" name="Shape 3"/>
+          <p:cNvSpPr/>
+          <p:nvPr/>
+        </p:nvSpPr>
+        <p:spPr>
+          <a:xfrm>
+            <a:off x="430113" y="883593"/>
+            <a:ext cx="0" cy="1475929"/>
+          </a:xfrm>
+          <a:prstGeom prst="line">
             <a:avLst/>
           </a:prstGeom>
           <a:noFill/>
+          <a:ln w="47625">
+            <a:solidFill>
+              <a:srgbClr val="277884"/>
+            </a:solidFill>
+            <a:prstDash val="solid"/>
+          </a:ln>
+        </p:spPr>
+      </p:sp>
+      <p:sp>
+        <p:nvSpPr>
+          <p:cNvPr id="6" name="Text 4"/>
+          <p:cNvSpPr/>
+          <p:nvPr/>
+        </p:nvSpPr>
+        <p:spPr>
+          <a:xfrm>
+            <a:off x="631627" y="1010543"/>
+            <a:ext cx="8086939" cy="174575"/>
+          </a:xfrm>
+          <a:prstGeom prst="rect">
+            <a:avLst/>
+          </a:prstGeom>
+          <a:noFill/>
           <a:ln/>
         </p:spPr>
         <p:txBody>
@@ -2815,218 +3761,280 @@
           <a:p>
             <a:pPr algn="l" indent="0" marL="0">
               <a:lnSpc>
-                <a:spcPts val="1680"/>
-              </a:lnSpc>
-              <a:spcBef>
-                <a:spcPts val="300"/>
-              </a:spcBef>
-              <a:spcAft>
-                <a:spcPts val="300"/>
-              </a:spcAft>
-              <a:buNone/>
-            </a:pPr>
-            <a:r>
-              <a:rPr lang="en-US" sz="1200" dirty="0">
-                <a:solidFill>
-                  <a:srgbClr val="1C2833"/>
-                </a:solidFill>
-                <a:latin typeface="Arial" pitchFamily="34" charset="0"/>
-                <a:ea typeface="Arial" pitchFamily="34" charset="-122"/>
-                <a:cs typeface="Arial" pitchFamily="34" charset="-120"/>
-              </a:rPr>
-              <a:t>– Don't fall into "ancient Indians invented this first" framing. The Lo Shu is older than any dated Indian magic square we have. Nārāyaṇa's contribution is the </a:t>
-            </a:r>
-            <a:pPr algn="l" indent="0" marL="0">
-              <a:lnSpc>
-                <a:spcPts val="1680"/>
-              </a:lnSpc>
-              <a:spcBef>
-                <a:spcPts val="300"/>
-              </a:spcBef>
-              <a:spcAft>
-                <a:spcPts val="300"/>
-              </a:spcAft>
-              <a:buNone/>
-            </a:pPr>
-            <a:r>
-              <a:rPr lang="en-US" sz="1200" i="1" dirty="0">
-                <a:solidFill>
-                  <a:srgbClr val="1C2833"/>
-                </a:solidFill>
-                <a:latin typeface="Arial" pitchFamily="34" charset="0"/>
-                <a:ea typeface="Arial" pitchFamily="34" charset="-122"/>
-                <a:cs typeface="Arial" pitchFamily="34" charset="-120"/>
-              </a:rPr>
-              <a:t>systematic method</a:t>
-            </a:r>
-            <a:pPr algn="l" indent="0" marL="0">
-              <a:lnSpc>
-                <a:spcPts val="1680"/>
-              </a:lnSpc>
-              <a:spcBef>
-                <a:spcPts val="300"/>
-              </a:spcBef>
-              <a:spcAft>
-                <a:spcPts val="300"/>
-              </a:spcAft>
-              <a:buNone/>
-            </a:pPr>
-            <a:r>
-              <a:rPr lang="en-US" sz="1200" dirty="0">
-                <a:solidFill>
-                  <a:srgbClr val="1C2833"/>
-                </a:solidFill>
-                <a:latin typeface="Arial" pitchFamily="34" charset="0"/>
-                <a:ea typeface="Arial" pitchFamily="34" charset="-122"/>
-                <a:cs typeface="Arial" pitchFamily="34" charset="-120"/>
-              </a:rPr>
-              <a:t>, not the </a:t>
-            </a:r>
-            <a:pPr algn="l" indent="0" marL="0">
-              <a:lnSpc>
-                <a:spcPts val="1680"/>
-              </a:lnSpc>
-              <a:spcBef>
-                <a:spcPts val="300"/>
-              </a:spcBef>
-              <a:spcAft>
-                <a:spcPts val="300"/>
-              </a:spcAft>
-              <a:buNone/>
-            </a:pPr>
-            <a:r>
-              <a:rPr lang="en-US" sz="1200" i="1" dirty="0">
-                <a:solidFill>
-                  <a:srgbClr val="1C2833"/>
-                </a:solidFill>
-                <a:latin typeface="Arial" pitchFamily="34" charset="0"/>
-                <a:ea typeface="Arial" pitchFamily="34" charset="-122"/>
-                <a:cs typeface="Arial" pitchFamily="34" charset="-120"/>
-              </a:rPr>
-              <a:t>first discovery</a:t>
-            </a:r>
-            <a:pPr algn="l" indent="0" marL="0">
-              <a:lnSpc>
-                <a:spcPts val="1680"/>
-              </a:lnSpc>
-              <a:spcBef>
-                <a:spcPts val="300"/>
-              </a:spcBef>
-              <a:spcAft>
-                <a:spcPts val="300"/>
-              </a:spcAft>
-              <a:buNone/>
-            </a:pPr>
-            <a:r>
-              <a:rPr lang="en-US" sz="1200" dirty="0">
-                <a:solidFill>
-                  <a:srgbClr val="1C2833"/>
-                </a:solidFill>
-                <a:latin typeface="Arial" pitchFamily="34" charset="0"/>
-                <a:ea typeface="Arial" pitchFamily="34" charset="-122"/>
-                <a:cs typeface="Arial" pitchFamily="34" charset="-120"/>
-              </a:rPr>
-              <a:t>. – The Dürer corner being a date (1514) often delights students. Use that delight to motivate the project. – Some students will see the Khajuraho ~10th-c. dating and conclude it predates Lo Shu. That is incorrect. The Lo Shu has earlier documented evidence (Han dynasty texts). Be clear about which dates are </a:t>
-            </a:r>
-            <a:pPr algn="l" indent="0" marL="0">
-              <a:lnSpc>
-                <a:spcPts val="1680"/>
-              </a:lnSpc>
-              <a:spcBef>
-                <a:spcPts val="300"/>
-              </a:spcBef>
-              <a:spcAft>
-                <a:spcPts val="300"/>
-              </a:spcAft>
-              <a:buNone/>
-            </a:pPr>
-            <a:r>
-              <a:rPr lang="en-US" sz="1200" i="1" dirty="0">
-                <a:solidFill>
-                  <a:srgbClr val="1C2833"/>
-                </a:solidFill>
-                <a:latin typeface="Arial" pitchFamily="34" charset="0"/>
-                <a:ea typeface="Arial" pitchFamily="34" charset="-122"/>
-                <a:cs typeface="Arial" pitchFamily="34" charset="-120"/>
-              </a:rPr>
-              <a:t>attestations</a:t>
-            </a:r>
-            <a:pPr algn="l" indent="0" marL="0">
-              <a:lnSpc>
-                <a:spcPts val="1680"/>
-              </a:lnSpc>
-              <a:spcBef>
-                <a:spcPts val="300"/>
-              </a:spcBef>
-              <a:spcAft>
-                <a:spcPts val="300"/>
-              </a:spcAft>
-              <a:buNone/>
-            </a:pPr>
-            <a:r>
-              <a:rPr lang="en-US" sz="1200" dirty="0">
-                <a:solidFill>
-                  <a:srgbClr val="1C2833"/>
-                </a:solidFill>
-                <a:latin typeface="Arial" pitchFamily="34" charset="0"/>
-                <a:ea typeface="Arial" pitchFamily="34" charset="-122"/>
-                <a:cs typeface="Arial" pitchFamily="34" charset="-120"/>
-              </a:rPr>
-              <a:t> and which are </a:t>
-            </a:r>
-            <a:pPr algn="l" indent="0" marL="0">
-              <a:lnSpc>
-                <a:spcPts val="1680"/>
-              </a:lnSpc>
-              <a:spcBef>
-                <a:spcPts val="300"/>
-              </a:spcBef>
-              <a:spcAft>
-                <a:spcPts val="300"/>
-              </a:spcAft>
-              <a:buNone/>
-            </a:pPr>
-            <a:r>
-              <a:rPr lang="en-US" sz="1200" i="1" dirty="0">
-                <a:solidFill>
-                  <a:srgbClr val="1C2833"/>
-                </a:solidFill>
-                <a:latin typeface="Arial" pitchFamily="34" charset="0"/>
-                <a:ea typeface="Arial" pitchFamily="34" charset="-122"/>
-                <a:cs typeface="Arial" pitchFamily="34" charset="-120"/>
-              </a:rPr>
-              <a:t>legends</a:t>
-            </a:r>
-            <a:pPr algn="l" indent="0" marL="0">
-              <a:lnSpc>
-                <a:spcPts val="1680"/>
-              </a:lnSpc>
-              <a:spcBef>
-                <a:spcPts val="300"/>
-              </a:spcBef>
-              <a:spcAft>
-                <a:spcPts val="300"/>
-              </a:spcAft>
-              <a:buNone/>
-            </a:pPr>
-            <a:r>
-              <a:rPr lang="en-US" sz="1200" dirty="0">
-                <a:solidFill>
-                  <a:srgbClr val="1C2833"/>
-                </a:solidFill>
-                <a:latin typeface="Arial" pitchFamily="34" charset="0"/>
-                <a:ea typeface="Arial" pitchFamily="34" charset="-122"/>
-                <a:cs typeface="Arial" pitchFamily="34" charset="-120"/>
-              </a:rPr>
-              <a:t>.</a:t>
-            </a:r>
-            <a:endParaRPr lang="en-US" sz="1200" dirty="0"/>
-          </a:p>
-        </p:txBody>
-      </p:sp>
-      <p:sp>
-        <p:nvSpPr>
-          <p:cNvPr id="5" name="Text 3"/>
+                <a:spcPts val="1375"/>
+              </a:lnSpc>
+              <a:buNone/>
+            </a:pPr>
+            <a:r>
+              <a:rPr lang="en-US" sz="1100" dirty="0">
+                <a:solidFill>
+                  <a:srgbClr val="1C2833"/>
+                </a:solidFill>
+                <a:latin typeface="Courier New" pitchFamily="34" charset="0"/>
+                <a:ea typeface="Courier New" pitchFamily="34" charset="-122"/>
+                <a:cs typeface="Courier New" pitchFamily="34" charset="-120"/>
+              </a:rPr>
+              <a:t>16 |  3 |  2 | 13</a:t>
+            </a:r>
+            <a:endParaRPr lang="en-US" sz="1100" dirty="0"/>
+          </a:p>
+        </p:txBody>
+      </p:sp>
+      <p:sp>
+        <p:nvSpPr>
+          <p:cNvPr id="7" name="Text 5"/>
+          <p:cNvSpPr/>
+          <p:nvPr/>
+        </p:nvSpPr>
+        <p:spPr>
+          <a:xfrm>
+            <a:off x="631627" y="1185118"/>
+            <a:ext cx="8086939" cy="174575"/>
+          </a:xfrm>
+          <a:prstGeom prst="rect">
+            <a:avLst/>
+          </a:prstGeom>
+          <a:noFill/>
+          <a:ln/>
+        </p:spPr>
+        <p:txBody>
+          <a:bodyPr wrap="square" lIns="0" tIns="0" rIns="0" bIns="0" rtlCol="0" anchor="t"/>
+          <a:lstStyle/>
+          <a:p>
+            <a:pPr algn="l" indent="0" marL="0">
+              <a:lnSpc>
+                <a:spcPts val="1375"/>
+              </a:lnSpc>
+              <a:buNone/>
+            </a:pPr>
+            <a:r>
+              <a:rPr lang="en-US" sz="1100" dirty="0">
+                <a:solidFill>
+                  <a:srgbClr val="1C2833"/>
+                </a:solidFill>
+                <a:latin typeface="Courier New" pitchFamily="34" charset="0"/>
+                <a:ea typeface="Courier New" pitchFamily="34" charset="-122"/>
+                <a:cs typeface="Courier New" pitchFamily="34" charset="-120"/>
+              </a:rPr>
+              <a:t>----------------</a:t>
+            </a:r>
+            <a:endParaRPr lang="en-US" sz="1100" dirty="0"/>
+          </a:p>
+        </p:txBody>
+      </p:sp>
+      <p:sp>
+        <p:nvSpPr>
+          <p:cNvPr id="8" name="Text 6"/>
+          <p:cNvSpPr/>
+          <p:nvPr/>
+        </p:nvSpPr>
+        <p:spPr>
+          <a:xfrm>
+            <a:off x="631627" y="1359694"/>
+            <a:ext cx="8086939" cy="174575"/>
+          </a:xfrm>
+          <a:prstGeom prst="rect">
+            <a:avLst/>
+          </a:prstGeom>
+          <a:noFill/>
+          <a:ln/>
+        </p:spPr>
+        <p:txBody>
+          <a:bodyPr wrap="square" lIns="0" tIns="0" rIns="0" bIns="0" rtlCol="0" anchor="t"/>
+          <a:lstStyle/>
+          <a:p>
+            <a:pPr algn="l" indent="0" marL="0">
+              <a:lnSpc>
+                <a:spcPts val="1375"/>
+              </a:lnSpc>
+              <a:buNone/>
+            </a:pPr>
+            <a:r>
+              <a:rPr lang="en-US" sz="1100" dirty="0">
+                <a:solidFill>
+                  <a:srgbClr val="1C2833"/>
+                </a:solidFill>
+                <a:latin typeface="Courier New" pitchFamily="34" charset="0"/>
+                <a:ea typeface="Courier New" pitchFamily="34" charset="-122"/>
+                <a:cs typeface="Courier New" pitchFamily="34" charset="-120"/>
+              </a:rPr>
+              <a:t>5 | 10 | 11 |  8</a:t>
+            </a:r>
+            <a:endParaRPr lang="en-US" sz="1100" dirty="0"/>
+          </a:p>
+        </p:txBody>
+      </p:sp>
+      <p:sp>
+        <p:nvSpPr>
+          <p:cNvPr id="9" name="Text 7"/>
+          <p:cNvSpPr/>
+          <p:nvPr/>
+        </p:nvSpPr>
+        <p:spPr>
+          <a:xfrm>
+            <a:off x="631627" y="1534269"/>
+            <a:ext cx="8086939" cy="174575"/>
+          </a:xfrm>
+          <a:prstGeom prst="rect">
+            <a:avLst/>
+          </a:prstGeom>
+          <a:noFill/>
+          <a:ln/>
+        </p:spPr>
+        <p:txBody>
+          <a:bodyPr wrap="square" lIns="0" tIns="0" rIns="0" bIns="0" rtlCol="0" anchor="t"/>
+          <a:lstStyle/>
+          <a:p>
+            <a:pPr algn="l" indent="0" marL="0">
+              <a:lnSpc>
+                <a:spcPts val="1375"/>
+              </a:lnSpc>
+              <a:buNone/>
+            </a:pPr>
+            <a:r>
+              <a:rPr lang="en-US" sz="1100" dirty="0">
+                <a:solidFill>
+                  <a:srgbClr val="1C2833"/>
+                </a:solidFill>
+                <a:latin typeface="Courier New" pitchFamily="34" charset="0"/>
+                <a:ea typeface="Courier New" pitchFamily="34" charset="-122"/>
+                <a:cs typeface="Courier New" pitchFamily="34" charset="-120"/>
+              </a:rPr>
+              <a:t>----------------</a:t>
+            </a:r>
+            <a:endParaRPr lang="en-US" sz="1100" dirty="0"/>
+          </a:p>
+        </p:txBody>
+      </p:sp>
+      <p:sp>
+        <p:nvSpPr>
+          <p:cNvPr id="10" name="Text 8"/>
+          <p:cNvSpPr/>
+          <p:nvPr/>
+        </p:nvSpPr>
+        <p:spPr>
+          <a:xfrm>
+            <a:off x="631627" y="1708845"/>
+            <a:ext cx="8086939" cy="174575"/>
+          </a:xfrm>
+          <a:prstGeom prst="rect">
+            <a:avLst/>
+          </a:prstGeom>
+          <a:noFill/>
+          <a:ln/>
+        </p:spPr>
+        <p:txBody>
+          <a:bodyPr wrap="square" lIns="0" tIns="0" rIns="0" bIns="0" rtlCol="0" anchor="t"/>
+          <a:lstStyle/>
+          <a:p>
+            <a:pPr algn="l" indent="0" marL="0">
+              <a:lnSpc>
+                <a:spcPts val="1375"/>
+              </a:lnSpc>
+              <a:buNone/>
+            </a:pPr>
+            <a:r>
+              <a:rPr lang="en-US" sz="1100" dirty="0">
+                <a:solidFill>
+                  <a:srgbClr val="1C2833"/>
+                </a:solidFill>
+                <a:latin typeface="Courier New" pitchFamily="34" charset="0"/>
+                <a:ea typeface="Courier New" pitchFamily="34" charset="-122"/>
+                <a:cs typeface="Courier New" pitchFamily="34" charset="-120"/>
+              </a:rPr>
+              <a:t>9 |  6 |  7 | 12</a:t>
+            </a:r>
+            <a:endParaRPr lang="en-US" sz="1100" dirty="0"/>
+          </a:p>
+        </p:txBody>
+      </p:sp>
+      <p:sp>
+        <p:nvSpPr>
+          <p:cNvPr id="11" name="Text 9"/>
+          <p:cNvSpPr/>
+          <p:nvPr/>
+        </p:nvSpPr>
+        <p:spPr>
+          <a:xfrm>
+            <a:off x="631627" y="1883420"/>
+            <a:ext cx="8086939" cy="174575"/>
+          </a:xfrm>
+          <a:prstGeom prst="rect">
+            <a:avLst/>
+          </a:prstGeom>
+          <a:noFill/>
+          <a:ln/>
+        </p:spPr>
+        <p:txBody>
+          <a:bodyPr wrap="square" lIns="0" tIns="0" rIns="0" bIns="0" rtlCol="0" anchor="t"/>
+          <a:lstStyle/>
+          <a:p>
+            <a:pPr algn="l" indent="0" marL="0">
+              <a:lnSpc>
+                <a:spcPts val="1375"/>
+              </a:lnSpc>
+              <a:buNone/>
+            </a:pPr>
+            <a:r>
+              <a:rPr lang="en-US" sz="1100" dirty="0">
+                <a:solidFill>
+                  <a:srgbClr val="1C2833"/>
+                </a:solidFill>
+                <a:latin typeface="Courier New" pitchFamily="34" charset="0"/>
+                <a:ea typeface="Courier New" pitchFamily="34" charset="-122"/>
+                <a:cs typeface="Courier New" pitchFamily="34" charset="-120"/>
+              </a:rPr>
+              <a:t>----------------</a:t>
+            </a:r>
+            <a:endParaRPr lang="en-US" sz="1100" dirty="0"/>
+          </a:p>
+        </p:txBody>
+      </p:sp>
+      <p:sp>
+        <p:nvSpPr>
+          <p:cNvPr id="12" name="Text 10"/>
+          <p:cNvSpPr/>
+          <p:nvPr/>
+        </p:nvSpPr>
+        <p:spPr>
+          <a:xfrm>
+            <a:off x="631627" y="2057995"/>
+            <a:ext cx="8086939" cy="174575"/>
+          </a:xfrm>
+          <a:prstGeom prst="rect">
+            <a:avLst/>
+          </a:prstGeom>
+          <a:noFill/>
+          <a:ln/>
+        </p:spPr>
+        <p:txBody>
+          <a:bodyPr wrap="square" lIns="0" tIns="0" rIns="0" bIns="0" rtlCol="0" anchor="t"/>
+          <a:lstStyle/>
+          <a:p>
+            <a:pPr algn="l" indent="0" marL="0">
+              <a:lnSpc>
+                <a:spcPts val="1375"/>
+              </a:lnSpc>
+              <a:buNone/>
+            </a:pPr>
+            <a:r>
+              <a:rPr lang="en-US" sz="1100" dirty="0">
+                <a:solidFill>
+                  <a:srgbClr val="1C2833"/>
+                </a:solidFill>
+                <a:latin typeface="Courier New" pitchFamily="34" charset="0"/>
+                <a:ea typeface="Courier New" pitchFamily="34" charset="-122"/>
+                <a:cs typeface="Courier New" pitchFamily="34" charset="-120"/>
+              </a:rPr>
+              <a:t>4 | 15 | 14 |  1</a:t>
+            </a:r>
+            <a:endParaRPr lang="en-US" sz="1100" dirty="0"/>
+          </a:p>
+        </p:txBody>
+      </p:sp>
+      <p:sp>
+        <p:nvSpPr>
+          <p:cNvPr id="13" name="Text 11"/>
           <p:cNvSpPr/>
           <p:nvPr/>
         </p:nvSpPr>
@@ -3176,7 +4184,7 @@
                 <a:ea typeface="Georgia" pitchFamily="34" charset="-122"/>
                 <a:cs typeface="Georgia" pitchFamily="34" charset="-120"/>
               </a:rPr>
-              <a:t>Citation(s) used in this lesson</a:t>
+              <a:t>Core (20 min) (cont.)</a:t>
             </a:r>
             <a:endParaRPr lang="en-US" sz="1800" dirty="0"/>
           </a:p>
@@ -3191,7 +4199,7 @@
         <p:spPr>
           <a:xfrm>
             <a:off x="406301" y="870942"/>
-            <a:ext cx="8498026" cy="639812"/>
+            <a:ext cx="8498026" cy="213271"/>
           </a:xfrm>
           <a:prstGeom prst="rect">
             <a:avLst/>
@@ -3224,8 +4232,33 @@
                 <a:ea typeface="Arial" pitchFamily="34" charset="-122"/>
                 <a:cs typeface="Arial" pitchFamily="34" charset="-120"/>
               </a:rPr>
-              <a:t>– Lo Shu: </a:t>
-            </a:r>
+              <a:t>Magic constant: 34.</a:t>
+            </a:r>
+            <a:endParaRPr lang="en-US" sz="1200" dirty="0"/>
+          </a:p>
+        </p:txBody>
+      </p:sp>
+      <p:sp>
+        <p:nvSpPr>
+          <p:cNvPr id="5" name="Text 3"/>
+          <p:cNvSpPr/>
+          <p:nvPr/>
+        </p:nvSpPr>
+        <p:spPr>
+          <a:xfrm>
+            <a:off x="406301" y="4434929"/>
+            <a:ext cx="8498026" cy="213271"/>
+          </a:xfrm>
+          <a:prstGeom prst="rect">
+            <a:avLst/>
+          </a:prstGeom>
+          <a:noFill/>
+          <a:ln/>
+        </p:spPr>
+        <p:txBody>
+          <a:bodyPr wrap="square" lIns="0" tIns="0" rIns="0" bIns="0" rtlCol="0" anchor="t"/>
+          <a:lstStyle/>
+          <a:p>
             <a:pPr algn="l" indent="0" marL="0">
               <a:lnSpc>
                 <a:spcPts val="1680"/>
@@ -3239,6 +4272,594 @@
               <a:buNone/>
             </a:pPr>
             <a:r>
+              <a:rPr lang="en-US" sz="1200" dirty="0">
+                <a:solidFill>
+                  <a:srgbClr val="1C2833"/>
+                </a:solidFill>
+                <a:latin typeface="Arial" pitchFamily="34" charset="0"/>
+                <a:ea typeface="Arial" pitchFamily="34" charset="-122"/>
+                <a:cs typeface="Arial" pitchFamily="34" charset="-120"/>
+              </a:rPr>
+              <a:t>Middle ·  · IKS Curriculum</a:t>
+            </a:r>
+            <a:endParaRPr lang="en-US" sz="1200" dirty="0"/>
+          </a:p>
+        </p:txBody>
+      </p:sp>
+    </p:spTree>
+  </p:cSld>
+  <p:clrMapOvr>
+    <a:masterClrMapping/>
+  </p:clrMapOvr>
+</p:sld>
+</file>
+
+<file path=ppt/slides/slide13.xml><?xml version="1.0" encoding="utf-8"?>
+<p:sld xmlns:a="http://schemas.openxmlformats.org/drawingml/2006/main" xmlns:r="http://schemas.openxmlformats.org/officeDocument/2006/relationships" xmlns:p="http://schemas.openxmlformats.org/presentationml/2006/main">
+  <p:cSld name="Slide 13">
+    <p:bg>
+      <p:bgPr>
+        <a:solidFill>
+          <a:srgbClr val="FFFFFF"/>
+        </a:solidFill>
+      </p:bgPr>
+    </p:bg>
+    <p:spTree>
+      <p:nvGrpSpPr>
+        <p:cNvPr id="1" name=""/>
+        <p:cNvGrpSpPr/>
+        <p:nvPr/>
+      </p:nvGrpSpPr>
+      <p:grpSpPr>
+        <a:xfrm>
+          <a:off x="0" y="0"/>
+          <a:ext cx="0" cy="0"/>
+          <a:chOff x="0" y="0"/>
+          <a:chExt cx="0" cy="0"/>
+        </a:xfrm>
+      </p:grpSpPr>
+      <p:sp>
+        <p:nvSpPr>
+          <p:cNvPr id="2" name="Text 0"/>
+          <p:cNvSpPr/>
+          <p:nvPr/>
+        </p:nvSpPr>
+        <p:spPr>
+          <a:xfrm>
+            <a:off x="0" y="0"/>
+            <a:ext cx="9144000" cy="101501"/>
+          </a:xfrm>
+          <a:prstGeom prst="rect">
+            <a:avLst/>
+          </a:prstGeom>
+          <a:solidFill>
+            <a:srgbClr val="277884"/>
+          </a:solidFill>
+          <a:ln/>
+        </p:spPr>
+        <p:txBody>
+          <a:bodyPr wrap="square" rtlCol="0" anchor="ctr"/>
+          <a:lstStyle/>
+          <a:p>
+            <a:pPr indent="0" marL="0">
+              <a:buNone/>
+            </a:pPr>
+            <a:endParaRPr lang="en-US" dirty="0"/>
+          </a:p>
+        </p:txBody>
+      </p:sp>
+      <p:sp>
+        <p:nvSpPr>
+          <p:cNvPr id="3" name="Text 1"/>
+          <p:cNvSpPr/>
+          <p:nvPr/>
+        </p:nvSpPr>
+        <p:spPr>
+          <a:xfrm>
+            <a:off x="406301" y="457051"/>
+            <a:ext cx="8498026" cy="274290"/>
+          </a:xfrm>
+          <a:prstGeom prst="rect">
+            <a:avLst/>
+          </a:prstGeom>
+          <a:noFill/>
+          <a:ln/>
+        </p:spPr>
+        <p:txBody>
+          <a:bodyPr wrap="square" lIns="0" tIns="0" rIns="0" bIns="0" rtlCol="0" anchor="t"/>
+          <a:lstStyle/>
+          <a:p>
+            <a:pPr algn="l" indent="0" marL="0">
+              <a:lnSpc>
+                <a:spcPts val="2160"/>
+              </a:lnSpc>
+              <a:spcBef>
+                <a:spcPts val="600"/>
+              </a:spcBef>
+              <a:spcAft>
+                <a:spcPts val="800"/>
+              </a:spcAft>
+              <a:buNone/>
+            </a:pPr>
+            <a:r>
+              <a:rPr lang="en-US" sz="1800" b="1" dirty="0">
+                <a:solidFill>
+                  <a:srgbClr val="FE4447"/>
+                </a:solidFill>
+                <a:latin typeface="Georgia" pitchFamily="34" charset="0"/>
+                <a:ea typeface="Georgia" pitchFamily="34" charset="-122"/>
+                <a:cs typeface="Georgia" pitchFamily="34" charset="-120"/>
+              </a:rPr>
+              <a:t>Core (20 min) (cont.)</a:t>
+            </a:r>
+            <a:endParaRPr lang="en-US" sz="1800" dirty="0"/>
+          </a:p>
+        </p:txBody>
+      </p:sp>
+      <p:sp>
+        <p:nvSpPr>
+          <p:cNvPr id="4" name="Text 2"/>
+          <p:cNvSpPr/>
+          <p:nvPr/>
+        </p:nvSpPr>
+        <p:spPr>
+          <a:xfrm>
+            <a:off x="406301" y="870942"/>
+            <a:ext cx="8498026" cy="213271"/>
+          </a:xfrm>
+          <a:prstGeom prst="rect">
+            <a:avLst/>
+          </a:prstGeom>
+          <a:noFill/>
+          <a:ln/>
+        </p:spPr>
+        <p:txBody>
+          <a:bodyPr wrap="square" lIns="0" tIns="0" rIns="0" bIns="0" rtlCol="0" anchor="t"/>
+          <a:lstStyle/>
+          <a:p>
+            <a:pPr algn="l" indent="0" marL="0">
+              <a:lnSpc>
+                <a:spcPts val="1680"/>
+              </a:lnSpc>
+              <a:spcBef>
+                <a:spcPts val="300"/>
+              </a:spcBef>
+              <a:spcAft>
+                <a:spcPts val="300"/>
+              </a:spcAft>
+              <a:buNone/>
+            </a:pPr>
+            <a:r>
+              <a:rPr lang="en-US" sz="1200" b="1" dirty="0">
+                <a:solidFill>
+                  <a:srgbClr val="1C2833"/>
+                </a:solidFill>
+                <a:latin typeface="Arial" pitchFamily="34" charset="0"/>
+                <a:ea typeface="Arial" pitchFamily="34" charset="-122"/>
+                <a:cs typeface="Arial" pitchFamily="34" charset="-120"/>
+              </a:rPr>
+              <a:t>Notable features:</a:t>
+            </a:r>
+            <a:endParaRPr lang="en-US" sz="1200" dirty="0"/>
+          </a:p>
+        </p:txBody>
+      </p:sp>
+      <p:sp>
+        <p:nvSpPr>
+          <p:cNvPr id="5" name="Text 3"/>
+          <p:cNvSpPr/>
+          <p:nvPr/>
+        </p:nvSpPr>
+        <p:spPr>
+          <a:xfrm>
+            <a:off x="634901" y="1173063"/>
+            <a:ext cx="8102798" cy="1013222"/>
+          </a:xfrm>
+          <a:prstGeom prst="rect">
+            <a:avLst/>
+          </a:prstGeom>
+          <a:noFill/>
+          <a:ln/>
+        </p:spPr>
+        <p:txBody>
+          <a:bodyPr wrap="square" lIns="0" tIns="0" rIns="0" bIns="0" rtlCol="0" anchor="t"/>
+          <a:lstStyle/>
+          <a:p>
+            <a:pPr algn="l" marL="342900" indent="-342900">
+              <a:lnSpc>
+                <a:spcPts val="1620"/>
+              </a:lnSpc>
+              <a:spcAft>
+                <a:spcPts val="300"/>
+              </a:spcAft>
+              <a:buSzPct val="100000"/>
+              <a:buChar char="•"/>
+            </a:pPr>
+            <a:r>
+              <a:rPr lang="en-US" sz="1200" dirty="0">
+                <a:solidFill>
+                  <a:srgbClr val="1C2833"/>
+                </a:solidFill>
+                <a:latin typeface="Arial" pitchFamily="34" charset="0"/>
+                <a:ea typeface="Arial" pitchFamily="34" charset="-122"/>
+                <a:cs typeface="Arial" pitchFamily="34" charset="-120"/>
+              </a:rPr>
+              <a:t>The bottom-middle two cells contain 15 and 14 — encoding the date </a:t>
+            </a:r>
+            <a:pPr algn="l" indent="0" marL="0">
+              <a:lnSpc>
+                <a:spcPts val="1620"/>
+              </a:lnSpc>
+              <a:spcAft>
+                <a:spcPts val="300"/>
+              </a:spcAft>
+              <a:buNone/>
+            </a:pPr>
+            <a:r>
+              <a:rPr lang="en-US" sz="1200" b="1" dirty="0">
+                <a:solidFill>
+                  <a:srgbClr val="1C2833"/>
+                </a:solidFill>
+                <a:latin typeface="Arial" pitchFamily="34" charset="0"/>
+                <a:ea typeface="Arial" pitchFamily="34" charset="-122"/>
+                <a:cs typeface="Arial" pitchFamily="34" charset="-120"/>
+              </a:rPr>
+              <a:t>1514</a:t>
+            </a:r>
+            <a:pPr algn="l" indent="0" marL="0">
+              <a:lnSpc>
+                <a:spcPts val="1620"/>
+              </a:lnSpc>
+              <a:spcAft>
+                <a:spcPts val="300"/>
+              </a:spcAft>
+              <a:buNone/>
+            </a:pPr>
+            <a:r>
+              <a:rPr lang="en-US" sz="1200" dirty="0">
+                <a:solidFill>
+                  <a:srgbClr val="1C2833"/>
+                </a:solidFill>
+                <a:latin typeface="Arial" pitchFamily="34" charset="0"/>
+                <a:ea typeface="Arial" pitchFamily="34" charset="-122"/>
+                <a:cs typeface="Arial" pitchFamily="34" charset="-120"/>
+              </a:rPr>
+              <a:t>.</a:t>
+            </a:r>
+            <a:endParaRPr lang="en-US" sz="1200" dirty="0"/>
+          </a:p>
+          <a:p>
+            <a:pPr algn="l" marL="342900" indent="-342900">
+              <a:lnSpc>
+                <a:spcPts val="1620"/>
+              </a:lnSpc>
+              <a:spcAft>
+                <a:spcPts val="300"/>
+              </a:spcAft>
+              <a:buSzPct val="100000"/>
+              <a:buChar char="•"/>
+            </a:pPr>
+            <a:r>
+              <a:rPr lang="en-US" sz="1200" dirty="0">
+                <a:solidFill>
+                  <a:srgbClr val="1C2833"/>
+                </a:solidFill>
+                <a:latin typeface="Arial" pitchFamily="34" charset="0"/>
+                <a:ea typeface="Arial" pitchFamily="34" charset="-122"/>
+                <a:cs typeface="Arial" pitchFamily="34" charset="-120"/>
+              </a:rPr>
+              <a:t>The four corners (16, 13, 4, 1) sum to 34.</a:t>
+            </a:r>
+            <a:endParaRPr lang="en-US" sz="1200" dirty="0"/>
+          </a:p>
+          <a:p>
+            <a:pPr algn="l" marL="342900" indent="-342900">
+              <a:lnSpc>
+                <a:spcPts val="1620"/>
+              </a:lnSpc>
+              <a:spcAft>
+                <a:spcPts val="300"/>
+              </a:spcAft>
+              <a:buSzPct val="100000"/>
+              <a:buChar char="•"/>
+            </a:pPr>
+            <a:r>
+              <a:rPr lang="en-US" sz="1200" dirty="0">
+                <a:solidFill>
+                  <a:srgbClr val="1C2833"/>
+                </a:solidFill>
+                <a:latin typeface="Arial" pitchFamily="34" charset="0"/>
+                <a:ea typeface="Arial" pitchFamily="34" charset="-122"/>
+                <a:cs typeface="Arial" pitchFamily="34" charset="-120"/>
+              </a:rPr>
+              <a:t>Each 2×2 panel sums to 34 (panel-magic property — same as Khajuraho!).</a:t>
+            </a:r>
+            <a:endParaRPr lang="en-US" sz="1200" dirty="0"/>
+          </a:p>
+          <a:p>
+            <a:pPr algn="l" marL="342900" indent="-342900">
+              <a:lnSpc>
+                <a:spcPts val="1620"/>
+              </a:lnSpc>
+              <a:spcAft>
+                <a:spcPts val="300"/>
+              </a:spcAft>
+              <a:buSzPct val="100000"/>
+              <a:buChar char="•"/>
+            </a:pPr>
+            <a:r>
+              <a:rPr lang="en-US" sz="1200" dirty="0">
+                <a:solidFill>
+                  <a:srgbClr val="1C2833"/>
+                </a:solidFill>
+                <a:latin typeface="Arial" pitchFamily="34" charset="0"/>
+                <a:ea typeface="Arial" pitchFamily="34" charset="-122"/>
+                <a:cs typeface="Arial" pitchFamily="34" charset="-120"/>
+              </a:rPr>
+              <a:t>Dürer's square is not the same as Khajuraho's, but shares the panel-magic property.</a:t>
+            </a:r>
+            <a:endParaRPr lang="en-US" sz="1200" dirty="0"/>
+          </a:p>
+        </p:txBody>
+      </p:sp>
+      <p:sp>
+        <p:nvSpPr>
+          <p:cNvPr id="6" name="Text 4"/>
+          <p:cNvSpPr/>
+          <p:nvPr/>
+        </p:nvSpPr>
+        <p:spPr>
+          <a:xfrm>
+            <a:off x="406301" y="4434929"/>
+            <a:ext cx="8498026" cy="213271"/>
+          </a:xfrm>
+          <a:prstGeom prst="rect">
+            <a:avLst/>
+          </a:prstGeom>
+          <a:noFill/>
+          <a:ln/>
+        </p:spPr>
+        <p:txBody>
+          <a:bodyPr wrap="square" lIns="0" tIns="0" rIns="0" bIns="0" rtlCol="0" anchor="t"/>
+          <a:lstStyle/>
+          <a:p>
+            <a:pPr algn="l" indent="0" marL="0">
+              <a:lnSpc>
+                <a:spcPts val="1680"/>
+              </a:lnSpc>
+              <a:spcBef>
+                <a:spcPts val="300"/>
+              </a:spcBef>
+              <a:spcAft>
+                <a:spcPts val="300"/>
+              </a:spcAft>
+              <a:buNone/>
+            </a:pPr>
+            <a:r>
+              <a:rPr lang="en-US" sz="1200" dirty="0">
+                <a:solidFill>
+                  <a:srgbClr val="1C2833"/>
+                </a:solidFill>
+                <a:latin typeface="Arial" pitchFamily="34" charset="0"/>
+                <a:ea typeface="Arial" pitchFamily="34" charset="-122"/>
+                <a:cs typeface="Arial" pitchFamily="34" charset="-120"/>
+              </a:rPr>
+              <a:t>Middle ·  · IKS Curriculum</a:t>
+            </a:r>
+            <a:endParaRPr lang="en-US" sz="1200" dirty="0"/>
+          </a:p>
+        </p:txBody>
+      </p:sp>
+    </p:spTree>
+  </p:cSld>
+  <p:clrMapOvr>
+    <a:masterClrMapping/>
+  </p:clrMapOvr>
+</p:sld>
+</file>
+
+<file path=ppt/slides/slide14.xml><?xml version="1.0" encoding="utf-8"?>
+<p:sld xmlns:a="http://schemas.openxmlformats.org/drawingml/2006/main" xmlns:r="http://schemas.openxmlformats.org/officeDocument/2006/relationships" xmlns:p="http://schemas.openxmlformats.org/presentationml/2006/main">
+  <p:cSld name="Slide 14">
+    <p:bg>
+      <p:bgPr>
+        <a:solidFill>
+          <a:srgbClr val="FFFFFF"/>
+        </a:solidFill>
+      </p:bgPr>
+    </p:bg>
+    <p:spTree>
+      <p:nvGrpSpPr>
+        <p:cNvPr id="1" name=""/>
+        <p:cNvGrpSpPr/>
+        <p:nvPr/>
+      </p:nvGrpSpPr>
+      <p:grpSpPr>
+        <a:xfrm>
+          <a:off x="0" y="0"/>
+          <a:ext cx="0" cy="0"/>
+          <a:chOff x="0" y="0"/>
+          <a:chExt cx="0" cy="0"/>
+        </a:xfrm>
+      </p:grpSpPr>
+      <p:sp>
+        <p:nvSpPr>
+          <p:cNvPr id="2" name="Text 0"/>
+          <p:cNvSpPr/>
+          <p:nvPr/>
+        </p:nvSpPr>
+        <p:spPr>
+          <a:xfrm>
+            <a:off x="0" y="0"/>
+            <a:ext cx="9144000" cy="101501"/>
+          </a:xfrm>
+          <a:prstGeom prst="rect">
+            <a:avLst/>
+          </a:prstGeom>
+          <a:solidFill>
+            <a:srgbClr val="277884"/>
+          </a:solidFill>
+          <a:ln/>
+        </p:spPr>
+        <p:txBody>
+          <a:bodyPr wrap="square" rtlCol="0" anchor="ctr"/>
+          <a:lstStyle/>
+          <a:p>
+            <a:pPr indent="0" marL="0">
+              <a:buNone/>
+            </a:pPr>
+            <a:endParaRPr lang="en-US" dirty="0"/>
+          </a:p>
+        </p:txBody>
+      </p:sp>
+      <p:sp>
+        <p:nvSpPr>
+          <p:cNvPr id="3" name="Text 1"/>
+          <p:cNvSpPr/>
+          <p:nvPr/>
+        </p:nvSpPr>
+        <p:spPr>
+          <a:xfrm>
+            <a:off x="406301" y="457051"/>
+            <a:ext cx="8498026" cy="274290"/>
+          </a:xfrm>
+          <a:prstGeom prst="rect">
+            <a:avLst/>
+          </a:prstGeom>
+          <a:noFill/>
+          <a:ln/>
+        </p:spPr>
+        <p:txBody>
+          <a:bodyPr wrap="square" lIns="0" tIns="0" rIns="0" bIns="0" rtlCol="0" anchor="t"/>
+          <a:lstStyle/>
+          <a:p>
+            <a:pPr algn="l" indent="0" marL="0">
+              <a:lnSpc>
+                <a:spcPts val="2160"/>
+              </a:lnSpc>
+              <a:spcBef>
+                <a:spcPts val="600"/>
+              </a:spcBef>
+              <a:spcAft>
+                <a:spcPts val="800"/>
+              </a:spcAft>
+              <a:buNone/>
+            </a:pPr>
+            <a:r>
+              <a:rPr lang="en-US" sz="1800" b="1" dirty="0">
+                <a:solidFill>
+                  <a:srgbClr val="FE4447"/>
+                </a:solidFill>
+                <a:latin typeface="Georgia" pitchFamily="34" charset="0"/>
+                <a:ea typeface="Georgia" pitchFamily="34" charset="-122"/>
+                <a:cs typeface="Georgia" pitchFamily="34" charset="-120"/>
+              </a:rPr>
+              <a:t>Core (20 min) (cont.)</a:t>
+            </a:r>
+            <a:endParaRPr lang="en-US" sz="1800" dirty="0"/>
+          </a:p>
+        </p:txBody>
+      </p:sp>
+      <p:sp>
+        <p:nvSpPr>
+          <p:cNvPr id="4" name="Text 2"/>
+          <p:cNvSpPr/>
+          <p:nvPr/>
+        </p:nvSpPr>
+        <p:spPr>
+          <a:xfrm>
+            <a:off x="634901" y="883593"/>
+            <a:ext cx="8102798" cy="281880"/>
+          </a:xfrm>
+          <a:prstGeom prst="rect">
+            <a:avLst/>
+          </a:prstGeom>
+          <a:noFill/>
+          <a:ln/>
+        </p:spPr>
+        <p:txBody>
+          <a:bodyPr wrap="square" lIns="0" tIns="0" rIns="0" bIns="0" rtlCol="0" anchor="t"/>
+          <a:lstStyle/>
+          <a:p>
+            <a:pPr algn="l" marL="342900" indent="-342900">
+              <a:lnSpc>
+                <a:spcPts val="1620"/>
+              </a:lnSpc>
+              <a:spcAft>
+                <a:spcPts val="300"/>
+              </a:spcAft>
+              <a:buSzPct val="100000"/>
+              <a:buChar char="•"/>
+            </a:pPr>
+            <a:r>
+              <a:rPr lang="en-US" sz="1200" b="1" dirty="0">
+                <a:solidFill>
+                  <a:srgbClr val="1C2833"/>
+                </a:solidFill>
+                <a:latin typeface="Arial" pitchFamily="34" charset="0"/>
+                <a:ea typeface="Arial" pitchFamily="34" charset="-122"/>
+                <a:cs typeface="Arial" pitchFamily="34" charset="-120"/>
+              </a:rPr>
+              <a:t>Compare and contrast.</a:t>
+            </a:r>
+            <a:pPr algn="l" indent="0" marL="0">
+              <a:lnSpc>
+                <a:spcPts val="1620"/>
+              </a:lnSpc>
+              <a:spcAft>
+                <a:spcPts val="300"/>
+              </a:spcAft>
+              <a:buNone/>
+            </a:pPr>
+            <a:r>
+              <a:rPr lang="en-US" sz="1200" dirty="0">
+                <a:solidFill>
+                  <a:srgbClr val="1C2833"/>
+                </a:solidFill>
+                <a:latin typeface="Arial" pitchFamily="34" charset="0"/>
+                <a:ea typeface="Arial" pitchFamily="34" charset="-122"/>
+                <a:cs typeface="Arial" pitchFamily="34" charset="-120"/>
+              </a:rPr>
+              <a:t> Build a class table:</a:t>
+            </a:r>
+            <a:endParaRPr lang="en-US" sz="1200" dirty="0"/>
+          </a:p>
+        </p:txBody>
+      </p:sp>
+      <p:sp>
+        <p:nvSpPr>
+          <p:cNvPr id="5" name="Text 3"/>
+          <p:cNvSpPr/>
+          <p:nvPr/>
+        </p:nvSpPr>
+        <p:spPr>
+          <a:xfrm>
+            <a:off x="406301" y="1254323"/>
+            <a:ext cx="8498026" cy="213271"/>
+          </a:xfrm>
+          <a:prstGeom prst="rect">
+            <a:avLst/>
+          </a:prstGeom>
+          <a:noFill/>
+          <a:ln/>
+        </p:spPr>
+        <p:txBody>
+          <a:bodyPr wrap="square" lIns="0" tIns="0" rIns="0" bIns="0" rtlCol="0" anchor="t"/>
+          <a:lstStyle/>
+          <a:p>
+            <a:pPr algn="l" indent="0" marL="0">
+              <a:lnSpc>
+                <a:spcPts val="1680"/>
+              </a:lnSpc>
+              <a:spcBef>
+                <a:spcPts val="300"/>
+              </a:spcBef>
+              <a:spcAft>
+                <a:spcPts val="300"/>
+              </a:spcAft>
+              <a:buNone/>
+            </a:pPr>
+            <a:r>
               <a:rPr lang="en-US" sz="1200" i="1" dirty="0">
                 <a:solidFill>
                   <a:srgbClr val="1C2833"/>
@@ -3247,8 +4868,33 @@
                 <a:ea typeface="Arial" pitchFamily="34" charset="-122"/>
                 <a:cs typeface="Arial" pitchFamily="34" charset="-120"/>
               </a:rPr>
-              <a:t>Da Dai Liji</a:t>
-            </a:r>
+              <a:t>Each row: Square · Approx. date · Culture · Order · Magic constant · Special features.</a:t>
+            </a:r>
+            <a:endParaRPr lang="en-US" sz="1200" dirty="0"/>
+          </a:p>
+        </p:txBody>
+      </p:sp>
+      <p:sp>
+        <p:nvSpPr>
+          <p:cNvPr id="6" name="Text 4"/>
+          <p:cNvSpPr/>
+          <p:nvPr/>
+        </p:nvSpPr>
+        <p:spPr>
+          <a:xfrm>
+            <a:off x="406301" y="4434929"/>
+            <a:ext cx="8498026" cy="213271"/>
+          </a:xfrm>
+          <a:prstGeom prst="rect">
+            <a:avLst/>
+          </a:prstGeom>
+          <a:noFill/>
+          <a:ln/>
+        </p:spPr>
+        <p:txBody>
+          <a:bodyPr wrap="square" lIns="0" tIns="0" rIns="0" bIns="0" rtlCol="0" anchor="t"/>
+          <a:lstStyle/>
+          <a:p>
             <a:pPr algn="l" indent="0" marL="0">
               <a:lnSpc>
                 <a:spcPts val="1680"/>
@@ -3270,8 +4916,381 @@
                 <a:ea typeface="Arial" pitchFamily="34" charset="-122"/>
                 <a:cs typeface="Arial" pitchFamily="34" charset="-120"/>
               </a:rPr>
-              <a:t> (Chinese, Han dynasty, ~5th–1st c. BCE) — earliest documented Chinese mention. – Dürer, </a:t>
-            </a:r>
+              <a:t>Middle ·  · IKS Curriculum</a:t>
+            </a:r>
+            <a:endParaRPr lang="en-US" sz="1200" dirty="0"/>
+          </a:p>
+        </p:txBody>
+      </p:sp>
+    </p:spTree>
+  </p:cSld>
+  <p:clrMapOvr>
+    <a:masterClrMapping/>
+  </p:clrMapOvr>
+</p:sld>
+</file>
+
+<file path=ppt/slides/slide15.xml><?xml version="1.0" encoding="utf-8"?>
+<p:sld xmlns:a="http://schemas.openxmlformats.org/drawingml/2006/main" xmlns:r="http://schemas.openxmlformats.org/officeDocument/2006/relationships" xmlns:p="http://schemas.openxmlformats.org/presentationml/2006/main">
+  <p:cSld name="Slide 15">
+    <p:bg>
+      <p:bgPr>
+        <a:solidFill>
+          <a:srgbClr val="FFFFFF"/>
+        </a:solidFill>
+      </p:bgPr>
+    </p:bg>
+    <p:spTree>
+      <p:nvGrpSpPr>
+        <p:cNvPr id="1" name=""/>
+        <p:cNvGrpSpPr/>
+        <p:nvPr/>
+      </p:nvGrpSpPr>
+      <p:grpSpPr>
+        <a:xfrm>
+          <a:off x="0" y="0"/>
+          <a:ext cx="0" cy="0"/>
+          <a:chOff x="0" y="0"/>
+          <a:chExt cx="0" cy="0"/>
+        </a:xfrm>
+      </p:grpSpPr>
+      <p:sp>
+        <p:nvSpPr>
+          <p:cNvPr id="2" name="Text 0"/>
+          <p:cNvSpPr/>
+          <p:nvPr/>
+        </p:nvSpPr>
+        <p:spPr>
+          <a:xfrm>
+            <a:off x="0" y="0"/>
+            <a:ext cx="9144000" cy="101501"/>
+          </a:xfrm>
+          <a:prstGeom prst="rect">
+            <a:avLst/>
+          </a:prstGeom>
+          <a:solidFill>
+            <a:srgbClr val="277884"/>
+          </a:solidFill>
+          <a:ln/>
+        </p:spPr>
+        <p:txBody>
+          <a:bodyPr wrap="square" rtlCol="0" anchor="ctr"/>
+          <a:lstStyle/>
+          <a:p>
+            <a:pPr indent="0" marL="0">
+              <a:buNone/>
+            </a:pPr>
+            <a:endParaRPr lang="en-US" dirty="0"/>
+          </a:p>
+        </p:txBody>
+      </p:sp>
+      <p:sp>
+        <p:nvSpPr>
+          <p:cNvPr id="3" name="Text 1"/>
+          <p:cNvSpPr/>
+          <p:nvPr/>
+        </p:nvSpPr>
+        <p:spPr>
+          <a:xfrm>
+            <a:off x="406301" y="457051"/>
+            <a:ext cx="8498026" cy="274290"/>
+          </a:xfrm>
+          <a:prstGeom prst="rect">
+            <a:avLst/>
+          </a:prstGeom>
+          <a:noFill/>
+          <a:ln/>
+        </p:spPr>
+        <p:txBody>
+          <a:bodyPr wrap="square" lIns="0" tIns="0" rIns="0" bIns="0" rtlCol="0" anchor="t"/>
+          <a:lstStyle/>
+          <a:p>
+            <a:pPr algn="l" indent="0" marL="0">
+              <a:lnSpc>
+                <a:spcPts val="2160"/>
+              </a:lnSpc>
+              <a:spcBef>
+                <a:spcPts val="600"/>
+              </a:spcBef>
+              <a:spcAft>
+                <a:spcPts val="800"/>
+              </a:spcAft>
+              <a:buNone/>
+            </a:pPr>
+            <a:r>
+              <a:rPr lang="en-US" sz="1800" b="1" dirty="0">
+                <a:solidFill>
+                  <a:srgbClr val="FE4447"/>
+                </a:solidFill>
+                <a:latin typeface="Georgia" pitchFamily="34" charset="0"/>
+                <a:ea typeface="Georgia" pitchFamily="34" charset="-122"/>
+                <a:cs typeface="Georgia" pitchFamily="34" charset="-120"/>
+              </a:rPr>
+              <a:t>Core (20 min) (cont.)</a:t>
+            </a:r>
+            <a:endParaRPr lang="en-US" sz="1800" dirty="0"/>
+          </a:p>
+        </p:txBody>
+      </p:sp>
+      <p:sp>
+        <p:nvSpPr>
+          <p:cNvPr id="4" name="Text 2"/>
+          <p:cNvSpPr/>
+          <p:nvPr/>
+        </p:nvSpPr>
+        <p:spPr>
+          <a:xfrm>
+            <a:off x="634901" y="883593"/>
+            <a:ext cx="8102798" cy="1013222"/>
+          </a:xfrm>
+          <a:prstGeom prst="rect">
+            <a:avLst/>
+          </a:prstGeom>
+          <a:noFill/>
+          <a:ln/>
+        </p:spPr>
+        <p:txBody>
+          <a:bodyPr wrap="square" lIns="0" tIns="0" rIns="0" bIns="0" rtlCol="0" anchor="t"/>
+          <a:lstStyle/>
+          <a:p>
+            <a:pPr algn="l" marL="342900" indent="-342900">
+              <a:lnSpc>
+                <a:spcPts val="1620"/>
+              </a:lnSpc>
+              <a:spcAft>
+                <a:spcPts val="300"/>
+              </a:spcAft>
+              <a:buSzPct val="100000"/>
+              <a:buChar char="•"/>
+            </a:pPr>
+            <a:r>
+              <a:rPr lang="en-US" sz="1200" b="1" dirty="0">
+                <a:solidFill>
+                  <a:srgbClr val="1C2833"/>
+                </a:solidFill>
+                <a:latin typeface="Arial" pitchFamily="34" charset="0"/>
+                <a:ea typeface="Arial" pitchFamily="34" charset="-122"/>
+                <a:cs typeface="Arial" pitchFamily="34" charset="-120"/>
+              </a:rPr>
+              <a:t>Lo Shu</a:t>
+            </a:r>
+            <a:pPr algn="l" indent="0" marL="0">
+              <a:lnSpc>
+                <a:spcPts val="1620"/>
+              </a:lnSpc>
+              <a:spcAft>
+                <a:spcPts val="300"/>
+              </a:spcAft>
+              <a:buNone/>
+            </a:pPr>
+            <a:r>
+              <a:rPr lang="en-US" sz="1200" dirty="0">
+                <a:solidFill>
+                  <a:srgbClr val="1C2833"/>
+                </a:solidFill>
+                <a:latin typeface="Arial" pitchFamily="34" charset="0"/>
+                <a:ea typeface="Arial" pitchFamily="34" charset="-122"/>
+                <a:cs typeface="Arial" pitchFamily="34" charset="-120"/>
+              </a:rPr>
+              <a:t> — ~5th–1st c. BCE (documented) · Chinese · 3×3 · 15 · Identical to our 3×3</a:t>
+            </a:r>
+            <a:endParaRPr lang="en-US" sz="1200" dirty="0"/>
+          </a:p>
+          <a:p>
+            <a:pPr algn="l" marL="342900" indent="-342900">
+              <a:lnSpc>
+                <a:spcPts val="1620"/>
+              </a:lnSpc>
+              <a:spcAft>
+                <a:spcPts val="300"/>
+              </a:spcAft>
+              <a:buSzPct val="100000"/>
+              <a:buChar char="•"/>
+            </a:pPr>
+            <a:r>
+              <a:rPr lang="en-US" sz="1200" b="1" dirty="0">
+                <a:solidFill>
+                  <a:srgbClr val="1C2833"/>
+                </a:solidFill>
+                <a:latin typeface="Arial" pitchFamily="34" charset="0"/>
+                <a:ea typeface="Arial" pitchFamily="34" charset="-122"/>
+                <a:cs typeface="Arial" pitchFamily="34" charset="-120"/>
+              </a:rPr>
+              <a:t>Khajuraho</a:t>
+            </a:r>
+            <a:pPr algn="l" indent="0" marL="0">
+              <a:lnSpc>
+                <a:spcPts val="1620"/>
+              </a:lnSpc>
+              <a:spcAft>
+                <a:spcPts val="300"/>
+              </a:spcAft>
+              <a:buNone/>
+            </a:pPr>
+            <a:r>
+              <a:rPr lang="en-US" sz="1200" dirty="0">
+                <a:solidFill>
+                  <a:srgbClr val="1C2833"/>
+                </a:solidFill>
+                <a:latin typeface="Arial" pitchFamily="34" charset="0"/>
+                <a:ea typeface="Arial" pitchFamily="34" charset="-122"/>
+                <a:cs typeface="Arial" pitchFamily="34" charset="-120"/>
+              </a:rPr>
+              <a:t> — ~10th–11th c. CE · Indian · 4×4 · 34 · Panel-magic</a:t>
+            </a:r>
+            <a:endParaRPr lang="en-US" sz="1200" dirty="0"/>
+          </a:p>
+          <a:p>
+            <a:pPr algn="l" marL="342900" indent="-342900">
+              <a:lnSpc>
+                <a:spcPts val="1620"/>
+              </a:lnSpc>
+              <a:spcAft>
+                <a:spcPts val="300"/>
+              </a:spcAft>
+              <a:buSzPct val="100000"/>
+              <a:buChar char="•"/>
+            </a:pPr>
+            <a:r>
+              <a:rPr lang="en-US" sz="1200" b="1" dirty="0">
+                <a:solidFill>
+                  <a:srgbClr val="1C2833"/>
+                </a:solidFill>
+                <a:latin typeface="Arial" pitchFamily="34" charset="0"/>
+                <a:ea typeface="Arial" pitchFamily="34" charset="-122"/>
+                <a:cs typeface="Arial" pitchFamily="34" charset="-120"/>
+              </a:rPr>
+              <a:t>Nārāyaṇa's worked examples</a:t>
+            </a:r>
+            <a:pPr algn="l" indent="0" marL="0">
+              <a:lnSpc>
+                <a:spcPts val="1620"/>
+              </a:lnSpc>
+              <a:spcAft>
+                <a:spcPts val="300"/>
+              </a:spcAft>
+              <a:buNone/>
+            </a:pPr>
+            <a:r>
+              <a:rPr lang="en-US" sz="1200" dirty="0">
+                <a:solidFill>
+                  <a:srgbClr val="1C2833"/>
+                </a:solidFill>
+                <a:latin typeface="Arial" pitchFamily="34" charset="0"/>
+                <a:ea typeface="Arial" pitchFamily="34" charset="-122"/>
+                <a:cs typeface="Arial" pitchFamily="34" charset="-120"/>
+              </a:rPr>
+              <a:t> — 1356 CE · Indian · up to large </a:t>
+            </a:r>
+            <a:pPr algn="l" indent="0" marL="0">
+              <a:lnSpc>
+                <a:spcPts val="1620"/>
+              </a:lnSpc>
+              <a:spcAft>
+                <a:spcPts val="300"/>
+              </a:spcAft>
+              <a:buNone/>
+            </a:pPr>
+            <a:r>
+              <a:rPr lang="en-US" sz="1200" i="1" dirty="0">
+                <a:solidFill>
+                  <a:srgbClr val="1C2833"/>
+                </a:solidFill>
+                <a:latin typeface="Arial" pitchFamily="34" charset="0"/>
+                <a:ea typeface="Arial" pitchFamily="34" charset="-122"/>
+                <a:cs typeface="Arial" pitchFamily="34" charset="-120"/>
+              </a:rPr>
+              <a:t>n</a:t>
+            </a:r>
+            <a:pPr algn="l" indent="0" marL="0">
+              <a:lnSpc>
+                <a:spcPts val="1620"/>
+              </a:lnSpc>
+              <a:spcAft>
+                <a:spcPts val="300"/>
+              </a:spcAft>
+              <a:buNone/>
+            </a:pPr>
+            <a:r>
+              <a:rPr lang="en-US" sz="1200" dirty="0">
+                <a:solidFill>
+                  <a:srgbClr val="1C2833"/>
+                </a:solidFill>
+                <a:latin typeface="Arial" pitchFamily="34" charset="0"/>
+                <a:ea typeface="Arial" pitchFamily="34" charset="-122"/>
+                <a:cs typeface="Arial" pitchFamily="34" charset="-120"/>
+              </a:rPr>
+              <a:t> · varies · Systematic methods</a:t>
+            </a:r>
+            <a:endParaRPr lang="en-US" sz="1200" dirty="0"/>
+          </a:p>
+          <a:p>
+            <a:pPr algn="l" marL="342900" indent="-342900">
+              <a:lnSpc>
+                <a:spcPts val="1620"/>
+              </a:lnSpc>
+              <a:spcAft>
+                <a:spcPts val="300"/>
+              </a:spcAft>
+              <a:buSzPct val="100000"/>
+              <a:buChar char="•"/>
+            </a:pPr>
+            <a:r>
+              <a:rPr lang="en-US" sz="1200" b="1" dirty="0">
+                <a:solidFill>
+                  <a:srgbClr val="1C2833"/>
+                </a:solidFill>
+                <a:latin typeface="Arial" pitchFamily="34" charset="0"/>
+                <a:ea typeface="Arial" pitchFamily="34" charset="-122"/>
+                <a:cs typeface="Arial" pitchFamily="34" charset="-120"/>
+              </a:rPr>
+              <a:t>Dürer</a:t>
+            </a:r>
+            <a:pPr algn="l" indent="0" marL="0">
+              <a:lnSpc>
+                <a:spcPts val="1620"/>
+              </a:lnSpc>
+              <a:spcAft>
+                <a:spcPts val="300"/>
+              </a:spcAft>
+              <a:buNone/>
+            </a:pPr>
+            <a:r>
+              <a:rPr lang="en-US" sz="1200" dirty="0">
+                <a:solidFill>
+                  <a:srgbClr val="1C2833"/>
+                </a:solidFill>
+                <a:latin typeface="Arial" pitchFamily="34" charset="0"/>
+                <a:ea typeface="Arial" pitchFamily="34" charset="-122"/>
+                <a:cs typeface="Arial" pitchFamily="34" charset="-120"/>
+              </a:rPr>
+              <a:t> — 1514 CE · German · 4×4 · 34 · Panel-magic; encodes year</a:t>
+            </a:r>
+            <a:endParaRPr lang="en-US" sz="1200" dirty="0"/>
+          </a:p>
+        </p:txBody>
+      </p:sp>
+      <p:sp>
+        <p:nvSpPr>
+          <p:cNvPr id="5" name="Text 3"/>
+          <p:cNvSpPr/>
+          <p:nvPr/>
+        </p:nvSpPr>
+        <p:spPr>
+          <a:xfrm>
+            <a:off x="406301" y="4434929"/>
+            <a:ext cx="8498026" cy="213271"/>
+          </a:xfrm>
+          <a:prstGeom prst="rect">
+            <a:avLst/>
+          </a:prstGeom>
+          <a:noFill/>
+          <a:ln/>
+        </p:spPr>
+        <p:txBody>
+          <a:bodyPr wrap="square" lIns="0" tIns="0" rIns="0" bIns="0" rtlCol="0" anchor="t"/>
+          <a:lstStyle/>
+          <a:p>
             <a:pPr algn="l" indent="0" marL="0">
               <a:lnSpc>
                 <a:spcPts val="1680"/>
@@ -3285,6 +5304,609 @@
               <a:buNone/>
             </a:pPr>
             <a:r>
+              <a:rPr lang="en-US" sz="1200" dirty="0">
+                <a:solidFill>
+                  <a:srgbClr val="1C2833"/>
+                </a:solidFill>
+                <a:latin typeface="Arial" pitchFamily="34" charset="0"/>
+                <a:ea typeface="Arial" pitchFamily="34" charset="-122"/>
+                <a:cs typeface="Arial" pitchFamily="34" charset="-120"/>
+              </a:rPr>
+              <a:t>Middle ·  · IKS Curriculum</a:t>
+            </a:r>
+            <a:endParaRPr lang="en-US" sz="1200" dirty="0"/>
+          </a:p>
+        </p:txBody>
+      </p:sp>
+    </p:spTree>
+  </p:cSld>
+  <p:clrMapOvr>
+    <a:masterClrMapping/>
+  </p:clrMapOvr>
+</p:sld>
+</file>
+
+<file path=ppt/slides/slide16.xml><?xml version="1.0" encoding="utf-8"?>
+<p:sld xmlns:a="http://schemas.openxmlformats.org/drawingml/2006/main" xmlns:r="http://schemas.openxmlformats.org/officeDocument/2006/relationships" xmlns:p="http://schemas.openxmlformats.org/presentationml/2006/main">
+  <p:cSld name="Slide 16">
+    <p:bg>
+      <p:bgPr>
+        <a:solidFill>
+          <a:srgbClr val="FFFFFF"/>
+        </a:solidFill>
+      </p:bgPr>
+    </p:bg>
+    <p:spTree>
+      <p:nvGrpSpPr>
+        <p:cNvPr id="1" name=""/>
+        <p:cNvGrpSpPr/>
+        <p:nvPr/>
+      </p:nvGrpSpPr>
+      <p:grpSpPr>
+        <a:xfrm>
+          <a:off x="0" y="0"/>
+          <a:ext cx="0" cy="0"/>
+          <a:chOff x="0" y="0"/>
+          <a:chExt cx="0" cy="0"/>
+        </a:xfrm>
+      </p:grpSpPr>
+      <p:sp>
+        <p:nvSpPr>
+          <p:cNvPr id="2" name="Text 0"/>
+          <p:cNvSpPr/>
+          <p:nvPr/>
+        </p:nvSpPr>
+        <p:spPr>
+          <a:xfrm>
+            <a:off x="0" y="0"/>
+            <a:ext cx="9144000" cy="101501"/>
+          </a:xfrm>
+          <a:prstGeom prst="rect">
+            <a:avLst/>
+          </a:prstGeom>
+          <a:solidFill>
+            <a:srgbClr val="277884"/>
+          </a:solidFill>
+          <a:ln/>
+        </p:spPr>
+        <p:txBody>
+          <a:bodyPr wrap="square" rtlCol="0" anchor="ctr"/>
+          <a:lstStyle/>
+          <a:p>
+            <a:pPr indent="0" marL="0">
+              <a:buNone/>
+            </a:pPr>
+            <a:endParaRPr lang="en-US" dirty="0"/>
+          </a:p>
+        </p:txBody>
+      </p:sp>
+      <p:sp>
+        <p:nvSpPr>
+          <p:cNvPr id="3" name="Text 1"/>
+          <p:cNvSpPr/>
+          <p:nvPr/>
+        </p:nvSpPr>
+        <p:spPr>
+          <a:xfrm>
+            <a:off x="406301" y="457051"/>
+            <a:ext cx="8498026" cy="274290"/>
+          </a:xfrm>
+          <a:prstGeom prst="rect">
+            <a:avLst/>
+          </a:prstGeom>
+          <a:noFill/>
+          <a:ln/>
+        </p:spPr>
+        <p:txBody>
+          <a:bodyPr wrap="square" lIns="0" tIns="0" rIns="0" bIns="0" rtlCol="0" anchor="t"/>
+          <a:lstStyle/>
+          <a:p>
+            <a:pPr algn="l" indent="0" marL="0">
+              <a:lnSpc>
+                <a:spcPts val="2160"/>
+              </a:lnSpc>
+              <a:spcBef>
+                <a:spcPts val="600"/>
+              </a:spcBef>
+              <a:spcAft>
+                <a:spcPts val="800"/>
+              </a:spcAft>
+              <a:buNone/>
+            </a:pPr>
+            <a:r>
+              <a:rPr lang="en-US" sz="1800" b="1" dirty="0">
+                <a:solidFill>
+                  <a:srgbClr val="FE4447"/>
+                </a:solidFill>
+                <a:latin typeface="Georgia" pitchFamily="34" charset="0"/>
+                <a:ea typeface="Georgia" pitchFamily="34" charset="-122"/>
+                <a:cs typeface="Georgia" pitchFamily="34" charset="-120"/>
+              </a:rPr>
+              <a:t>Core (20 min) (cont.)</a:t>
+            </a:r>
+            <a:endParaRPr lang="en-US" sz="1800" dirty="0"/>
+          </a:p>
+        </p:txBody>
+      </p:sp>
+      <p:sp>
+        <p:nvSpPr>
+          <p:cNvPr id="4" name="Text 2"/>
+          <p:cNvSpPr/>
+          <p:nvPr/>
+        </p:nvSpPr>
+        <p:spPr>
+          <a:xfrm>
+            <a:off x="634901" y="883593"/>
+            <a:ext cx="8102798" cy="281880"/>
+          </a:xfrm>
+          <a:prstGeom prst="rect">
+            <a:avLst/>
+          </a:prstGeom>
+          <a:noFill/>
+          <a:ln/>
+        </p:spPr>
+        <p:txBody>
+          <a:bodyPr wrap="square" lIns="0" tIns="0" rIns="0" bIns="0" rtlCol="0" anchor="t"/>
+          <a:lstStyle/>
+          <a:p>
+            <a:pPr algn="l" marL="342900" indent="-342900">
+              <a:lnSpc>
+                <a:spcPts val="1620"/>
+              </a:lnSpc>
+              <a:spcAft>
+                <a:spcPts val="300"/>
+              </a:spcAft>
+              <a:buSzPct val="100000"/>
+              <a:buChar char="•"/>
+            </a:pPr>
+            <a:r>
+              <a:rPr lang="en-US" sz="1200" b="1" dirty="0">
+                <a:solidFill>
+                  <a:srgbClr val="1C2833"/>
+                </a:solidFill>
+                <a:latin typeface="Arial" pitchFamily="34" charset="0"/>
+                <a:ea typeface="Arial" pitchFamily="34" charset="-122"/>
+                <a:cs typeface="Arial" pitchFamily="34" charset="-120"/>
+              </a:rPr>
+              <a:t>Honest framing.</a:t>
+            </a:r>
+            <a:pPr algn="l" indent="0" marL="0">
+              <a:lnSpc>
+                <a:spcPts val="1620"/>
+              </a:lnSpc>
+              <a:spcAft>
+                <a:spcPts val="300"/>
+              </a:spcAft>
+              <a:buNone/>
+            </a:pPr>
+            <a:r>
+              <a:rPr lang="en-US" sz="1200" dirty="0">
+                <a:solidFill>
+                  <a:srgbClr val="1C2833"/>
+                </a:solidFill>
+                <a:latin typeface="Arial" pitchFamily="34" charset="0"/>
+                <a:ea typeface="Arial" pitchFamily="34" charset="-122"/>
+                <a:cs typeface="Arial" pitchFamily="34" charset="-120"/>
+              </a:rPr>
+              <a:t> Magic squares appeared independently (or via transmission) in:</a:t>
+            </a:r>
+            <a:endParaRPr lang="en-US" sz="1200" dirty="0"/>
+          </a:p>
+        </p:txBody>
+      </p:sp>
+      <p:sp>
+        <p:nvSpPr>
+          <p:cNvPr id="5" name="Text 3"/>
+          <p:cNvSpPr/>
+          <p:nvPr/>
+        </p:nvSpPr>
+        <p:spPr>
+          <a:xfrm>
+            <a:off x="634901" y="1266974"/>
+            <a:ext cx="8102798" cy="1013222"/>
+          </a:xfrm>
+          <a:prstGeom prst="rect">
+            <a:avLst/>
+          </a:prstGeom>
+          <a:noFill/>
+          <a:ln/>
+        </p:spPr>
+        <p:txBody>
+          <a:bodyPr wrap="square" lIns="0" tIns="0" rIns="0" bIns="0" rtlCol="0" anchor="t"/>
+          <a:lstStyle/>
+          <a:p>
+            <a:pPr algn="l" marL="342900" indent="-342900">
+              <a:lnSpc>
+                <a:spcPts val="1620"/>
+              </a:lnSpc>
+              <a:spcAft>
+                <a:spcPts val="300"/>
+              </a:spcAft>
+              <a:buSzPct val="100000"/>
+              <a:buChar char="•"/>
+            </a:pPr>
+            <a:r>
+              <a:rPr lang="en-US" sz="1200" b="1" dirty="0">
+                <a:solidFill>
+                  <a:srgbClr val="1C2833"/>
+                </a:solidFill>
+                <a:latin typeface="Arial" pitchFamily="34" charset="0"/>
+                <a:ea typeface="Arial" pitchFamily="34" charset="-122"/>
+                <a:cs typeface="Arial" pitchFamily="34" charset="-120"/>
+              </a:rPr>
+              <a:t>China:</a:t>
+            </a:r>
+            <a:pPr algn="l" indent="0" marL="0">
+              <a:lnSpc>
+                <a:spcPts val="1620"/>
+              </a:lnSpc>
+              <a:spcAft>
+                <a:spcPts val="300"/>
+              </a:spcAft>
+              <a:buNone/>
+            </a:pPr>
+            <a:r>
+              <a:rPr lang="en-US" sz="1200" dirty="0">
+                <a:solidFill>
+                  <a:srgbClr val="1C2833"/>
+                </a:solidFill>
+                <a:latin typeface="Arial" pitchFamily="34" charset="0"/>
+                <a:ea typeface="Arial" pitchFamily="34" charset="-122"/>
+                <a:cs typeface="Arial" pitchFamily="34" charset="-120"/>
+              </a:rPr>
+              <a:t> Lo Shu and later expansions.</a:t>
+            </a:r>
+            <a:endParaRPr lang="en-US" sz="1200" dirty="0"/>
+          </a:p>
+          <a:p>
+            <a:pPr algn="l" marL="342900" indent="-342900">
+              <a:lnSpc>
+                <a:spcPts val="1620"/>
+              </a:lnSpc>
+              <a:spcAft>
+                <a:spcPts val="300"/>
+              </a:spcAft>
+              <a:buSzPct val="100000"/>
+              <a:buChar char="•"/>
+            </a:pPr>
+            <a:r>
+              <a:rPr lang="en-US" sz="1200" b="1" dirty="0">
+                <a:solidFill>
+                  <a:srgbClr val="1C2833"/>
+                </a:solidFill>
+                <a:latin typeface="Arial" pitchFamily="34" charset="0"/>
+                <a:ea typeface="Arial" pitchFamily="34" charset="-122"/>
+                <a:cs typeface="Arial" pitchFamily="34" charset="-120"/>
+              </a:rPr>
+              <a:t>India:</a:t>
+            </a:r>
+            <a:pPr algn="l" indent="0" marL="0">
+              <a:lnSpc>
+                <a:spcPts val="1620"/>
+              </a:lnSpc>
+              <a:spcAft>
+                <a:spcPts val="300"/>
+              </a:spcAft>
+              <a:buNone/>
+            </a:pPr>
+            <a:r>
+              <a:rPr lang="en-US" sz="1200" dirty="0">
+                <a:solidFill>
+                  <a:srgbClr val="1C2833"/>
+                </a:solidFill>
+                <a:latin typeface="Arial" pitchFamily="34" charset="0"/>
+                <a:ea typeface="Arial" pitchFamily="34" charset="-122"/>
+                <a:cs typeface="Arial" pitchFamily="34" charset="-120"/>
+              </a:rPr>
+              <a:t> numerous artefacts and Nārāyaṇa's systematic methods.</a:t>
+            </a:r>
+            <a:endParaRPr lang="en-US" sz="1200" dirty="0"/>
+          </a:p>
+          <a:p>
+            <a:pPr algn="l" marL="342900" indent="-342900">
+              <a:lnSpc>
+                <a:spcPts val="1620"/>
+              </a:lnSpc>
+              <a:spcAft>
+                <a:spcPts val="300"/>
+              </a:spcAft>
+              <a:buSzPct val="100000"/>
+              <a:buChar char="•"/>
+            </a:pPr>
+            <a:r>
+              <a:rPr lang="en-US" sz="1200" b="1" dirty="0">
+                <a:solidFill>
+                  <a:srgbClr val="1C2833"/>
+                </a:solidFill>
+                <a:latin typeface="Arial" pitchFamily="34" charset="0"/>
+                <a:ea typeface="Arial" pitchFamily="34" charset="-122"/>
+                <a:cs typeface="Arial" pitchFamily="34" charset="-120"/>
+              </a:rPr>
+              <a:t>Islamic world:</a:t>
+            </a:r>
+            <a:pPr algn="l" indent="0" marL="0">
+              <a:lnSpc>
+                <a:spcPts val="1620"/>
+              </a:lnSpc>
+              <a:spcAft>
+                <a:spcPts val="300"/>
+              </a:spcAft>
+              <a:buNone/>
+            </a:pPr>
+            <a:r>
+              <a:rPr lang="en-US" sz="1200" dirty="0">
+                <a:solidFill>
+                  <a:srgbClr val="1C2833"/>
+                </a:solidFill>
+                <a:latin typeface="Arial" pitchFamily="34" charset="0"/>
+                <a:ea typeface="Arial" pitchFamily="34" charset="-122"/>
+                <a:cs typeface="Arial" pitchFamily="34" charset="-120"/>
+              </a:rPr>
+              <a:t> treatises by al-Bīrūnī (~11th c. CE) and others.</a:t>
+            </a:r>
+            <a:endParaRPr lang="en-US" sz="1200" dirty="0"/>
+          </a:p>
+          <a:p>
+            <a:pPr algn="l" marL="342900" indent="-342900">
+              <a:lnSpc>
+                <a:spcPts val="1620"/>
+              </a:lnSpc>
+              <a:spcAft>
+                <a:spcPts val="300"/>
+              </a:spcAft>
+              <a:buSzPct val="100000"/>
+              <a:buChar char="•"/>
+            </a:pPr>
+            <a:r>
+              <a:rPr lang="en-US" sz="1200" b="1" dirty="0">
+                <a:solidFill>
+                  <a:srgbClr val="1C2833"/>
+                </a:solidFill>
+                <a:latin typeface="Arial" pitchFamily="34" charset="0"/>
+                <a:ea typeface="Arial" pitchFamily="34" charset="-122"/>
+                <a:cs typeface="Arial" pitchFamily="34" charset="-120"/>
+              </a:rPr>
+              <a:t>Europe:</a:t>
+            </a:r>
+            <a:pPr algn="l" indent="0" marL="0">
+              <a:lnSpc>
+                <a:spcPts val="1620"/>
+              </a:lnSpc>
+              <a:spcAft>
+                <a:spcPts val="300"/>
+              </a:spcAft>
+              <a:buNone/>
+            </a:pPr>
+            <a:r>
+              <a:rPr lang="en-US" sz="1200" dirty="0">
+                <a:solidFill>
+                  <a:srgbClr val="1C2833"/>
+                </a:solidFill>
+                <a:latin typeface="Arial" pitchFamily="34" charset="0"/>
+                <a:ea typeface="Arial" pitchFamily="34" charset="-122"/>
+                <a:cs typeface="Arial" pitchFamily="34" charset="-120"/>
+              </a:rPr>
+              <a:t> through Islamic and (likely) Indian transmission by 14th–15th c.</a:t>
+            </a:r>
+            <a:endParaRPr lang="en-US" sz="1200" dirty="0"/>
+          </a:p>
+        </p:txBody>
+      </p:sp>
+      <p:sp>
+        <p:nvSpPr>
+          <p:cNvPr id="6" name="Text 4"/>
+          <p:cNvSpPr/>
+          <p:nvPr/>
+        </p:nvSpPr>
+        <p:spPr>
+          <a:xfrm>
+            <a:off x="406301" y="4434929"/>
+            <a:ext cx="8498026" cy="213271"/>
+          </a:xfrm>
+          <a:prstGeom prst="rect">
+            <a:avLst/>
+          </a:prstGeom>
+          <a:noFill/>
+          <a:ln/>
+        </p:spPr>
+        <p:txBody>
+          <a:bodyPr wrap="square" lIns="0" tIns="0" rIns="0" bIns="0" rtlCol="0" anchor="t"/>
+          <a:lstStyle/>
+          <a:p>
+            <a:pPr algn="l" indent="0" marL="0">
+              <a:lnSpc>
+                <a:spcPts val="1680"/>
+              </a:lnSpc>
+              <a:spcBef>
+                <a:spcPts val="300"/>
+              </a:spcBef>
+              <a:spcAft>
+                <a:spcPts val="300"/>
+              </a:spcAft>
+              <a:buNone/>
+            </a:pPr>
+            <a:r>
+              <a:rPr lang="en-US" sz="1200" dirty="0">
+                <a:solidFill>
+                  <a:srgbClr val="1C2833"/>
+                </a:solidFill>
+                <a:latin typeface="Arial" pitchFamily="34" charset="0"/>
+                <a:ea typeface="Arial" pitchFamily="34" charset="-122"/>
+                <a:cs typeface="Arial" pitchFamily="34" charset="-120"/>
+              </a:rPr>
+              <a:t>Middle ·  · IKS Curriculum</a:t>
+            </a:r>
+            <a:endParaRPr lang="en-US" sz="1200" dirty="0"/>
+          </a:p>
+        </p:txBody>
+      </p:sp>
+    </p:spTree>
+  </p:cSld>
+  <p:clrMapOvr>
+    <a:masterClrMapping/>
+  </p:clrMapOvr>
+</p:sld>
+</file>
+
+<file path=ppt/slides/slide17.xml><?xml version="1.0" encoding="utf-8"?>
+<p:sld xmlns:a="http://schemas.openxmlformats.org/drawingml/2006/main" xmlns:r="http://schemas.openxmlformats.org/officeDocument/2006/relationships" xmlns:p="http://schemas.openxmlformats.org/presentationml/2006/main">
+  <p:cSld name="Slide 17">
+    <p:bg>
+      <p:bgPr>
+        <a:solidFill>
+          <a:srgbClr val="FFFFFF"/>
+        </a:solidFill>
+      </p:bgPr>
+    </p:bg>
+    <p:spTree>
+      <p:nvGrpSpPr>
+        <p:cNvPr id="1" name=""/>
+        <p:cNvGrpSpPr/>
+        <p:nvPr/>
+      </p:nvGrpSpPr>
+      <p:grpSpPr>
+        <a:xfrm>
+          <a:off x="0" y="0"/>
+          <a:ext cx="0" cy="0"/>
+          <a:chOff x="0" y="0"/>
+          <a:chExt cx="0" cy="0"/>
+        </a:xfrm>
+      </p:grpSpPr>
+      <p:sp>
+        <p:nvSpPr>
+          <p:cNvPr id="2" name="Text 0"/>
+          <p:cNvSpPr/>
+          <p:nvPr/>
+        </p:nvSpPr>
+        <p:spPr>
+          <a:xfrm>
+            <a:off x="0" y="0"/>
+            <a:ext cx="9144000" cy="101501"/>
+          </a:xfrm>
+          <a:prstGeom prst="rect">
+            <a:avLst/>
+          </a:prstGeom>
+          <a:solidFill>
+            <a:srgbClr val="277884"/>
+          </a:solidFill>
+          <a:ln/>
+        </p:spPr>
+        <p:txBody>
+          <a:bodyPr wrap="square" rtlCol="0" anchor="ctr"/>
+          <a:lstStyle/>
+          <a:p>
+            <a:pPr indent="0" marL="0">
+              <a:buNone/>
+            </a:pPr>
+            <a:endParaRPr lang="en-US" dirty="0"/>
+          </a:p>
+        </p:txBody>
+      </p:sp>
+      <p:sp>
+        <p:nvSpPr>
+          <p:cNvPr id="3" name="Text 1"/>
+          <p:cNvSpPr/>
+          <p:nvPr/>
+        </p:nvSpPr>
+        <p:spPr>
+          <a:xfrm>
+            <a:off x="406301" y="457051"/>
+            <a:ext cx="8498026" cy="274290"/>
+          </a:xfrm>
+          <a:prstGeom prst="rect">
+            <a:avLst/>
+          </a:prstGeom>
+          <a:noFill/>
+          <a:ln/>
+        </p:spPr>
+        <p:txBody>
+          <a:bodyPr wrap="square" lIns="0" tIns="0" rIns="0" bIns="0" rtlCol="0" anchor="t"/>
+          <a:lstStyle/>
+          <a:p>
+            <a:pPr algn="l" indent="0" marL="0">
+              <a:lnSpc>
+                <a:spcPts val="2160"/>
+              </a:lnSpc>
+              <a:spcBef>
+                <a:spcPts val="600"/>
+              </a:spcBef>
+              <a:spcAft>
+                <a:spcPts val="800"/>
+              </a:spcAft>
+              <a:buNone/>
+            </a:pPr>
+            <a:r>
+              <a:rPr lang="en-US" sz="1800" b="1" dirty="0">
+                <a:solidFill>
+                  <a:srgbClr val="FE4447"/>
+                </a:solidFill>
+                <a:latin typeface="Georgia" pitchFamily="34" charset="0"/>
+                <a:ea typeface="Georgia" pitchFamily="34" charset="-122"/>
+                <a:cs typeface="Georgia" pitchFamily="34" charset="-120"/>
+              </a:rPr>
+              <a:t>Core (20 min) (cont.)</a:t>
+            </a:r>
+            <a:endParaRPr lang="en-US" sz="1800" dirty="0"/>
+          </a:p>
+        </p:txBody>
+      </p:sp>
+      <p:sp>
+        <p:nvSpPr>
+          <p:cNvPr id="4" name="Text 2"/>
+          <p:cNvSpPr/>
+          <p:nvPr/>
+        </p:nvSpPr>
+        <p:spPr>
+          <a:xfrm>
+            <a:off x="406301" y="870942"/>
+            <a:ext cx="8498026" cy="213271"/>
+          </a:xfrm>
+          <a:prstGeom prst="rect">
+            <a:avLst/>
+          </a:prstGeom>
+          <a:noFill/>
+          <a:ln/>
+        </p:spPr>
+        <p:txBody>
+          <a:bodyPr wrap="square" lIns="0" tIns="0" rIns="0" bIns="0" rtlCol="0" anchor="t"/>
+          <a:lstStyle/>
+          <a:p>
+            <a:pPr algn="l" indent="0" marL="0">
+              <a:lnSpc>
+                <a:spcPts val="1680"/>
+              </a:lnSpc>
+              <a:spcBef>
+                <a:spcPts val="300"/>
+              </a:spcBef>
+              <a:spcAft>
+                <a:spcPts val="300"/>
+              </a:spcAft>
+              <a:buNone/>
+            </a:pPr>
+            <a:r>
+              <a:rPr lang="en-US" sz="1200" dirty="0">
+                <a:solidFill>
+                  <a:srgbClr val="1C2833"/>
+                </a:solidFill>
+                <a:latin typeface="Arial" pitchFamily="34" charset="0"/>
+                <a:ea typeface="Arial" pitchFamily="34" charset="-122"/>
+                <a:cs typeface="Arial" pitchFamily="34" charset="-120"/>
+              </a:rPr>
+              <a:t>We do not have a clean story of "X invented it; Y borrowed it." Frame the topic as a </a:t>
+            </a:r>
+            <a:pPr algn="l" indent="0" marL="0">
+              <a:lnSpc>
+                <a:spcPts val="1680"/>
+              </a:lnSpc>
+              <a:spcBef>
+                <a:spcPts val="300"/>
+              </a:spcBef>
+              <a:spcAft>
+                <a:spcPts val="300"/>
+              </a:spcAft>
+              <a:buNone/>
+            </a:pPr>
+            <a:r>
               <a:rPr lang="en-US" sz="1200" i="1" dirty="0">
                 <a:solidFill>
                   <a:srgbClr val="1C2833"/>
@@ -3293,7 +5915,7 @@
                 <a:ea typeface="Arial" pitchFamily="34" charset="-122"/>
                 <a:cs typeface="Arial" pitchFamily="34" charset="-120"/>
               </a:rPr>
-              <a:t>Melencolia I</a:t>
+              <a:t>cross-cultural mathematical fascination</a:t>
             </a:r>
             <a:pPr algn="l" indent="0" marL="0">
               <a:lnSpc>
@@ -3316,8 +5938,33 @@
                 <a:ea typeface="Arial" pitchFamily="34" charset="-122"/>
                 <a:cs typeface="Arial" pitchFamily="34" charset="-120"/>
               </a:rPr>
-              <a:t> (1514) — material artefact. – Nārāyaṇa Paṇḍita, </a:t>
-            </a:r>
+              <a:t>.</a:t>
+            </a:r>
+            <a:endParaRPr lang="en-US" sz="1200" dirty="0"/>
+          </a:p>
+        </p:txBody>
+      </p:sp>
+      <p:sp>
+        <p:nvSpPr>
+          <p:cNvPr id="5" name="Text 3"/>
+          <p:cNvSpPr/>
+          <p:nvPr/>
+        </p:nvSpPr>
+        <p:spPr>
+          <a:xfrm>
+            <a:off x="406301" y="4434929"/>
+            <a:ext cx="8498026" cy="213271"/>
+          </a:xfrm>
+          <a:prstGeom prst="rect">
+            <a:avLst/>
+          </a:prstGeom>
+          <a:noFill/>
+          <a:ln/>
+        </p:spPr>
+        <p:txBody>
+          <a:bodyPr wrap="square" lIns="0" tIns="0" rIns="0" bIns="0" rtlCol="0" anchor="t"/>
+          <a:lstStyle/>
+          <a:p>
             <a:pPr algn="l" indent="0" marL="0">
               <a:lnSpc>
                 <a:spcPts val="1680"/>
@@ -3331,16 +5978,285 @@
               <a:buNone/>
             </a:pPr>
             <a:r>
-              <a:rPr lang="en-US" sz="1200" i="1" dirty="0">
-                <a:solidFill>
-                  <a:srgbClr val="1C2833"/>
-                </a:solidFill>
-                <a:latin typeface="Arial" pitchFamily="34" charset="0"/>
-                <a:ea typeface="Arial" pitchFamily="34" charset="-122"/>
-                <a:cs typeface="Arial" pitchFamily="34" charset="-120"/>
-              </a:rPr>
-              <a:t>Gaṇita-kaumudī</a:t>
-            </a:r>
+              <a:rPr lang="en-US" sz="1200" dirty="0">
+                <a:solidFill>
+                  <a:srgbClr val="1C2833"/>
+                </a:solidFill>
+                <a:latin typeface="Arial" pitchFamily="34" charset="0"/>
+                <a:ea typeface="Arial" pitchFamily="34" charset="-122"/>
+                <a:cs typeface="Arial" pitchFamily="34" charset="-120"/>
+              </a:rPr>
+              <a:t>Middle ·  · IKS Curriculum</a:t>
+            </a:r>
+            <a:endParaRPr lang="en-US" sz="1200" dirty="0"/>
+          </a:p>
+        </p:txBody>
+      </p:sp>
+    </p:spTree>
+  </p:cSld>
+  <p:clrMapOvr>
+    <a:masterClrMapping/>
+  </p:clrMapOvr>
+</p:sld>
+</file>
+
+<file path=ppt/slides/slide18.xml><?xml version="1.0" encoding="utf-8"?>
+<p:sld xmlns:a="http://schemas.openxmlformats.org/drawingml/2006/main" xmlns:r="http://schemas.openxmlformats.org/officeDocument/2006/relationships" xmlns:p="http://schemas.openxmlformats.org/presentationml/2006/main">
+  <p:cSld name="Slide 18">
+    <p:bg>
+      <p:bgPr>
+        <a:solidFill>
+          <a:srgbClr val="FFFFFF"/>
+        </a:solidFill>
+      </p:bgPr>
+    </p:bg>
+    <p:spTree>
+      <p:nvGrpSpPr>
+        <p:cNvPr id="1" name=""/>
+        <p:cNvGrpSpPr/>
+        <p:nvPr/>
+      </p:nvGrpSpPr>
+      <p:grpSpPr>
+        <a:xfrm>
+          <a:off x="0" y="0"/>
+          <a:ext cx="0" cy="0"/>
+          <a:chOff x="0" y="0"/>
+          <a:chExt cx="0" cy="0"/>
+        </a:xfrm>
+      </p:grpSpPr>
+      <p:sp>
+        <p:nvSpPr>
+          <p:cNvPr id="2" name="Text 0"/>
+          <p:cNvSpPr/>
+          <p:nvPr/>
+        </p:nvSpPr>
+        <p:spPr>
+          <a:xfrm>
+            <a:off x="0" y="0"/>
+            <a:ext cx="9144000" cy="101501"/>
+          </a:xfrm>
+          <a:prstGeom prst="rect">
+            <a:avLst/>
+          </a:prstGeom>
+          <a:solidFill>
+            <a:srgbClr val="277884"/>
+          </a:solidFill>
+          <a:ln/>
+        </p:spPr>
+        <p:txBody>
+          <a:bodyPr wrap="square" rtlCol="0" anchor="ctr"/>
+          <a:lstStyle/>
+          <a:p>
+            <a:pPr indent="0" marL="0">
+              <a:buNone/>
+            </a:pPr>
+            <a:endParaRPr lang="en-US" dirty="0"/>
+          </a:p>
+        </p:txBody>
+      </p:sp>
+      <p:sp>
+        <p:nvSpPr>
+          <p:cNvPr id="3" name="Text 1"/>
+          <p:cNvSpPr/>
+          <p:nvPr/>
+        </p:nvSpPr>
+        <p:spPr>
+          <a:xfrm>
+            <a:off x="406301" y="457051"/>
+            <a:ext cx="8498026" cy="274290"/>
+          </a:xfrm>
+          <a:prstGeom prst="rect">
+            <a:avLst/>
+          </a:prstGeom>
+          <a:noFill/>
+          <a:ln/>
+        </p:spPr>
+        <p:txBody>
+          <a:bodyPr wrap="square" lIns="0" tIns="0" rIns="0" bIns="0" rtlCol="0" anchor="t"/>
+          <a:lstStyle/>
+          <a:p>
+            <a:pPr algn="l" indent="0" marL="0">
+              <a:lnSpc>
+                <a:spcPts val="2160"/>
+              </a:lnSpc>
+              <a:spcBef>
+                <a:spcPts val="600"/>
+              </a:spcBef>
+              <a:spcAft>
+                <a:spcPts val="800"/>
+              </a:spcAft>
+              <a:buNone/>
+            </a:pPr>
+            <a:r>
+              <a:rPr lang="en-US" sz="1800" b="1" dirty="0">
+                <a:solidFill>
+                  <a:srgbClr val="FE4447"/>
+                </a:solidFill>
+                <a:latin typeface="Georgia" pitchFamily="34" charset="0"/>
+                <a:ea typeface="Georgia" pitchFamily="34" charset="-122"/>
+                <a:cs typeface="Georgia" pitchFamily="34" charset="-120"/>
+              </a:rPr>
+              <a:t>Activity (15 min) — Project planning</a:t>
+            </a:r>
+            <a:endParaRPr lang="en-US" sz="1800" dirty="0"/>
+          </a:p>
+        </p:txBody>
+      </p:sp>
+      <p:sp>
+        <p:nvSpPr>
+          <p:cNvPr id="4" name="Text 2"/>
+          <p:cNvSpPr/>
+          <p:nvPr/>
+        </p:nvSpPr>
+        <p:spPr>
+          <a:xfrm>
+            <a:off x="634901" y="883593"/>
+            <a:ext cx="8102798" cy="788491"/>
+          </a:xfrm>
+          <a:prstGeom prst="rect">
+            <a:avLst/>
+          </a:prstGeom>
+          <a:noFill/>
+          <a:ln/>
+        </p:spPr>
+        <p:txBody>
+          <a:bodyPr wrap="square" lIns="0" tIns="0" rIns="0" bIns="0" rtlCol="0" anchor="t"/>
+          <a:lstStyle/>
+          <a:p>
+            <a:pPr algn="l" marL="342900" indent="-342900">
+              <a:lnSpc>
+                <a:spcPts val="1620"/>
+              </a:lnSpc>
+              <a:spcAft>
+                <a:spcPts val="300"/>
+              </a:spcAft>
+              <a:buSzPct val="100000"/>
+              <a:buChar char="•"/>
+            </a:pPr>
+            <a:r>
+              <a:rPr lang="en-US" sz="1200" dirty="0">
+                <a:solidFill>
+                  <a:srgbClr val="1C2833"/>
+                </a:solidFill>
+                <a:latin typeface="Arial" pitchFamily="34" charset="0"/>
+                <a:ea typeface="Arial" pitchFamily="34" charset="-122"/>
+                <a:cs typeface="Arial" pitchFamily="34" charset="-120"/>
+              </a:rPr>
+              <a:t>Use </a:t>
+            </a:r>
+            <a:pPr algn="l" indent="0" marL="0">
+              <a:lnSpc>
+                <a:spcPts val="1620"/>
+              </a:lnSpc>
+              <a:spcAft>
+                <a:spcPts val="300"/>
+              </a:spcAft>
+              <a:buNone/>
+            </a:pPr>
+            <a:r>
+              <a:rPr lang="en-US" sz="1200" dirty="0">
+                <a:solidFill>
+                  <a:srgbClr val="1C2833"/>
+                </a:solidFill>
+                <a:latin typeface="Arial" pitchFamily="34" charset="0"/>
+                <a:ea typeface="Arial" pitchFamily="34" charset="-122"/>
+                <a:cs typeface="Arial" pitchFamily="34" charset="-120"/>
+              </a:rPr>
+              <a:t>activities/activity-02-cross-cultural-compare.md</a:t>
+            </a:r>
+            <a:pPr algn="l" indent="0" marL="0">
+              <a:lnSpc>
+                <a:spcPts val="1620"/>
+              </a:lnSpc>
+              <a:spcAft>
+                <a:spcPts val="300"/>
+              </a:spcAft>
+              <a:buNone/>
+            </a:pPr>
+            <a:r>
+              <a:rPr lang="en-US" sz="1200" dirty="0">
+                <a:solidFill>
+                  <a:srgbClr val="1C2833"/>
+                </a:solidFill>
+                <a:latin typeface="Arial" pitchFamily="34" charset="0"/>
+                <a:ea typeface="Arial" pitchFamily="34" charset="-122"/>
+                <a:cs typeface="Arial" pitchFamily="34" charset="-120"/>
+              </a:rPr>
+              <a:t> (a side-by-side worksheet).</a:t>
+            </a:r>
+            <a:endParaRPr lang="en-US" sz="1200" dirty="0"/>
+          </a:p>
+          <a:p>
+            <a:pPr algn="l" marL="342900" indent="-342900">
+              <a:lnSpc>
+                <a:spcPts val="1620"/>
+              </a:lnSpc>
+              <a:spcAft>
+                <a:spcPts val="300"/>
+              </a:spcAft>
+              <a:buSzPct val="100000"/>
+              <a:buChar char="•"/>
+            </a:pPr>
+            <a:r>
+              <a:rPr lang="en-US" sz="1200" dirty="0">
+                <a:solidFill>
+                  <a:srgbClr val="1C2833"/>
+                </a:solidFill>
+                <a:latin typeface="Arial" pitchFamily="34" charset="0"/>
+                <a:ea typeface="Arial" pitchFamily="34" charset="-122"/>
+                <a:cs typeface="Arial" pitchFamily="34" charset="-120"/>
+              </a:rPr>
+              <a:t>Pairs commit to their project format (poster / video / written exposition) and one or two key ideas.</a:t>
+            </a:r>
+            <a:endParaRPr lang="en-US" sz="1200" dirty="0"/>
+          </a:p>
+          <a:p>
+            <a:pPr algn="l" marL="342900" indent="-342900">
+              <a:lnSpc>
+                <a:spcPts val="1620"/>
+              </a:lnSpc>
+              <a:spcAft>
+                <a:spcPts val="300"/>
+              </a:spcAft>
+              <a:buSzPct val="100000"/>
+              <a:buChar char="•"/>
+            </a:pPr>
+            <a:r>
+              <a:rPr lang="en-US" sz="1200" dirty="0">
+                <a:solidFill>
+                  <a:srgbClr val="1C2833"/>
+                </a:solidFill>
+                <a:latin typeface="Arial" pitchFamily="34" charset="0"/>
+                <a:ea typeface="Arial" pitchFamily="34" charset="-122"/>
+                <a:cs typeface="Arial" pitchFamily="34" charset="-120"/>
+              </a:rPr>
+              <a:t>Each pair writes a 3-sentence project plan, hands in for teacher review by end of class.</a:t>
+            </a:r>
+            <a:endParaRPr lang="en-US" sz="1200" dirty="0"/>
+          </a:p>
+        </p:txBody>
+      </p:sp>
+      <p:sp>
+        <p:nvSpPr>
+          <p:cNvPr id="5" name="Text 3"/>
+          <p:cNvSpPr/>
+          <p:nvPr/>
+        </p:nvSpPr>
+        <p:spPr>
+          <a:xfrm>
+            <a:off x="406301" y="4434929"/>
+            <a:ext cx="8498026" cy="213271"/>
+          </a:xfrm>
+          <a:prstGeom prst="rect">
+            <a:avLst/>
+          </a:prstGeom>
+          <a:noFill/>
+          <a:ln/>
+        </p:spPr>
+        <p:txBody>
+          <a:bodyPr wrap="square" lIns="0" tIns="0" rIns="0" bIns="0" rtlCol="0" anchor="t"/>
+          <a:lstStyle/>
+          <a:p>
             <a:pPr algn="l" indent="0" marL="0">
               <a:lnSpc>
                 <a:spcPts val="1680"/>
@@ -3362,7 +6278,187 @@
                 <a:ea typeface="Arial" pitchFamily="34" charset="-122"/>
                 <a:cs typeface="Arial" pitchFamily="34" charset="-120"/>
               </a:rPr>
-              <a:t>, Book 14, 1356 CE — for context on Indian systematic treatment.</a:t>
+              <a:t>Middle ·  · IKS Curriculum</a:t>
+            </a:r>
+            <a:endParaRPr lang="en-US" sz="1200" dirty="0"/>
+          </a:p>
+        </p:txBody>
+      </p:sp>
+    </p:spTree>
+  </p:cSld>
+  <p:clrMapOvr>
+    <a:masterClrMapping/>
+  </p:clrMapOvr>
+</p:sld>
+</file>
+
+<file path=ppt/slides/slide19.xml><?xml version="1.0" encoding="utf-8"?>
+<p:sld xmlns:a="http://schemas.openxmlformats.org/drawingml/2006/main" xmlns:r="http://schemas.openxmlformats.org/officeDocument/2006/relationships" xmlns:p="http://schemas.openxmlformats.org/presentationml/2006/main">
+  <p:cSld name="Slide 19">
+    <p:bg>
+      <p:bgPr>
+        <a:solidFill>
+          <a:srgbClr val="FFFFFF"/>
+        </a:solidFill>
+      </p:bgPr>
+    </p:bg>
+    <p:spTree>
+      <p:nvGrpSpPr>
+        <p:cNvPr id="1" name=""/>
+        <p:cNvGrpSpPr/>
+        <p:nvPr/>
+      </p:nvGrpSpPr>
+      <p:grpSpPr>
+        <a:xfrm>
+          <a:off x="0" y="0"/>
+          <a:ext cx="0" cy="0"/>
+          <a:chOff x="0" y="0"/>
+          <a:chExt cx="0" cy="0"/>
+        </a:xfrm>
+      </p:grpSpPr>
+      <p:sp>
+        <p:nvSpPr>
+          <p:cNvPr id="2" name="Text 0"/>
+          <p:cNvSpPr/>
+          <p:nvPr/>
+        </p:nvSpPr>
+        <p:spPr>
+          <a:xfrm>
+            <a:off x="0" y="0"/>
+            <a:ext cx="9144000" cy="101501"/>
+          </a:xfrm>
+          <a:prstGeom prst="rect">
+            <a:avLst/>
+          </a:prstGeom>
+          <a:solidFill>
+            <a:srgbClr val="277884"/>
+          </a:solidFill>
+          <a:ln/>
+        </p:spPr>
+        <p:txBody>
+          <a:bodyPr wrap="square" rtlCol="0" anchor="ctr"/>
+          <a:lstStyle/>
+          <a:p>
+            <a:pPr indent="0" marL="0">
+              <a:buNone/>
+            </a:pPr>
+            <a:endParaRPr lang="en-US" dirty="0"/>
+          </a:p>
+        </p:txBody>
+      </p:sp>
+      <p:sp>
+        <p:nvSpPr>
+          <p:cNvPr id="3" name="Text 1"/>
+          <p:cNvSpPr/>
+          <p:nvPr/>
+        </p:nvSpPr>
+        <p:spPr>
+          <a:xfrm>
+            <a:off x="406301" y="457051"/>
+            <a:ext cx="8498026" cy="274290"/>
+          </a:xfrm>
+          <a:prstGeom prst="rect">
+            <a:avLst/>
+          </a:prstGeom>
+          <a:noFill/>
+          <a:ln/>
+        </p:spPr>
+        <p:txBody>
+          <a:bodyPr wrap="square" lIns="0" tIns="0" rIns="0" bIns="0" rtlCol="0" anchor="t"/>
+          <a:lstStyle/>
+          <a:p>
+            <a:pPr algn="l" indent="0" marL="0">
+              <a:lnSpc>
+                <a:spcPts val="2160"/>
+              </a:lnSpc>
+              <a:spcBef>
+                <a:spcPts val="600"/>
+              </a:spcBef>
+              <a:spcAft>
+                <a:spcPts val="800"/>
+              </a:spcAft>
+              <a:buNone/>
+            </a:pPr>
+            <a:r>
+              <a:rPr lang="en-US" sz="1800" b="1" dirty="0">
+                <a:solidFill>
+                  <a:srgbClr val="FE4447"/>
+                </a:solidFill>
+                <a:latin typeface="Georgia" pitchFamily="34" charset="0"/>
+                <a:ea typeface="Georgia" pitchFamily="34" charset="-122"/>
+                <a:cs typeface="Georgia" pitchFamily="34" charset="-120"/>
+              </a:rPr>
+              <a:t>Wrap-up (5 min)</a:t>
+            </a:r>
+            <a:endParaRPr lang="en-US" sz="1800" dirty="0"/>
+          </a:p>
+        </p:txBody>
+      </p:sp>
+      <p:sp>
+        <p:nvSpPr>
+          <p:cNvPr id="4" name="Text 2"/>
+          <p:cNvSpPr/>
+          <p:nvPr/>
+        </p:nvSpPr>
+        <p:spPr>
+          <a:xfrm>
+            <a:off x="634901" y="883593"/>
+            <a:ext cx="8102798" cy="525661"/>
+          </a:xfrm>
+          <a:prstGeom prst="rect">
+            <a:avLst/>
+          </a:prstGeom>
+          <a:noFill/>
+          <a:ln/>
+        </p:spPr>
+        <p:txBody>
+          <a:bodyPr wrap="square" lIns="0" tIns="0" rIns="0" bIns="0" rtlCol="0" anchor="t"/>
+          <a:lstStyle/>
+          <a:p>
+            <a:pPr algn="l" marL="342900" indent="-342900">
+              <a:lnSpc>
+                <a:spcPts val="1620"/>
+              </a:lnSpc>
+              <a:spcAft>
+                <a:spcPts val="300"/>
+              </a:spcAft>
+              <a:buSzPct val="100000"/>
+              <a:buChar char="•"/>
+            </a:pPr>
+            <a:r>
+              <a:rPr lang="en-US" sz="1200" dirty="0">
+                <a:solidFill>
+                  <a:srgbClr val="1C2833"/>
+                </a:solidFill>
+                <a:latin typeface="Arial" pitchFamily="34" charset="0"/>
+                <a:ea typeface="Arial" pitchFamily="34" charset="-122"/>
+                <a:cs typeface="Arial" pitchFamily="34" charset="-120"/>
+              </a:rPr>
+              <a:t>Two-pair quick share: "Our project is going to be ___ because ___."</a:t>
+            </a:r>
+            <a:endParaRPr lang="en-US" sz="1200" dirty="0"/>
+          </a:p>
+          <a:p>
+            <a:pPr algn="l" marL="342900" indent="-342900">
+              <a:lnSpc>
+                <a:spcPts val="1620"/>
+              </a:lnSpc>
+              <a:spcAft>
+                <a:spcPts val="300"/>
+              </a:spcAft>
+              <a:buSzPct val="100000"/>
+              <a:buChar char="•"/>
+            </a:pPr>
+            <a:r>
+              <a:rPr lang="en-US" sz="1200" dirty="0">
+                <a:solidFill>
+                  <a:srgbClr val="1C2833"/>
+                </a:solidFill>
+                <a:latin typeface="Arial" pitchFamily="34" charset="0"/>
+                <a:ea typeface="Arial" pitchFamily="34" charset="-122"/>
+                <a:cs typeface="Arial" pitchFamily="34" charset="-120"/>
+              </a:rPr>
+              <a:t>Preview Day 9: project work + a brief look at Sudoku.</a:t>
             </a:r>
             <a:endParaRPr lang="en-US" sz="1200" dirty="0"/>
           </a:p>
@@ -3520,7 +6616,7 @@
                 <a:ea typeface="Georgia" pitchFamily="34" charset="-122"/>
                 <a:cs typeface="Georgia" pitchFamily="34" charset="-120"/>
               </a:rPr>
-              <a:t>Materials</a:t>
+              <a:t>Learning objective</a:t>
             </a:r>
             <a:endParaRPr lang="en-US" sz="1800" dirty="0"/>
           </a:p>
@@ -3568,7 +6664,7 @@
                 <a:ea typeface="Arial" pitchFamily="34" charset="-122"/>
                 <a:cs typeface="Arial" pitchFamily="34" charset="-120"/>
               </a:rPr>
-              <a:t>– Image of the Lo Shu square (turtle-shell pattern is helpful) – Image of Dürer's </a:t>
+              <a:t>By the end of this lesson, students will (a) identify the Chinese </a:t>
             </a:r>
             <a:pPr algn="l" indent="0" marL="0">
               <a:lnSpc>
@@ -3591,6 +6687,52 @@
                 <a:ea typeface="Arial" pitchFamily="34" charset="-122"/>
                 <a:cs typeface="Arial" pitchFamily="34" charset="-120"/>
               </a:rPr>
+              <a:t>Lo Shu</a:t>
+            </a:r>
+            <a:pPr algn="l" indent="0" marL="0">
+              <a:lnSpc>
+                <a:spcPts val="1680"/>
+              </a:lnSpc>
+              <a:spcBef>
+                <a:spcPts val="300"/>
+              </a:spcBef>
+              <a:spcAft>
+                <a:spcPts val="300"/>
+              </a:spcAft>
+              <a:buNone/>
+            </a:pPr>
+            <a:r>
+              <a:rPr lang="en-US" sz="1200" dirty="0">
+                <a:solidFill>
+                  <a:srgbClr val="1C2833"/>
+                </a:solidFill>
+                <a:latin typeface="Arial" pitchFamily="34" charset="0"/>
+                <a:ea typeface="Arial" pitchFamily="34" charset="-122"/>
+                <a:cs typeface="Arial" pitchFamily="34" charset="-120"/>
+              </a:rPr>
+              <a:t> and Albrecht Dürer's </a:t>
+            </a:r>
+            <a:pPr algn="l" indent="0" marL="0">
+              <a:lnSpc>
+                <a:spcPts val="1680"/>
+              </a:lnSpc>
+              <a:spcBef>
+                <a:spcPts val="300"/>
+              </a:spcBef>
+              <a:spcAft>
+                <a:spcPts val="300"/>
+              </a:spcAft>
+              <a:buNone/>
+            </a:pPr>
+            <a:r>
+              <a:rPr lang="en-US" sz="1200" i="1" dirty="0">
+                <a:solidFill>
+                  <a:srgbClr val="1C2833"/>
+                </a:solidFill>
+                <a:latin typeface="Arial" pitchFamily="34" charset="0"/>
+                <a:ea typeface="Arial" pitchFamily="34" charset="-122"/>
+                <a:cs typeface="Arial" pitchFamily="34" charset="-120"/>
+              </a:rPr>
               <a:t>Melencolia I</a:t>
             </a:r>
             <a:pPr algn="l" indent="0" marL="0">
@@ -3614,7 +6756,1844 @@
                 <a:ea typeface="Arial" pitchFamily="34" charset="-122"/>
                 <a:cs typeface="Arial" pitchFamily="34" charset="-120"/>
               </a:rPr>
-              <a:t> (1514) with the 4×4 corner visible – Project planning sheet (one per pair)</a:t>
+              <a:t> magic squares, (b) note structural similarities and differences across cultures, and (c) begin their project planning.</a:t>
+            </a:r>
+            <a:endParaRPr lang="en-US" sz="1200" dirty="0"/>
+          </a:p>
+        </p:txBody>
+      </p:sp>
+      <p:sp>
+        <p:nvSpPr>
+          <p:cNvPr id="5" name="Text 3"/>
+          <p:cNvSpPr/>
+          <p:nvPr/>
+        </p:nvSpPr>
+        <p:spPr>
+          <a:xfrm>
+            <a:off x="406301" y="4434929"/>
+            <a:ext cx="8498026" cy="213271"/>
+          </a:xfrm>
+          <a:prstGeom prst="rect">
+            <a:avLst/>
+          </a:prstGeom>
+          <a:noFill/>
+          <a:ln/>
+        </p:spPr>
+        <p:txBody>
+          <a:bodyPr wrap="square" lIns="0" tIns="0" rIns="0" bIns="0" rtlCol="0" anchor="t"/>
+          <a:lstStyle/>
+          <a:p>
+            <a:pPr algn="l" indent="0" marL="0">
+              <a:lnSpc>
+                <a:spcPts val="1680"/>
+              </a:lnSpc>
+              <a:spcBef>
+                <a:spcPts val="300"/>
+              </a:spcBef>
+              <a:spcAft>
+                <a:spcPts val="300"/>
+              </a:spcAft>
+              <a:buNone/>
+            </a:pPr>
+            <a:r>
+              <a:rPr lang="en-US" sz="1200" dirty="0">
+                <a:solidFill>
+                  <a:srgbClr val="1C2833"/>
+                </a:solidFill>
+                <a:latin typeface="Arial" pitchFamily="34" charset="0"/>
+                <a:ea typeface="Arial" pitchFamily="34" charset="-122"/>
+                <a:cs typeface="Arial" pitchFamily="34" charset="-120"/>
+              </a:rPr>
+              <a:t>Middle ·  · IKS Curriculum</a:t>
+            </a:r>
+            <a:endParaRPr lang="en-US" sz="1200" dirty="0"/>
+          </a:p>
+        </p:txBody>
+      </p:sp>
+    </p:spTree>
+  </p:cSld>
+  <p:clrMapOvr>
+    <a:masterClrMapping/>
+  </p:clrMapOvr>
+</p:sld>
+</file>
+
+<file path=ppt/slides/slide20.xml><?xml version="1.0" encoding="utf-8"?>
+<p:sld xmlns:a="http://schemas.openxmlformats.org/drawingml/2006/main" xmlns:r="http://schemas.openxmlformats.org/officeDocument/2006/relationships" xmlns:p="http://schemas.openxmlformats.org/presentationml/2006/main">
+  <p:cSld name="Slide 20">
+    <p:bg>
+      <p:bgPr>
+        <a:solidFill>
+          <a:srgbClr val="FFFFFF"/>
+        </a:solidFill>
+      </p:bgPr>
+    </p:bg>
+    <p:spTree>
+      <p:nvGrpSpPr>
+        <p:cNvPr id="1" name=""/>
+        <p:cNvGrpSpPr/>
+        <p:nvPr/>
+      </p:nvGrpSpPr>
+      <p:grpSpPr>
+        <a:xfrm>
+          <a:off x="0" y="0"/>
+          <a:ext cx="0" cy="0"/>
+          <a:chOff x="0" y="0"/>
+          <a:chExt cx="0" cy="0"/>
+        </a:xfrm>
+      </p:grpSpPr>
+      <p:sp>
+        <p:nvSpPr>
+          <p:cNvPr id="2" name="Text 0"/>
+          <p:cNvSpPr/>
+          <p:nvPr/>
+        </p:nvSpPr>
+        <p:spPr>
+          <a:xfrm>
+            <a:off x="0" y="0"/>
+            <a:ext cx="9144000" cy="101501"/>
+          </a:xfrm>
+          <a:prstGeom prst="rect">
+            <a:avLst/>
+          </a:prstGeom>
+          <a:solidFill>
+            <a:srgbClr val="277884"/>
+          </a:solidFill>
+          <a:ln/>
+        </p:spPr>
+        <p:txBody>
+          <a:bodyPr wrap="square" rtlCol="0" anchor="ctr"/>
+          <a:lstStyle/>
+          <a:p>
+            <a:pPr indent="0" marL="0">
+              <a:buNone/>
+            </a:pPr>
+            <a:endParaRPr lang="en-US" dirty="0"/>
+          </a:p>
+        </p:txBody>
+      </p:sp>
+      <p:sp>
+        <p:nvSpPr>
+          <p:cNvPr id="3" name="Text 1"/>
+          <p:cNvSpPr/>
+          <p:nvPr/>
+        </p:nvSpPr>
+        <p:spPr>
+          <a:xfrm>
+            <a:off x="406301" y="457051"/>
+            <a:ext cx="8498026" cy="274290"/>
+          </a:xfrm>
+          <a:prstGeom prst="rect">
+            <a:avLst/>
+          </a:prstGeom>
+          <a:noFill/>
+          <a:ln/>
+        </p:spPr>
+        <p:txBody>
+          <a:bodyPr wrap="square" lIns="0" tIns="0" rIns="0" bIns="0" rtlCol="0" anchor="t"/>
+          <a:lstStyle/>
+          <a:p>
+            <a:pPr algn="l" indent="0" marL="0">
+              <a:lnSpc>
+                <a:spcPts val="2160"/>
+              </a:lnSpc>
+              <a:spcBef>
+                <a:spcPts val="600"/>
+              </a:spcBef>
+              <a:spcAft>
+                <a:spcPts val="800"/>
+              </a:spcAft>
+              <a:buNone/>
+            </a:pPr>
+            <a:r>
+              <a:rPr lang="en-US" sz="1800" b="1" dirty="0">
+                <a:solidFill>
+                  <a:srgbClr val="FE4447"/>
+                </a:solidFill>
+                <a:latin typeface="Georgia" pitchFamily="34" charset="0"/>
+                <a:ea typeface="Georgia" pitchFamily="34" charset="-122"/>
+                <a:cs typeface="Georgia" pitchFamily="34" charset="-120"/>
+              </a:rPr>
+              <a:t>Student-facing content</a:t>
+            </a:r>
+            <a:endParaRPr lang="en-US" sz="1800" dirty="0"/>
+          </a:p>
+        </p:txBody>
+      </p:sp>
+      <p:sp>
+        <p:nvSpPr>
+          <p:cNvPr id="4" name="Text 2"/>
+          <p:cNvSpPr/>
+          <p:nvPr/>
+        </p:nvSpPr>
+        <p:spPr>
+          <a:xfrm>
+            <a:off x="406301" y="883593"/>
+            <a:ext cx="8331398" cy="2631281"/>
+          </a:xfrm>
+          <a:prstGeom prst="rect">
+            <a:avLst/>
+          </a:prstGeom>
+          <a:solidFill>
+            <a:srgbClr val="F4F8F9"/>
+          </a:solidFill>
+          <a:ln/>
+        </p:spPr>
+        <p:txBody>
+          <a:bodyPr wrap="square" rtlCol="0" anchor="ctr"/>
+          <a:lstStyle/>
+          <a:p>
+            <a:pPr indent="0" marL="0">
+              <a:buNone/>
+            </a:pPr>
+            <a:endParaRPr lang="en-US" dirty="0"/>
+          </a:p>
+        </p:txBody>
+      </p:sp>
+      <p:sp>
+        <p:nvSpPr>
+          <p:cNvPr id="5" name="Shape 3"/>
+          <p:cNvSpPr/>
+          <p:nvPr/>
+        </p:nvSpPr>
+        <p:spPr>
+          <a:xfrm>
+            <a:off x="434876" y="883593"/>
+            <a:ext cx="0" cy="2631281"/>
+          </a:xfrm>
+          <a:prstGeom prst="line">
+            <a:avLst/>
+          </a:prstGeom>
+          <a:noFill/>
+          <a:ln w="57150">
+            <a:solidFill>
+              <a:srgbClr val="FE4447"/>
+            </a:solidFill>
+            <a:prstDash val="solid"/>
+          </a:ln>
+        </p:spPr>
+      </p:sp>
+      <p:sp>
+        <p:nvSpPr>
+          <p:cNvPr id="6" name="Text 4"/>
+          <p:cNvSpPr/>
+          <p:nvPr/>
+        </p:nvSpPr>
+        <p:spPr>
+          <a:xfrm>
+            <a:off x="692051" y="1074093"/>
+            <a:ext cx="7973389" cy="230981"/>
+          </a:xfrm>
+          <a:prstGeom prst="rect">
+            <a:avLst/>
+          </a:prstGeom>
+          <a:noFill/>
+          <a:ln/>
+        </p:spPr>
+        <p:txBody>
+          <a:bodyPr wrap="square" lIns="0" tIns="0" rIns="0" bIns="0" rtlCol="0" anchor="t"/>
+          <a:lstStyle/>
+          <a:p>
+            <a:pPr algn="l" indent="0" marL="0">
+              <a:lnSpc>
+                <a:spcPts val="1820"/>
+              </a:lnSpc>
+              <a:spcBef>
+                <a:spcPts val="300"/>
+              </a:spcBef>
+              <a:spcAft>
+                <a:spcPts val="300"/>
+              </a:spcAft>
+              <a:buNone/>
+            </a:pPr>
+            <a:r>
+              <a:rPr lang="en-US" sz="1300" b="1" i="1" dirty="0">
+                <a:solidFill>
+                  <a:srgbClr val="1C2833"/>
+                </a:solidFill>
+                <a:latin typeface="Georgia" pitchFamily="34" charset="0"/>
+                <a:ea typeface="Georgia" pitchFamily="34" charset="-122"/>
+                <a:cs typeface="Georgia" pitchFamily="34" charset="-120"/>
+              </a:rPr>
+              <a:t>Magic squares across cultures.</a:t>
+            </a:r>
+            <a:endParaRPr lang="en-US" sz="1300" dirty="0"/>
+          </a:p>
+        </p:txBody>
+      </p:sp>
+      <p:sp>
+        <p:nvSpPr>
+          <p:cNvPr id="7" name="Text 5"/>
+          <p:cNvSpPr/>
+          <p:nvPr/>
+        </p:nvSpPr>
+        <p:spPr>
+          <a:xfrm>
+            <a:off x="692051" y="1343174"/>
+            <a:ext cx="7973389" cy="750094"/>
+          </a:xfrm>
+          <a:prstGeom prst="rect">
+            <a:avLst/>
+          </a:prstGeom>
+          <a:noFill/>
+          <a:ln/>
+        </p:spPr>
+        <p:txBody>
+          <a:bodyPr wrap="square" lIns="0" tIns="0" rIns="0" bIns="0" rtlCol="0" anchor="t"/>
+          <a:lstStyle/>
+          <a:p>
+            <a:pPr algn="l" indent="0" marL="0">
+              <a:lnSpc>
+                <a:spcPts val="1820"/>
+              </a:lnSpc>
+              <a:spcBef>
+                <a:spcPts val="300"/>
+              </a:spcBef>
+              <a:spcAft>
+                <a:spcPts val="300"/>
+              </a:spcAft>
+              <a:buNone/>
+            </a:pPr>
+            <a:r>
+              <a:rPr lang="en-US" sz="1300" dirty="0">
+                <a:solidFill>
+                  <a:srgbClr val="1C2833"/>
+                </a:solidFill>
+                <a:latin typeface="Georgia" pitchFamily="34" charset="0"/>
+                <a:ea typeface="Georgia" pitchFamily="34" charset="-122"/>
+                <a:cs typeface="Georgia" pitchFamily="34" charset="-120"/>
+              </a:rPr>
+              <a:t>``</a:t>
+            </a:r>
+            <a:pPr algn="l" indent="0" marL="0">
+              <a:lnSpc>
+                <a:spcPts val="1820"/>
+              </a:lnSpc>
+              <a:spcBef>
+                <a:spcPts val="300"/>
+              </a:spcBef>
+              <a:spcAft>
+                <a:spcPts val="300"/>
+              </a:spcAft>
+              <a:buNone/>
+            </a:pPr>
+            <a:r>
+              <a:rPr lang="en-US" sz="1300" i="1" dirty="0">
+                <a:solidFill>
+                  <a:srgbClr val="1C2833"/>
+                </a:solidFill>
+                <a:latin typeface="Georgia" pitchFamily="34" charset="0"/>
+                <a:ea typeface="Georgia" pitchFamily="34" charset="-122"/>
+                <a:cs typeface="Georgia" pitchFamily="34" charset="-120"/>
+              </a:rPr>
+              <a:t> Lo Shu (China, ~5th c. BCE) Dürer (Germany, 1514 CE) 4 | 9 | 2 16 | 3 | 2 | 13 --------- ---------------- 3 | 5 | 7 5 | 10 | 11 | 8 --------- ---------------- 8 | 1 | 6 9 | 6 | 7 | 12 ---------------- 4 | 15 | 14 | 1</a:t>
+            </a:r>
+            <a:pPr algn="l" indent="0" marL="0">
+              <a:lnSpc>
+                <a:spcPts val="1820"/>
+              </a:lnSpc>
+              <a:spcBef>
+                <a:spcPts val="300"/>
+              </a:spcBef>
+              <a:spcAft>
+                <a:spcPts val="300"/>
+              </a:spcAft>
+              <a:buNone/>
+            </a:pPr>
+            <a:r>
+              <a:rPr lang="en-US" sz="1300" dirty="0">
+                <a:solidFill>
+                  <a:srgbClr val="1C2833"/>
+                </a:solidFill>
+                <a:latin typeface="Georgia" pitchFamily="34" charset="0"/>
+                <a:ea typeface="Georgia" pitchFamily="34" charset="-122"/>
+                <a:cs typeface="Georgia" pitchFamily="34" charset="-120"/>
+              </a:rPr>
+              <a:t>``</a:t>
+            </a:r>
+            <a:endParaRPr lang="en-US" sz="1300" dirty="0"/>
+          </a:p>
+        </p:txBody>
+      </p:sp>
+      <p:sp>
+        <p:nvSpPr>
+          <p:cNvPr id="8" name="Text 6"/>
+          <p:cNvSpPr/>
+          <p:nvPr/>
+        </p:nvSpPr>
+        <p:spPr>
+          <a:xfrm>
+            <a:off x="692051" y="2131368"/>
+            <a:ext cx="7973389" cy="461963"/>
+          </a:xfrm>
+          <a:prstGeom prst="rect">
+            <a:avLst/>
+          </a:prstGeom>
+          <a:noFill/>
+          <a:ln/>
+        </p:spPr>
+        <p:txBody>
+          <a:bodyPr wrap="square" lIns="0" tIns="0" rIns="0" bIns="0" rtlCol="0" anchor="t"/>
+          <a:lstStyle/>
+          <a:p>
+            <a:pPr algn="l" indent="0" marL="0">
+              <a:lnSpc>
+                <a:spcPts val="1820"/>
+              </a:lnSpc>
+              <a:spcBef>
+                <a:spcPts val="300"/>
+              </a:spcBef>
+              <a:spcAft>
+                <a:spcPts val="300"/>
+              </a:spcAft>
+              <a:buNone/>
+            </a:pPr>
+            <a:r>
+              <a:rPr lang="en-US" sz="1300" dirty="0">
+                <a:solidFill>
+                  <a:srgbClr val="1C2833"/>
+                </a:solidFill>
+                <a:latin typeface="Georgia" pitchFamily="34" charset="0"/>
+                <a:ea typeface="Georgia" pitchFamily="34" charset="-122"/>
+                <a:cs typeface="Georgia" pitchFamily="34" charset="-120"/>
+              </a:rPr>
+              <a:t>The Lo Shu 3×3 is the same square as our Day-1 example (up to symmetry). The Dürer 4×4 shares the </a:t>
+            </a:r>
+            <a:pPr algn="l" indent="0" marL="0">
+              <a:lnSpc>
+                <a:spcPts val="1820"/>
+              </a:lnSpc>
+              <a:spcBef>
+                <a:spcPts val="300"/>
+              </a:spcBef>
+              <a:spcAft>
+                <a:spcPts val="300"/>
+              </a:spcAft>
+              <a:buNone/>
+            </a:pPr>
+            <a:r>
+              <a:rPr lang="en-US" sz="1300" b="1" i="1" dirty="0">
+                <a:solidFill>
+                  <a:srgbClr val="1C2833"/>
+                </a:solidFill>
+                <a:latin typeface="Georgia" pitchFamily="34" charset="0"/>
+                <a:ea typeface="Georgia" pitchFamily="34" charset="-122"/>
+                <a:cs typeface="Georgia" pitchFamily="34" charset="-120"/>
+              </a:rPr>
+              <a:t>panel-magic</a:t>
+            </a:r>
+            <a:pPr algn="l" indent="0" marL="0">
+              <a:lnSpc>
+                <a:spcPts val="1820"/>
+              </a:lnSpc>
+              <a:spcBef>
+                <a:spcPts val="300"/>
+              </a:spcBef>
+              <a:spcAft>
+                <a:spcPts val="300"/>
+              </a:spcAft>
+              <a:buNone/>
+            </a:pPr>
+            <a:r>
+              <a:rPr lang="en-US" sz="1300" dirty="0">
+                <a:solidFill>
+                  <a:srgbClr val="1C2833"/>
+                </a:solidFill>
+                <a:latin typeface="Georgia" pitchFamily="34" charset="0"/>
+                <a:ea typeface="Georgia" pitchFamily="34" charset="-122"/>
+                <a:cs typeface="Georgia" pitchFamily="34" charset="-120"/>
+              </a:rPr>
+              <a:t> property with the Khajuraho square (~10th–11th c. CE) — every 2×2 panel sums to 34.</a:t>
+            </a:r>
+            <a:endParaRPr lang="en-US" sz="1300" dirty="0"/>
+          </a:p>
+        </p:txBody>
+      </p:sp>
+      <p:sp>
+        <p:nvSpPr>
+          <p:cNvPr id="9" name="Text 7"/>
+          <p:cNvSpPr/>
+          <p:nvPr/>
+        </p:nvSpPr>
+        <p:spPr>
+          <a:xfrm>
+            <a:off x="692051" y="2631430"/>
+            <a:ext cx="7973389" cy="692944"/>
+          </a:xfrm>
+          <a:prstGeom prst="rect">
+            <a:avLst/>
+          </a:prstGeom>
+          <a:noFill/>
+          <a:ln/>
+        </p:spPr>
+        <p:txBody>
+          <a:bodyPr wrap="square" lIns="0" tIns="0" rIns="0" bIns="0" rtlCol="0" anchor="t"/>
+          <a:lstStyle/>
+          <a:p>
+            <a:pPr algn="l" indent="0" marL="0">
+              <a:lnSpc>
+                <a:spcPts val="1820"/>
+              </a:lnSpc>
+              <a:spcBef>
+                <a:spcPts val="300"/>
+              </a:spcBef>
+              <a:spcAft>
+                <a:spcPts val="300"/>
+              </a:spcAft>
+              <a:buNone/>
+            </a:pPr>
+            <a:r>
+              <a:rPr lang="en-US" sz="1300" dirty="0">
+                <a:solidFill>
+                  <a:srgbClr val="1C2833"/>
+                </a:solidFill>
+                <a:latin typeface="Georgia" pitchFamily="34" charset="0"/>
+                <a:ea typeface="Georgia" pitchFamily="34" charset="-122"/>
+                <a:cs typeface="Georgia" pitchFamily="34" charset="-120"/>
+              </a:rPr>
+              <a:t>Multiple cultures arrived at magic squares: China (~5th c. BCE earliest documented), India (Khajuraho ~10th c. CE, Nārāyaṇa's </a:t>
+            </a:r>
+            <a:pPr algn="l" indent="0" marL="0">
+              <a:lnSpc>
+                <a:spcPts val="1820"/>
+              </a:lnSpc>
+              <a:spcBef>
+                <a:spcPts val="300"/>
+              </a:spcBef>
+              <a:spcAft>
+                <a:spcPts val="300"/>
+              </a:spcAft>
+              <a:buNone/>
+            </a:pPr>
+            <a:r>
+              <a:rPr lang="en-US" sz="1300" i="1" dirty="0">
+                <a:solidFill>
+                  <a:srgbClr val="1C2833"/>
+                </a:solidFill>
+                <a:latin typeface="Georgia" pitchFamily="34" charset="0"/>
+                <a:ea typeface="Georgia" pitchFamily="34" charset="-122"/>
+                <a:cs typeface="Georgia" pitchFamily="34" charset="-120"/>
+              </a:rPr>
+              <a:t>Bhadragaṇita</a:t>
+            </a:r>
+            <a:pPr algn="l" indent="0" marL="0">
+              <a:lnSpc>
+                <a:spcPts val="1820"/>
+              </a:lnSpc>
+              <a:spcBef>
+                <a:spcPts val="300"/>
+              </a:spcBef>
+              <a:spcAft>
+                <a:spcPts val="300"/>
+              </a:spcAft>
+              <a:buNone/>
+            </a:pPr>
+            <a:r>
+              <a:rPr lang="en-US" sz="1300" dirty="0">
+                <a:solidFill>
+                  <a:srgbClr val="1C2833"/>
+                </a:solidFill>
+                <a:latin typeface="Georgia" pitchFamily="34" charset="0"/>
+                <a:ea typeface="Georgia" pitchFamily="34" charset="-122"/>
+                <a:cs typeface="Georgia" pitchFamily="34" charset="-120"/>
+              </a:rPr>
+              <a:t> 1356 CE), the Islamic world (~11th c. CE on), and Europe (~14th c. CE on). No clean single origin.</a:t>
+            </a:r>
+            <a:endParaRPr lang="en-US" sz="1300" dirty="0"/>
+          </a:p>
+        </p:txBody>
+      </p:sp>
+      <p:sp>
+        <p:nvSpPr>
+          <p:cNvPr id="10" name="Text 8"/>
+          <p:cNvSpPr/>
+          <p:nvPr/>
+        </p:nvSpPr>
+        <p:spPr>
+          <a:xfrm>
+            <a:off x="406301" y="4434929"/>
+            <a:ext cx="8498026" cy="213271"/>
+          </a:xfrm>
+          <a:prstGeom prst="rect">
+            <a:avLst/>
+          </a:prstGeom>
+          <a:noFill/>
+          <a:ln/>
+        </p:spPr>
+        <p:txBody>
+          <a:bodyPr wrap="square" lIns="0" tIns="0" rIns="0" bIns="0" rtlCol="0" anchor="t"/>
+          <a:lstStyle/>
+          <a:p>
+            <a:pPr algn="l" indent="0" marL="0">
+              <a:lnSpc>
+                <a:spcPts val="1680"/>
+              </a:lnSpc>
+              <a:spcBef>
+                <a:spcPts val="300"/>
+              </a:spcBef>
+              <a:spcAft>
+                <a:spcPts val="300"/>
+              </a:spcAft>
+              <a:buNone/>
+            </a:pPr>
+            <a:r>
+              <a:rPr lang="en-US" sz="1200" dirty="0">
+                <a:solidFill>
+                  <a:srgbClr val="1C2833"/>
+                </a:solidFill>
+                <a:latin typeface="Arial" pitchFamily="34" charset="0"/>
+                <a:ea typeface="Arial" pitchFamily="34" charset="-122"/>
+                <a:cs typeface="Arial" pitchFamily="34" charset="-120"/>
+              </a:rPr>
+              <a:t>Middle ·  · IKS Curriculum</a:t>
+            </a:r>
+            <a:endParaRPr lang="en-US" sz="1200" dirty="0"/>
+          </a:p>
+        </p:txBody>
+      </p:sp>
+    </p:spTree>
+  </p:cSld>
+  <p:clrMapOvr>
+    <a:masterClrMapping/>
+  </p:clrMapOvr>
+</p:sld>
+</file>
+
+<file path=ppt/slides/slide21.xml><?xml version="1.0" encoding="utf-8"?>
+<p:sld xmlns:a="http://schemas.openxmlformats.org/drawingml/2006/main" xmlns:r="http://schemas.openxmlformats.org/officeDocument/2006/relationships" xmlns:p="http://schemas.openxmlformats.org/presentationml/2006/main">
+  <p:cSld name="Slide 21">
+    <p:bg>
+      <p:bgPr>
+        <a:solidFill>
+          <a:srgbClr val="FFFFFF"/>
+        </a:solidFill>
+      </p:bgPr>
+    </p:bg>
+    <p:spTree>
+      <p:nvGrpSpPr>
+        <p:cNvPr id="1" name=""/>
+        <p:cNvGrpSpPr/>
+        <p:nvPr/>
+      </p:nvGrpSpPr>
+      <p:grpSpPr>
+        <a:xfrm>
+          <a:off x="0" y="0"/>
+          <a:ext cx="0" cy="0"/>
+          <a:chOff x="0" y="0"/>
+          <a:chExt cx="0" cy="0"/>
+        </a:xfrm>
+      </p:grpSpPr>
+      <p:sp>
+        <p:nvSpPr>
+          <p:cNvPr id="2" name="Text 0"/>
+          <p:cNvSpPr/>
+          <p:nvPr/>
+        </p:nvSpPr>
+        <p:spPr>
+          <a:xfrm>
+            <a:off x="0" y="0"/>
+            <a:ext cx="9144000" cy="101501"/>
+          </a:xfrm>
+          <a:prstGeom prst="rect">
+            <a:avLst/>
+          </a:prstGeom>
+          <a:solidFill>
+            <a:srgbClr val="277884"/>
+          </a:solidFill>
+          <a:ln/>
+        </p:spPr>
+        <p:txBody>
+          <a:bodyPr wrap="square" rtlCol="0" anchor="ctr"/>
+          <a:lstStyle/>
+          <a:p>
+            <a:pPr indent="0" marL="0">
+              <a:buNone/>
+            </a:pPr>
+            <a:endParaRPr lang="en-US" dirty="0"/>
+          </a:p>
+        </p:txBody>
+      </p:sp>
+      <p:sp>
+        <p:nvSpPr>
+          <p:cNvPr id="3" name="Text 1"/>
+          <p:cNvSpPr/>
+          <p:nvPr/>
+        </p:nvSpPr>
+        <p:spPr>
+          <a:xfrm>
+            <a:off x="406301" y="457051"/>
+            <a:ext cx="8498026" cy="274290"/>
+          </a:xfrm>
+          <a:prstGeom prst="rect">
+            <a:avLst/>
+          </a:prstGeom>
+          <a:noFill/>
+          <a:ln/>
+        </p:spPr>
+        <p:txBody>
+          <a:bodyPr wrap="square" lIns="0" tIns="0" rIns="0" bIns="0" rtlCol="0" anchor="t"/>
+          <a:lstStyle/>
+          <a:p>
+            <a:pPr algn="l" indent="0" marL="0">
+              <a:lnSpc>
+                <a:spcPts val="2160"/>
+              </a:lnSpc>
+              <a:spcBef>
+                <a:spcPts val="600"/>
+              </a:spcBef>
+              <a:spcAft>
+                <a:spcPts val="800"/>
+              </a:spcAft>
+              <a:buNone/>
+            </a:pPr>
+            <a:r>
+              <a:rPr lang="en-US" sz="1800" b="1" dirty="0">
+                <a:solidFill>
+                  <a:srgbClr val="FE4447"/>
+                </a:solidFill>
+                <a:latin typeface="Georgia" pitchFamily="34" charset="0"/>
+                <a:ea typeface="Georgia" pitchFamily="34" charset="-122"/>
+                <a:cs typeface="Georgia" pitchFamily="34" charset="-120"/>
+              </a:rPr>
+              <a:t>Homework</a:t>
+            </a:r>
+            <a:endParaRPr lang="en-US" sz="1800" dirty="0"/>
+          </a:p>
+        </p:txBody>
+      </p:sp>
+      <p:sp>
+        <p:nvSpPr>
+          <p:cNvPr id="4" name="Text 2"/>
+          <p:cNvSpPr/>
+          <p:nvPr/>
+        </p:nvSpPr>
+        <p:spPr>
+          <a:xfrm>
+            <a:off x="634901" y="883593"/>
+            <a:ext cx="8102798" cy="487561"/>
+          </a:xfrm>
+          <a:prstGeom prst="rect">
+            <a:avLst/>
+          </a:prstGeom>
+          <a:noFill/>
+          <a:ln/>
+        </p:spPr>
+        <p:txBody>
+          <a:bodyPr wrap="square" lIns="0" tIns="0" rIns="0" bIns="0" rtlCol="0" anchor="t"/>
+          <a:lstStyle/>
+          <a:p>
+            <a:pPr algn="l" marL="342900" indent="-342900">
+              <a:lnSpc>
+                <a:spcPts val="1620"/>
+              </a:lnSpc>
+              <a:spcAft>
+                <a:spcPts val="300"/>
+              </a:spcAft>
+              <a:buSzPct val="100000"/>
+              <a:buChar char="•"/>
+            </a:pPr>
+            <a:r>
+              <a:rPr lang="en-US" sz="1200" dirty="0">
+                <a:solidFill>
+                  <a:srgbClr val="1C2833"/>
+                </a:solidFill>
+                <a:latin typeface="Arial" pitchFamily="34" charset="0"/>
+                <a:ea typeface="Arial" pitchFamily="34" charset="-122"/>
+                <a:cs typeface="Arial" pitchFamily="34" charset="-120"/>
+              </a:rPr>
+              <a:t>Choose one of the three squares we've seen this fortnight (Day-1 / Khajuraho / Dürer). Verify its magic constant on a fresh piece of paper from scratch. Note one feature you find interesting.</a:t>
+            </a:r>
+            <a:endParaRPr lang="en-US" sz="1200" dirty="0"/>
+          </a:p>
+        </p:txBody>
+      </p:sp>
+      <p:sp>
+        <p:nvSpPr>
+          <p:cNvPr id="5" name="Text 3"/>
+          <p:cNvSpPr/>
+          <p:nvPr/>
+        </p:nvSpPr>
+        <p:spPr>
+          <a:xfrm>
+            <a:off x="406301" y="4434929"/>
+            <a:ext cx="8498026" cy="213271"/>
+          </a:xfrm>
+          <a:prstGeom prst="rect">
+            <a:avLst/>
+          </a:prstGeom>
+          <a:noFill/>
+          <a:ln/>
+        </p:spPr>
+        <p:txBody>
+          <a:bodyPr wrap="square" lIns="0" tIns="0" rIns="0" bIns="0" rtlCol="0" anchor="t"/>
+          <a:lstStyle/>
+          <a:p>
+            <a:pPr algn="l" indent="0" marL="0">
+              <a:lnSpc>
+                <a:spcPts val="1680"/>
+              </a:lnSpc>
+              <a:spcBef>
+                <a:spcPts val="300"/>
+              </a:spcBef>
+              <a:spcAft>
+                <a:spcPts val="300"/>
+              </a:spcAft>
+              <a:buNone/>
+            </a:pPr>
+            <a:r>
+              <a:rPr lang="en-US" sz="1200" dirty="0">
+                <a:solidFill>
+                  <a:srgbClr val="1C2833"/>
+                </a:solidFill>
+                <a:latin typeface="Arial" pitchFamily="34" charset="0"/>
+                <a:ea typeface="Arial" pitchFamily="34" charset="-122"/>
+                <a:cs typeface="Arial" pitchFamily="34" charset="-120"/>
+              </a:rPr>
+              <a:t>Middle ·  · IKS Curriculum</a:t>
+            </a:r>
+            <a:endParaRPr lang="en-US" sz="1200" dirty="0"/>
+          </a:p>
+        </p:txBody>
+      </p:sp>
+    </p:spTree>
+  </p:cSld>
+  <p:clrMapOvr>
+    <a:masterClrMapping/>
+  </p:clrMapOvr>
+</p:sld>
+</file>
+
+<file path=ppt/slides/slide22.xml><?xml version="1.0" encoding="utf-8"?>
+<p:sld xmlns:a="http://schemas.openxmlformats.org/drawingml/2006/main" xmlns:r="http://schemas.openxmlformats.org/officeDocument/2006/relationships" xmlns:p="http://schemas.openxmlformats.org/presentationml/2006/main">
+  <p:cSld name="Slide 22">
+    <p:bg>
+      <p:bgPr>
+        <a:solidFill>
+          <a:srgbClr val="FFFFFF"/>
+        </a:solidFill>
+      </p:bgPr>
+    </p:bg>
+    <p:spTree>
+      <p:nvGrpSpPr>
+        <p:cNvPr id="1" name=""/>
+        <p:cNvGrpSpPr/>
+        <p:nvPr/>
+      </p:nvGrpSpPr>
+      <p:grpSpPr>
+        <a:xfrm>
+          <a:off x="0" y="0"/>
+          <a:ext cx="0" cy="0"/>
+          <a:chOff x="0" y="0"/>
+          <a:chExt cx="0" cy="0"/>
+        </a:xfrm>
+      </p:grpSpPr>
+      <p:sp>
+        <p:nvSpPr>
+          <p:cNvPr id="2" name="Text 0"/>
+          <p:cNvSpPr/>
+          <p:nvPr/>
+        </p:nvSpPr>
+        <p:spPr>
+          <a:xfrm>
+            <a:off x="0" y="0"/>
+            <a:ext cx="9144000" cy="101501"/>
+          </a:xfrm>
+          <a:prstGeom prst="rect">
+            <a:avLst/>
+          </a:prstGeom>
+          <a:solidFill>
+            <a:srgbClr val="277884"/>
+          </a:solidFill>
+          <a:ln/>
+        </p:spPr>
+        <p:txBody>
+          <a:bodyPr wrap="square" rtlCol="0" anchor="ctr"/>
+          <a:lstStyle/>
+          <a:p>
+            <a:pPr indent="0" marL="0">
+              <a:buNone/>
+            </a:pPr>
+            <a:endParaRPr lang="en-US" dirty="0"/>
+          </a:p>
+        </p:txBody>
+      </p:sp>
+      <p:sp>
+        <p:nvSpPr>
+          <p:cNvPr id="3" name="Text 1"/>
+          <p:cNvSpPr/>
+          <p:nvPr/>
+        </p:nvSpPr>
+        <p:spPr>
+          <a:xfrm>
+            <a:off x="406301" y="457051"/>
+            <a:ext cx="8498026" cy="274290"/>
+          </a:xfrm>
+          <a:prstGeom prst="rect">
+            <a:avLst/>
+          </a:prstGeom>
+          <a:noFill/>
+          <a:ln/>
+        </p:spPr>
+        <p:txBody>
+          <a:bodyPr wrap="square" lIns="0" tIns="0" rIns="0" bIns="0" rtlCol="0" anchor="t"/>
+          <a:lstStyle/>
+          <a:p>
+            <a:pPr algn="l" indent="0" marL="0">
+              <a:lnSpc>
+                <a:spcPts val="2160"/>
+              </a:lnSpc>
+              <a:spcBef>
+                <a:spcPts val="600"/>
+              </a:spcBef>
+              <a:spcAft>
+                <a:spcPts val="800"/>
+              </a:spcAft>
+              <a:buNone/>
+            </a:pPr>
+            <a:r>
+              <a:rPr lang="en-US" sz="1800" b="1" dirty="0">
+                <a:solidFill>
+                  <a:srgbClr val="FE4447"/>
+                </a:solidFill>
+                <a:latin typeface="Georgia" pitchFamily="34" charset="0"/>
+                <a:ea typeface="Georgia" pitchFamily="34" charset="-122"/>
+                <a:cs typeface="Georgia" pitchFamily="34" charset="-120"/>
+              </a:rPr>
+              <a:t>Differentiation</a:t>
+            </a:r>
+            <a:endParaRPr lang="en-US" sz="1800" dirty="0"/>
+          </a:p>
+        </p:txBody>
+      </p:sp>
+      <p:sp>
+        <p:nvSpPr>
+          <p:cNvPr id="4" name="Text 2"/>
+          <p:cNvSpPr/>
+          <p:nvPr/>
+        </p:nvSpPr>
+        <p:spPr>
+          <a:xfrm>
+            <a:off x="634901" y="883593"/>
+            <a:ext cx="8102798" cy="937022"/>
+          </a:xfrm>
+          <a:prstGeom prst="rect">
+            <a:avLst/>
+          </a:prstGeom>
+          <a:noFill/>
+          <a:ln/>
+        </p:spPr>
+        <p:txBody>
+          <a:bodyPr wrap="square" lIns="0" tIns="0" rIns="0" bIns="0" rtlCol="0" anchor="t"/>
+          <a:lstStyle/>
+          <a:p>
+            <a:pPr algn="l" marL="342900" indent="-342900">
+              <a:lnSpc>
+                <a:spcPts val="1620"/>
+              </a:lnSpc>
+              <a:spcAft>
+                <a:spcPts val="300"/>
+              </a:spcAft>
+              <a:buSzPct val="100000"/>
+              <a:buChar char="•"/>
+            </a:pPr>
+            <a:r>
+              <a:rPr lang="en-US" sz="1200" b="1" dirty="0">
+                <a:solidFill>
+                  <a:srgbClr val="1C2833"/>
+                </a:solidFill>
+                <a:latin typeface="Arial" pitchFamily="34" charset="0"/>
+                <a:ea typeface="Arial" pitchFamily="34" charset="-122"/>
+                <a:cs typeface="Arial" pitchFamily="34" charset="-120"/>
+              </a:rPr>
+              <a:t>One tier up:</a:t>
+            </a:r>
+            <a:pPr algn="l" indent="0" marL="0">
+              <a:lnSpc>
+                <a:spcPts val="1620"/>
+              </a:lnSpc>
+              <a:spcAft>
+                <a:spcPts val="300"/>
+              </a:spcAft>
+              <a:buNone/>
+            </a:pPr>
+            <a:r>
+              <a:rPr lang="en-US" sz="1200" dirty="0">
+                <a:solidFill>
+                  <a:srgbClr val="1C2833"/>
+                </a:solidFill>
+                <a:latin typeface="Arial" pitchFamily="34" charset="0"/>
+                <a:ea typeface="Arial" pitchFamily="34" charset="-122"/>
+                <a:cs typeface="Arial" pitchFamily="34" charset="-120"/>
+              </a:rPr>
+              <a:t> Look up one more cultural example (e.g. al-Bīrūnī's magic squares, or the Jain </a:t>
+            </a:r>
+            <a:pPr algn="l" indent="0" marL="0">
+              <a:lnSpc>
+                <a:spcPts val="1620"/>
+              </a:lnSpc>
+              <a:spcAft>
+                <a:spcPts val="300"/>
+              </a:spcAft>
+              <a:buNone/>
+            </a:pPr>
+            <a:r>
+              <a:rPr lang="en-US" sz="1200" i="1" dirty="0">
+                <a:solidFill>
+                  <a:srgbClr val="1C2833"/>
+                </a:solidFill>
+                <a:latin typeface="Arial" pitchFamily="34" charset="0"/>
+                <a:ea typeface="Arial" pitchFamily="34" charset="-122"/>
+                <a:cs typeface="Arial" pitchFamily="34" charset="-120"/>
+              </a:rPr>
+              <a:t>Pārśvanātha</a:t>
+            </a:r>
+            <a:pPr algn="l" indent="0" marL="0">
+              <a:lnSpc>
+                <a:spcPts val="1620"/>
+              </a:lnSpc>
+              <a:spcAft>
+                <a:spcPts val="300"/>
+              </a:spcAft>
+              <a:buNone/>
+            </a:pPr>
+            <a:r>
+              <a:rPr lang="en-US" sz="1200" dirty="0">
+                <a:solidFill>
+                  <a:srgbClr val="1C2833"/>
+                </a:solidFill>
+                <a:latin typeface="Arial" pitchFamily="34" charset="0"/>
+                <a:ea typeface="Arial" pitchFamily="34" charset="-122"/>
+                <a:cs typeface="Arial" pitchFamily="34" charset="-120"/>
+              </a:rPr>
+              <a:t> yantra). Bring an image and a verified magic constant.</a:t>
+            </a:r>
+            <a:endParaRPr lang="en-US" sz="1200" dirty="0"/>
+          </a:p>
+          <a:p>
+            <a:pPr algn="l" marL="342900" indent="-342900">
+              <a:lnSpc>
+                <a:spcPts val="1620"/>
+              </a:lnSpc>
+              <a:spcAft>
+                <a:spcPts val="300"/>
+              </a:spcAft>
+              <a:buSzPct val="100000"/>
+              <a:buChar char="•"/>
+            </a:pPr>
+            <a:r>
+              <a:rPr lang="en-US" sz="1200" b="1" dirty="0">
+                <a:solidFill>
+                  <a:srgbClr val="1C2833"/>
+                </a:solidFill>
+                <a:latin typeface="Arial" pitchFamily="34" charset="0"/>
+                <a:ea typeface="Arial" pitchFamily="34" charset="-122"/>
+                <a:cs typeface="Arial" pitchFamily="34" charset="-120"/>
+              </a:rPr>
+              <a:t>One tier down:</a:t>
+            </a:r>
+            <a:pPr algn="l" indent="0" marL="0">
+              <a:lnSpc>
+                <a:spcPts val="1620"/>
+              </a:lnSpc>
+              <a:spcAft>
+                <a:spcPts val="300"/>
+              </a:spcAft>
+              <a:buNone/>
+            </a:pPr>
+            <a:r>
+              <a:rPr lang="en-US" sz="1200" dirty="0">
+                <a:solidFill>
+                  <a:srgbClr val="1C2833"/>
+                </a:solidFill>
+                <a:latin typeface="Arial" pitchFamily="34" charset="0"/>
+                <a:ea typeface="Arial" pitchFamily="34" charset="-122"/>
+                <a:cs typeface="Arial" pitchFamily="34" charset="-120"/>
+              </a:rPr>
+              <a:t> Focus on one comparison: how is the Lo Shu the same as our Day-1 square? Trace the rotation that takes one into the other.</a:t>
+            </a:r>
+            <a:endParaRPr lang="en-US" sz="1200" dirty="0"/>
+          </a:p>
+        </p:txBody>
+      </p:sp>
+      <p:sp>
+        <p:nvSpPr>
+          <p:cNvPr id="5" name="Text 3"/>
+          <p:cNvSpPr/>
+          <p:nvPr/>
+        </p:nvSpPr>
+        <p:spPr>
+          <a:xfrm>
+            <a:off x="406301" y="4434929"/>
+            <a:ext cx="8498026" cy="213271"/>
+          </a:xfrm>
+          <a:prstGeom prst="rect">
+            <a:avLst/>
+          </a:prstGeom>
+          <a:noFill/>
+          <a:ln/>
+        </p:spPr>
+        <p:txBody>
+          <a:bodyPr wrap="square" lIns="0" tIns="0" rIns="0" bIns="0" rtlCol="0" anchor="t"/>
+          <a:lstStyle/>
+          <a:p>
+            <a:pPr algn="l" indent="0" marL="0">
+              <a:lnSpc>
+                <a:spcPts val="1680"/>
+              </a:lnSpc>
+              <a:spcBef>
+                <a:spcPts val="300"/>
+              </a:spcBef>
+              <a:spcAft>
+                <a:spcPts val="300"/>
+              </a:spcAft>
+              <a:buNone/>
+            </a:pPr>
+            <a:r>
+              <a:rPr lang="en-US" sz="1200" dirty="0">
+                <a:solidFill>
+                  <a:srgbClr val="1C2833"/>
+                </a:solidFill>
+                <a:latin typeface="Arial" pitchFamily="34" charset="0"/>
+                <a:ea typeface="Arial" pitchFamily="34" charset="-122"/>
+                <a:cs typeface="Arial" pitchFamily="34" charset="-120"/>
+              </a:rPr>
+              <a:t>Middle ·  · IKS Curriculum</a:t>
+            </a:r>
+            <a:endParaRPr lang="en-US" sz="1200" dirty="0"/>
+          </a:p>
+        </p:txBody>
+      </p:sp>
+    </p:spTree>
+  </p:cSld>
+  <p:clrMapOvr>
+    <a:masterClrMapping/>
+  </p:clrMapOvr>
+</p:sld>
+</file>
+
+<file path=ppt/slides/slide23.xml><?xml version="1.0" encoding="utf-8"?>
+<p:sld xmlns:a="http://schemas.openxmlformats.org/drawingml/2006/main" xmlns:r="http://schemas.openxmlformats.org/officeDocument/2006/relationships" xmlns:p="http://schemas.openxmlformats.org/presentationml/2006/main">
+  <p:cSld name="Slide 23">
+    <p:bg>
+      <p:bgPr>
+        <a:solidFill>
+          <a:srgbClr val="FFFFFF"/>
+        </a:solidFill>
+      </p:bgPr>
+    </p:bg>
+    <p:spTree>
+      <p:nvGrpSpPr>
+        <p:cNvPr id="1" name=""/>
+        <p:cNvGrpSpPr/>
+        <p:nvPr/>
+      </p:nvGrpSpPr>
+      <p:grpSpPr>
+        <a:xfrm>
+          <a:off x="0" y="0"/>
+          <a:ext cx="0" cy="0"/>
+          <a:chOff x="0" y="0"/>
+          <a:chExt cx="0" cy="0"/>
+        </a:xfrm>
+      </p:grpSpPr>
+      <p:sp>
+        <p:nvSpPr>
+          <p:cNvPr id="2" name="Text 0"/>
+          <p:cNvSpPr/>
+          <p:nvPr/>
+        </p:nvSpPr>
+        <p:spPr>
+          <a:xfrm>
+            <a:off x="0" y="0"/>
+            <a:ext cx="9144000" cy="101501"/>
+          </a:xfrm>
+          <a:prstGeom prst="rect">
+            <a:avLst/>
+          </a:prstGeom>
+          <a:solidFill>
+            <a:srgbClr val="277884"/>
+          </a:solidFill>
+          <a:ln/>
+        </p:spPr>
+        <p:txBody>
+          <a:bodyPr wrap="square" rtlCol="0" anchor="ctr"/>
+          <a:lstStyle/>
+          <a:p>
+            <a:pPr indent="0" marL="0">
+              <a:buNone/>
+            </a:pPr>
+            <a:endParaRPr lang="en-US" dirty="0"/>
+          </a:p>
+        </p:txBody>
+      </p:sp>
+      <p:sp>
+        <p:nvSpPr>
+          <p:cNvPr id="3" name="Text 1"/>
+          <p:cNvSpPr/>
+          <p:nvPr/>
+        </p:nvSpPr>
+        <p:spPr>
+          <a:xfrm>
+            <a:off x="406301" y="457051"/>
+            <a:ext cx="8498026" cy="274290"/>
+          </a:xfrm>
+          <a:prstGeom prst="rect">
+            <a:avLst/>
+          </a:prstGeom>
+          <a:noFill/>
+          <a:ln/>
+        </p:spPr>
+        <p:txBody>
+          <a:bodyPr wrap="square" lIns="0" tIns="0" rIns="0" bIns="0" rtlCol="0" anchor="t"/>
+          <a:lstStyle/>
+          <a:p>
+            <a:pPr algn="l" indent="0" marL="0">
+              <a:lnSpc>
+                <a:spcPts val="2160"/>
+              </a:lnSpc>
+              <a:spcBef>
+                <a:spcPts val="600"/>
+              </a:spcBef>
+              <a:spcAft>
+                <a:spcPts val="800"/>
+              </a:spcAft>
+              <a:buNone/>
+            </a:pPr>
+            <a:r>
+              <a:rPr lang="en-US" sz="1800" b="1" dirty="0">
+                <a:solidFill>
+                  <a:srgbClr val="FE4447"/>
+                </a:solidFill>
+                <a:latin typeface="Georgia" pitchFamily="34" charset="0"/>
+                <a:ea typeface="Georgia" pitchFamily="34" charset="-122"/>
+                <a:cs typeface="Georgia" pitchFamily="34" charset="-120"/>
+              </a:rPr>
+              <a:t>Teacher notes</a:t>
+            </a:r>
+            <a:endParaRPr lang="en-US" sz="1800" dirty="0"/>
+          </a:p>
+        </p:txBody>
+      </p:sp>
+      <p:sp>
+        <p:nvSpPr>
+          <p:cNvPr id="4" name="Text 2"/>
+          <p:cNvSpPr/>
+          <p:nvPr/>
+        </p:nvSpPr>
+        <p:spPr>
+          <a:xfrm>
+            <a:off x="634901" y="883593"/>
+            <a:ext cx="8102798" cy="1386483"/>
+          </a:xfrm>
+          <a:prstGeom prst="rect">
+            <a:avLst/>
+          </a:prstGeom>
+          <a:noFill/>
+          <a:ln/>
+        </p:spPr>
+        <p:txBody>
+          <a:bodyPr wrap="square" lIns="0" tIns="0" rIns="0" bIns="0" rtlCol="0" anchor="t"/>
+          <a:lstStyle/>
+          <a:p>
+            <a:pPr algn="l" marL="342900" indent="-342900">
+              <a:lnSpc>
+                <a:spcPts val="1620"/>
+              </a:lnSpc>
+              <a:spcAft>
+                <a:spcPts val="300"/>
+              </a:spcAft>
+              <a:buSzPct val="100000"/>
+              <a:buChar char="•"/>
+            </a:pPr>
+            <a:r>
+              <a:rPr lang="en-US" sz="1200" dirty="0">
+                <a:solidFill>
+                  <a:srgbClr val="1C2833"/>
+                </a:solidFill>
+                <a:latin typeface="Arial" pitchFamily="34" charset="0"/>
+                <a:ea typeface="Arial" pitchFamily="34" charset="-122"/>
+                <a:cs typeface="Arial" pitchFamily="34" charset="-120"/>
+              </a:rPr>
+              <a:t>Don't fall into "ancient Indians invented this first" framing. The Lo Shu is older than any dated Indian magic square we have. Nārāyaṇa's contribution is the </a:t>
+            </a:r>
+            <a:pPr algn="l" indent="0" marL="0">
+              <a:lnSpc>
+                <a:spcPts val="1620"/>
+              </a:lnSpc>
+              <a:spcAft>
+                <a:spcPts val="300"/>
+              </a:spcAft>
+              <a:buNone/>
+            </a:pPr>
+            <a:r>
+              <a:rPr lang="en-US" sz="1200" i="1" dirty="0">
+                <a:solidFill>
+                  <a:srgbClr val="1C2833"/>
+                </a:solidFill>
+                <a:latin typeface="Arial" pitchFamily="34" charset="0"/>
+                <a:ea typeface="Arial" pitchFamily="34" charset="-122"/>
+                <a:cs typeface="Arial" pitchFamily="34" charset="-120"/>
+              </a:rPr>
+              <a:t>systematic method</a:t>
+            </a:r>
+            <a:pPr algn="l" indent="0" marL="0">
+              <a:lnSpc>
+                <a:spcPts val="1620"/>
+              </a:lnSpc>
+              <a:spcAft>
+                <a:spcPts val="300"/>
+              </a:spcAft>
+              <a:buNone/>
+            </a:pPr>
+            <a:r>
+              <a:rPr lang="en-US" sz="1200" dirty="0">
+                <a:solidFill>
+                  <a:srgbClr val="1C2833"/>
+                </a:solidFill>
+                <a:latin typeface="Arial" pitchFamily="34" charset="0"/>
+                <a:ea typeface="Arial" pitchFamily="34" charset="-122"/>
+                <a:cs typeface="Arial" pitchFamily="34" charset="-120"/>
+              </a:rPr>
+              <a:t>, not the </a:t>
+            </a:r>
+            <a:pPr algn="l" indent="0" marL="0">
+              <a:lnSpc>
+                <a:spcPts val="1620"/>
+              </a:lnSpc>
+              <a:spcAft>
+                <a:spcPts val="300"/>
+              </a:spcAft>
+              <a:buNone/>
+            </a:pPr>
+            <a:r>
+              <a:rPr lang="en-US" sz="1200" i="1" dirty="0">
+                <a:solidFill>
+                  <a:srgbClr val="1C2833"/>
+                </a:solidFill>
+                <a:latin typeface="Arial" pitchFamily="34" charset="0"/>
+                <a:ea typeface="Arial" pitchFamily="34" charset="-122"/>
+                <a:cs typeface="Arial" pitchFamily="34" charset="-120"/>
+              </a:rPr>
+              <a:t>first discovery</a:t>
+            </a:r>
+            <a:pPr algn="l" indent="0" marL="0">
+              <a:lnSpc>
+                <a:spcPts val="1620"/>
+              </a:lnSpc>
+              <a:spcAft>
+                <a:spcPts val="300"/>
+              </a:spcAft>
+              <a:buNone/>
+            </a:pPr>
+            <a:r>
+              <a:rPr lang="en-US" sz="1200" dirty="0">
+                <a:solidFill>
+                  <a:srgbClr val="1C2833"/>
+                </a:solidFill>
+                <a:latin typeface="Arial" pitchFamily="34" charset="0"/>
+                <a:ea typeface="Arial" pitchFamily="34" charset="-122"/>
+                <a:cs typeface="Arial" pitchFamily="34" charset="-120"/>
+              </a:rPr>
+              <a:t>.</a:t>
+            </a:r>
+            <a:endParaRPr lang="en-US" sz="1200" dirty="0"/>
+          </a:p>
+          <a:p>
+            <a:pPr algn="l" marL="342900" indent="-342900">
+              <a:lnSpc>
+                <a:spcPts val="1620"/>
+              </a:lnSpc>
+              <a:spcAft>
+                <a:spcPts val="300"/>
+              </a:spcAft>
+              <a:buSzPct val="100000"/>
+              <a:buChar char="•"/>
+            </a:pPr>
+            <a:r>
+              <a:rPr lang="en-US" sz="1200" dirty="0">
+                <a:solidFill>
+                  <a:srgbClr val="1C2833"/>
+                </a:solidFill>
+                <a:latin typeface="Arial" pitchFamily="34" charset="0"/>
+                <a:ea typeface="Arial" pitchFamily="34" charset="-122"/>
+                <a:cs typeface="Arial" pitchFamily="34" charset="-120"/>
+              </a:rPr>
+              <a:t>The Dürer corner being a date (1514) often delights students. Use that delight to motivate the project.</a:t>
+            </a:r>
+            <a:endParaRPr lang="en-US" sz="1200" dirty="0"/>
+          </a:p>
+          <a:p>
+            <a:pPr algn="l" marL="342900" indent="-342900">
+              <a:lnSpc>
+                <a:spcPts val="1620"/>
+              </a:lnSpc>
+              <a:spcAft>
+                <a:spcPts val="300"/>
+              </a:spcAft>
+              <a:buSzPct val="100000"/>
+              <a:buChar char="•"/>
+            </a:pPr>
+            <a:r>
+              <a:rPr lang="en-US" sz="1200" dirty="0">
+                <a:solidFill>
+                  <a:srgbClr val="1C2833"/>
+                </a:solidFill>
+                <a:latin typeface="Arial" pitchFamily="34" charset="0"/>
+                <a:ea typeface="Arial" pitchFamily="34" charset="-122"/>
+                <a:cs typeface="Arial" pitchFamily="34" charset="-120"/>
+              </a:rPr>
+              <a:t>Some students will see the Khajuraho ~10th-c. dating and conclude it predates Lo Shu. That is incorrect. The Lo Shu has earlier documented evidence (Han dynasty texts). Be clear about which dates are </a:t>
+            </a:r>
+            <a:pPr algn="l" indent="0" marL="0">
+              <a:lnSpc>
+                <a:spcPts val="1620"/>
+              </a:lnSpc>
+              <a:spcAft>
+                <a:spcPts val="300"/>
+              </a:spcAft>
+              <a:buNone/>
+            </a:pPr>
+            <a:r>
+              <a:rPr lang="en-US" sz="1200" i="1" dirty="0">
+                <a:solidFill>
+                  <a:srgbClr val="1C2833"/>
+                </a:solidFill>
+                <a:latin typeface="Arial" pitchFamily="34" charset="0"/>
+                <a:ea typeface="Arial" pitchFamily="34" charset="-122"/>
+                <a:cs typeface="Arial" pitchFamily="34" charset="-120"/>
+              </a:rPr>
+              <a:t>attestations</a:t>
+            </a:r>
+            <a:pPr algn="l" indent="0" marL="0">
+              <a:lnSpc>
+                <a:spcPts val="1620"/>
+              </a:lnSpc>
+              <a:spcAft>
+                <a:spcPts val="300"/>
+              </a:spcAft>
+              <a:buNone/>
+            </a:pPr>
+            <a:r>
+              <a:rPr lang="en-US" sz="1200" dirty="0">
+                <a:solidFill>
+                  <a:srgbClr val="1C2833"/>
+                </a:solidFill>
+                <a:latin typeface="Arial" pitchFamily="34" charset="0"/>
+                <a:ea typeface="Arial" pitchFamily="34" charset="-122"/>
+                <a:cs typeface="Arial" pitchFamily="34" charset="-120"/>
+              </a:rPr>
+              <a:t> and which are </a:t>
+            </a:r>
+            <a:pPr algn="l" indent="0" marL="0">
+              <a:lnSpc>
+                <a:spcPts val="1620"/>
+              </a:lnSpc>
+              <a:spcAft>
+                <a:spcPts val="300"/>
+              </a:spcAft>
+              <a:buNone/>
+            </a:pPr>
+            <a:r>
+              <a:rPr lang="en-US" sz="1200" i="1" dirty="0">
+                <a:solidFill>
+                  <a:srgbClr val="1C2833"/>
+                </a:solidFill>
+                <a:latin typeface="Arial" pitchFamily="34" charset="0"/>
+                <a:ea typeface="Arial" pitchFamily="34" charset="-122"/>
+                <a:cs typeface="Arial" pitchFamily="34" charset="-120"/>
+              </a:rPr>
+              <a:t>legends</a:t>
+            </a:r>
+            <a:pPr algn="l" indent="0" marL="0">
+              <a:lnSpc>
+                <a:spcPts val="1620"/>
+              </a:lnSpc>
+              <a:spcAft>
+                <a:spcPts val="300"/>
+              </a:spcAft>
+              <a:buNone/>
+            </a:pPr>
+            <a:r>
+              <a:rPr lang="en-US" sz="1200" dirty="0">
+                <a:solidFill>
+                  <a:srgbClr val="1C2833"/>
+                </a:solidFill>
+                <a:latin typeface="Arial" pitchFamily="34" charset="0"/>
+                <a:ea typeface="Arial" pitchFamily="34" charset="-122"/>
+                <a:cs typeface="Arial" pitchFamily="34" charset="-120"/>
+              </a:rPr>
+              <a:t>.</a:t>
+            </a:r>
+            <a:endParaRPr lang="en-US" sz="1200" dirty="0"/>
+          </a:p>
+        </p:txBody>
+      </p:sp>
+      <p:sp>
+        <p:nvSpPr>
+          <p:cNvPr id="5" name="Text 3"/>
+          <p:cNvSpPr/>
+          <p:nvPr/>
+        </p:nvSpPr>
+        <p:spPr>
+          <a:xfrm>
+            <a:off x="406301" y="4434929"/>
+            <a:ext cx="8498026" cy="213271"/>
+          </a:xfrm>
+          <a:prstGeom prst="rect">
+            <a:avLst/>
+          </a:prstGeom>
+          <a:noFill/>
+          <a:ln/>
+        </p:spPr>
+        <p:txBody>
+          <a:bodyPr wrap="square" lIns="0" tIns="0" rIns="0" bIns="0" rtlCol="0" anchor="t"/>
+          <a:lstStyle/>
+          <a:p>
+            <a:pPr algn="l" indent="0" marL="0">
+              <a:lnSpc>
+                <a:spcPts val="1680"/>
+              </a:lnSpc>
+              <a:spcBef>
+                <a:spcPts val="300"/>
+              </a:spcBef>
+              <a:spcAft>
+                <a:spcPts val="300"/>
+              </a:spcAft>
+              <a:buNone/>
+            </a:pPr>
+            <a:r>
+              <a:rPr lang="en-US" sz="1200" dirty="0">
+                <a:solidFill>
+                  <a:srgbClr val="1C2833"/>
+                </a:solidFill>
+                <a:latin typeface="Arial" pitchFamily="34" charset="0"/>
+                <a:ea typeface="Arial" pitchFamily="34" charset="-122"/>
+                <a:cs typeface="Arial" pitchFamily="34" charset="-120"/>
+              </a:rPr>
+              <a:t>Middle ·  · IKS Curriculum</a:t>
+            </a:r>
+            <a:endParaRPr lang="en-US" sz="1200" dirty="0"/>
+          </a:p>
+        </p:txBody>
+      </p:sp>
+    </p:spTree>
+  </p:cSld>
+  <p:clrMapOvr>
+    <a:masterClrMapping/>
+  </p:clrMapOvr>
+</p:sld>
+</file>
+
+<file path=ppt/slides/slide24.xml><?xml version="1.0" encoding="utf-8"?>
+<p:sld xmlns:a="http://schemas.openxmlformats.org/drawingml/2006/main" xmlns:r="http://schemas.openxmlformats.org/officeDocument/2006/relationships" xmlns:p="http://schemas.openxmlformats.org/presentationml/2006/main">
+  <p:cSld name="Slide 24">
+    <p:bg>
+      <p:bgPr>
+        <a:solidFill>
+          <a:srgbClr val="FFFFFF"/>
+        </a:solidFill>
+      </p:bgPr>
+    </p:bg>
+    <p:spTree>
+      <p:nvGrpSpPr>
+        <p:cNvPr id="1" name=""/>
+        <p:cNvGrpSpPr/>
+        <p:nvPr/>
+      </p:nvGrpSpPr>
+      <p:grpSpPr>
+        <a:xfrm>
+          <a:off x="0" y="0"/>
+          <a:ext cx="0" cy="0"/>
+          <a:chOff x="0" y="0"/>
+          <a:chExt cx="0" cy="0"/>
+        </a:xfrm>
+      </p:grpSpPr>
+      <p:sp>
+        <p:nvSpPr>
+          <p:cNvPr id="2" name="Text 0"/>
+          <p:cNvSpPr/>
+          <p:nvPr/>
+        </p:nvSpPr>
+        <p:spPr>
+          <a:xfrm>
+            <a:off x="0" y="0"/>
+            <a:ext cx="9144000" cy="101501"/>
+          </a:xfrm>
+          <a:prstGeom prst="rect">
+            <a:avLst/>
+          </a:prstGeom>
+          <a:solidFill>
+            <a:srgbClr val="277884"/>
+          </a:solidFill>
+          <a:ln/>
+        </p:spPr>
+        <p:txBody>
+          <a:bodyPr wrap="square" rtlCol="0" anchor="ctr"/>
+          <a:lstStyle/>
+          <a:p>
+            <a:pPr indent="0" marL="0">
+              <a:buNone/>
+            </a:pPr>
+            <a:endParaRPr lang="en-US" dirty="0"/>
+          </a:p>
+        </p:txBody>
+      </p:sp>
+      <p:sp>
+        <p:nvSpPr>
+          <p:cNvPr id="3" name="Text 1"/>
+          <p:cNvSpPr/>
+          <p:nvPr/>
+        </p:nvSpPr>
+        <p:spPr>
+          <a:xfrm>
+            <a:off x="406301" y="457051"/>
+            <a:ext cx="8498026" cy="274290"/>
+          </a:xfrm>
+          <a:prstGeom prst="rect">
+            <a:avLst/>
+          </a:prstGeom>
+          <a:noFill/>
+          <a:ln/>
+        </p:spPr>
+        <p:txBody>
+          <a:bodyPr wrap="square" lIns="0" tIns="0" rIns="0" bIns="0" rtlCol="0" anchor="t"/>
+          <a:lstStyle/>
+          <a:p>
+            <a:pPr algn="l" indent="0" marL="0">
+              <a:lnSpc>
+                <a:spcPts val="2160"/>
+              </a:lnSpc>
+              <a:spcBef>
+                <a:spcPts val="600"/>
+              </a:spcBef>
+              <a:spcAft>
+                <a:spcPts val="800"/>
+              </a:spcAft>
+              <a:buNone/>
+            </a:pPr>
+            <a:r>
+              <a:rPr lang="en-US" sz="1800" b="1" dirty="0">
+                <a:solidFill>
+                  <a:srgbClr val="FE4447"/>
+                </a:solidFill>
+                <a:latin typeface="Georgia" pitchFamily="34" charset="0"/>
+                <a:ea typeface="Georgia" pitchFamily="34" charset="-122"/>
+                <a:cs typeface="Georgia" pitchFamily="34" charset="-120"/>
+              </a:rPr>
+              <a:t>Citation(s) used in this lesson</a:t>
+            </a:r>
+            <a:endParaRPr lang="en-US" sz="1800" dirty="0"/>
+          </a:p>
+        </p:txBody>
+      </p:sp>
+      <p:sp>
+        <p:nvSpPr>
+          <p:cNvPr id="4" name="Text 2"/>
+          <p:cNvSpPr/>
+          <p:nvPr/>
+        </p:nvSpPr>
+        <p:spPr>
+          <a:xfrm>
+            <a:off x="634901" y="883593"/>
+            <a:ext cx="8102798" cy="769441"/>
+          </a:xfrm>
+          <a:prstGeom prst="rect">
+            <a:avLst/>
+          </a:prstGeom>
+          <a:noFill/>
+          <a:ln/>
+        </p:spPr>
+        <p:txBody>
+          <a:bodyPr wrap="square" lIns="0" tIns="0" rIns="0" bIns="0" rtlCol="0" anchor="t"/>
+          <a:lstStyle/>
+          <a:p>
+            <a:pPr algn="l" marL="342900" indent="-342900">
+              <a:lnSpc>
+                <a:spcPts val="1620"/>
+              </a:lnSpc>
+              <a:spcAft>
+                <a:spcPts val="300"/>
+              </a:spcAft>
+              <a:buSzPct val="100000"/>
+              <a:buChar char="•"/>
+            </a:pPr>
+            <a:r>
+              <a:rPr lang="en-US" sz="1200" dirty="0">
+                <a:solidFill>
+                  <a:srgbClr val="1C2833"/>
+                </a:solidFill>
+                <a:latin typeface="Arial" pitchFamily="34" charset="0"/>
+                <a:ea typeface="Arial" pitchFamily="34" charset="-122"/>
+                <a:cs typeface="Arial" pitchFamily="34" charset="-120"/>
+              </a:rPr>
+              <a:t>Lo Shu: </a:t>
+            </a:r>
+            <a:pPr algn="l" indent="0" marL="0">
+              <a:lnSpc>
+                <a:spcPts val="1620"/>
+              </a:lnSpc>
+              <a:spcAft>
+                <a:spcPts val="300"/>
+              </a:spcAft>
+              <a:buNone/>
+            </a:pPr>
+            <a:r>
+              <a:rPr lang="en-US" sz="1200" i="1" dirty="0">
+                <a:solidFill>
+                  <a:srgbClr val="1C2833"/>
+                </a:solidFill>
+                <a:latin typeface="Arial" pitchFamily="34" charset="0"/>
+                <a:ea typeface="Arial" pitchFamily="34" charset="-122"/>
+                <a:cs typeface="Arial" pitchFamily="34" charset="-120"/>
+              </a:rPr>
+              <a:t>Da Dai Liji</a:t>
+            </a:r>
+            <a:pPr algn="l" indent="0" marL="0">
+              <a:lnSpc>
+                <a:spcPts val="1620"/>
+              </a:lnSpc>
+              <a:spcAft>
+                <a:spcPts val="300"/>
+              </a:spcAft>
+              <a:buNone/>
+            </a:pPr>
+            <a:r>
+              <a:rPr lang="en-US" sz="1200" dirty="0">
+                <a:solidFill>
+                  <a:srgbClr val="1C2833"/>
+                </a:solidFill>
+                <a:latin typeface="Arial" pitchFamily="34" charset="0"/>
+                <a:ea typeface="Arial" pitchFamily="34" charset="-122"/>
+                <a:cs typeface="Arial" pitchFamily="34" charset="-120"/>
+              </a:rPr>
+              <a:t> (Chinese, Han dynasty, ~5th–1st c. BCE) — earliest documented Chinese mention.</a:t>
+            </a:r>
+            <a:endParaRPr lang="en-US" sz="1200" dirty="0"/>
+          </a:p>
+          <a:p>
+            <a:pPr algn="l" marL="342900" indent="-342900">
+              <a:lnSpc>
+                <a:spcPts val="1620"/>
+              </a:lnSpc>
+              <a:spcAft>
+                <a:spcPts val="300"/>
+              </a:spcAft>
+              <a:buSzPct val="100000"/>
+              <a:buChar char="•"/>
+            </a:pPr>
+            <a:r>
+              <a:rPr lang="en-US" sz="1200" dirty="0">
+                <a:solidFill>
+                  <a:srgbClr val="1C2833"/>
+                </a:solidFill>
+                <a:latin typeface="Arial" pitchFamily="34" charset="0"/>
+                <a:ea typeface="Arial" pitchFamily="34" charset="-122"/>
+                <a:cs typeface="Arial" pitchFamily="34" charset="-120"/>
+              </a:rPr>
+              <a:t>Dürer, </a:t>
+            </a:r>
+            <a:pPr algn="l" indent="0" marL="0">
+              <a:lnSpc>
+                <a:spcPts val="1620"/>
+              </a:lnSpc>
+              <a:spcAft>
+                <a:spcPts val="300"/>
+              </a:spcAft>
+              <a:buNone/>
+            </a:pPr>
+            <a:r>
+              <a:rPr lang="en-US" sz="1200" i="1" dirty="0">
+                <a:solidFill>
+                  <a:srgbClr val="1C2833"/>
+                </a:solidFill>
+                <a:latin typeface="Arial" pitchFamily="34" charset="0"/>
+                <a:ea typeface="Arial" pitchFamily="34" charset="-122"/>
+                <a:cs typeface="Arial" pitchFamily="34" charset="-120"/>
+              </a:rPr>
+              <a:t>Melencolia I</a:t>
+            </a:r>
+            <a:pPr algn="l" indent="0" marL="0">
+              <a:lnSpc>
+                <a:spcPts val="1620"/>
+              </a:lnSpc>
+              <a:spcAft>
+                <a:spcPts val="300"/>
+              </a:spcAft>
+              <a:buNone/>
+            </a:pPr>
+            <a:r>
+              <a:rPr lang="en-US" sz="1200" dirty="0">
+                <a:solidFill>
+                  <a:srgbClr val="1C2833"/>
+                </a:solidFill>
+                <a:latin typeface="Arial" pitchFamily="34" charset="0"/>
+                <a:ea typeface="Arial" pitchFamily="34" charset="-122"/>
+                <a:cs typeface="Arial" pitchFamily="34" charset="-120"/>
+              </a:rPr>
+              <a:t> (1514) — material artefact.</a:t>
+            </a:r>
+            <a:endParaRPr lang="en-US" sz="1200" dirty="0"/>
+          </a:p>
+          <a:p>
+            <a:pPr algn="l" marL="342900" indent="-342900">
+              <a:lnSpc>
+                <a:spcPts val="1620"/>
+              </a:lnSpc>
+              <a:spcAft>
+                <a:spcPts val="300"/>
+              </a:spcAft>
+              <a:buSzPct val="100000"/>
+              <a:buChar char="•"/>
+            </a:pPr>
+            <a:r>
+              <a:rPr lang="en-US" sz="1200" dirty="0">
+                <a:solidFill>
+                  <a:srgbClr val="1C2833"/>
+                </a:solidFill>
+                <a:latin typeface="Arial" pitchFamily="34" charset="0"/>
+                <a:ea typeface="Arial" pitchFamily="34" charset="-122"/>
+                <a:cs typeface="Arial" pitchFamily="34" charset="-120"/>
+              </a:rPr>
+              <a:t>Nārāyaṇa Paṇḍita, </a:t>
+            </a:r>
+            <a:pPr algn="l" indent="0" marL="0">
+              <a:lnSpc>
+                <a:spcPts val="1620"/>
+              </a:lnSpc>
+              <a:spcAft>
+                <a:spcPts val="300"/>
+              </a:spcAft>
+              <a:buNone/>
+            </a:pPr>
+            <a:r>
+              <a:rPr lang="en-US" sz="1200" i="1" dirty="0">
+                <a:solidFill>
+                  <a:srgbClr val="1C2833"/>
+                </a:solidFill>
+                <a:latin typeface="Arial" pitchFamily="34" charset="0"/>
+                <a:ea typeface="Arial" pitchFamily="34" charset="-122"/>
+                <a:cs typeface="Arial" pitchFamily="34" charset="-120"/>
+              </a:rPr>
+              <a:t>Gaṇita-kaumudī</a:t>
+            </a:r>
+            <a:pPr algn="l" indent="0" marL="0">
+              <a:lnSpc>
+                <a:spcPts val="1620"/>
+              </a:lnSpc>
+              <a:spcAft>
+                <a:spcPts val="300"/>
+              </a:spcAft>
+              <a:buNone/>
+            </a:pPr>
+            <a:r>
+              <a:rPr lang="en-US" sz="1200" dirty="0">
+                <a:solidFill>
+                  <a:srgbClr val="1C2833"/>
+                </a:solidFill>
+                <a:latin typeface="Arial" pitchFamily="34" charset="0"/>
+                <a:ea typeface="Arial" pitchFamily="34" charset="-122"/>
+                <a:cs typeface="Arial" pitchFamily="34" charset="-120"/>
+              </a:rPr>
+              <a:t>, Book 14, 1356 CE — for context on Indian systematic treatment.</a:t>
             </a:r>
             <a:endParaRPr lang="en-US" sz="1200" dirty="0"/>
           </a:p>
@@ -3772,7 +8751,7 @@
                 <a:ea typeface="Georgia" pitchFamily="34" charset="-122"/>
                 <a:cs typeface="Georgia" pitchFamily="34" charset="-120"/>
               </a:rPr>
-              <a:t>Vocabulary review</a:t>
+              <a:t>Materials</a:t>
             </a:r>
             <a:endParaRPr lang="en-US" sz="1800" dirty="0"/>
           </a:p>
@@ -3787,7 +8766,7 @@
         <p:spPr>
           <a:xfrm>
             <a:off x="634901" y="883593"/>
-            <a:ext cx="8102798" cy="937022"/>
+            <a:ext cx="8102798" cy="769441"/>
           </a:xfrm>
           <a:prstGeom prst="rect">
             <a:avLst/>
@@ -3810,26 +8789,6 @@
               <a:buChar char="•"/>
             </a:pPr>
             <a:r>
-              <a:rPr lang="en-US" sz="1200" i="1" dirty="0">
-                <a:solidFill>
-                  <a:srgbClr val="1C2833"/>
-                </a:solidFill>
-                <a:latin typeface="Arial" pitchFamily="34" charset="0"/>
-                <a:ea typeface="Arial" pitchFamily="34" charset="-122"/>
-                <a:cs typeface="Arial" pitchFamily="34" charset="-120"/>
-              </a:rPr>
-              <a:t>Lo Shu</a:t>
-            </a:r>
-            <a:pPr algn="l" indent="0" marL="0">
-              <a:lnSpc>
-                <a:spcPts val="1620"/>
-              </a:lnSpc>
-              <a:spcAft>
-                <a:spcPts val="300"/>
-              </a:spcAft>
-              <a:buNone/>
-            </a:pPr>
-            <a:r>
               <a:rPr lang="en-US" sz="1200" dirty="0">
                 <a:solidFill>
                   <a:srgbClr val="1C2833"/>
@@ -3838,47 +8797,7 @@
                 <a:ea typeface="Arial" pitchFamily="34" charset="-122"/>
                 <a:cs typeface="Arial" pitchFamily="34" charset="-120"/>
               </a:rPr>
-              <a:t> — a Chinese 3×3 magic square attested at least from the </a:t>
-            </a:r>
-            <a:pPr algn="l" indent="0" marL="0">
-              <a:lnSpc>
-                <a:spcPts val="1620"/>
-              </a:lnSpc>
-              <a:spcAft>
-                <a:spcPts val="300"/>
-              </a:spcAft>
-              <a:buNone/>
-            </a:pPr>
-            <a:r>
-              <a:rPr lang="en-US" sz="1200" i="1" dirty="0">
-                <a:solidFill>
-                  <a:srgbClr val="1C2833"/>
-                </a:solidFill>
-                <a:latin typeface="Arial" pitchFamily="34" charset="0"/>
-                <a:ea typeface="Arial" pitchFamily="34" charset="-122"/>
-                <a:cs typeface="Arial" pitchFamily="34" charset="-120"/>
-              </a:rPr>
-              <a:t>Da Dai Liji</a:t>
-            </a:r>
-            <a:pPr algn="l" indent="0" marL="0">
-              <a:lnSpc>
-                <a:spcPts val="1620"/>
-              </a:lnSpc>
-              <a:spcAft>
-                <a:spcPts val="300"/>
-              </a:spcAft>
-              <a:buNone/>
-            </a:pPr>
-            <a:r>
-              <a:rPr lang="en-US" sz="1200" dirty="0">
-                <a:solidFill>
-                  <a:srgbClr val="1C2833"/>
-                </a:solidFill>
-                <a:latin typeface="Arial" pitchFamily="34" charset="0"/>
-                <a:ea typeface="Arial" pitchFamily="34" charset="-122"/>
-                <a:cs typeface="Arial" pitchFamily="34" charset="-120"/>
-              </a:rPr>
-              <a:t> (Han dynasty, ~5th–1st c. BCE) and probably earlier.</a:t>
+              <a:t>Image of the Lo Shu square (turtle-shell pattern is helpful)</a:t>
             </a:r>
             <a:endParaRPr lang="en-US" sz="1200" dirty="0"/>
           </a:p>
@@ -3894,6 +8813,26 @@
               <a:buChar char="•"/>
             </a:pPr>
             <a:r>
+              <a:rPr lang="en-US" sz="1200" dirty="0">
+                <a:solidFill>
+                  <a:srgbClr val="1C2833"/>
+                </a:solidFill>
+                <a:latin typeface="Arial" pitchFamily="34" charset="0"/>
+                <a:ea typeface="Arial" pitchFamily="34" charset="-122"/>
+                <a:cs typeface="Arial" pitchFamily="34" charset="-120"/>
+              </a:rPr>
+              <a:t>Image of Dürer's </a:t>
+            </a:r>
+            <a:pPr algn="l" indent="0" marL="0">
+              <a:lnSpc>
+                <a:spcPts val="1620"/>
+              </a:lnSpc>
+              <a:spcAft>
+                <a:spcPts val="300"/>
+              </a:spcAft>
+              <a:buNone/>
+            </a:pPr>
+            <a:r>
               <a:rPr lang="en-US" sz="1200" i="1" dirty="0">
                 <a:solidFill>
                   <a:srgbClr val="1C2833"/>
@@ -3922,7 +8861,31 @@
                 <a:ea typeface="Arial" pitchFamily="34" charset="-122"/>
                 <a:cs typeface="Arial" pitchFamily="34" charset="-120"/>
               </a:rPr>
-              <a:t> — a 1514 engraving by the German artist Albrecht Dürer; its upper-right corner contains a famous 4×4 magic square.</a:t>
+              <a:t> (1514) with the 4×4 corner visible</a:t>
+            </a:r>
+            <a:endParaRPr lang="en-US" sz="1200" dirty="0"/>
+          </a:p>
+          <a:p>
+            <a:pPr algn="l" marL="342900" indent="-342900">
+              <a:lnSpc>
+                <a:spcPts val="1620"/>
+              </a:lnSpc>
+              <a:spcAft>
+                <a:spcPts val="300"/>
+              </a:spcAft>
+              <a:buSzPct val="100000"/>
+              <a:buChar char="•"/>
+            </a:pPr>
+            <a:r>
+              <a:rPr lang="en-US" sz="1200" dirty="0">
+                <a:solidFill>
+                  <a:srgbClr val="1C2833"/>
+                </a:solidFill>
+                <a:latin typeface="Arial" pitchFamily="34" charset="0"/>
+                <a:ea typeface="Arial" pitchFamily="34" charset="-122"/>
+                <a:cs typeface="Arial" pitchFamily="34" charset="-120"/>
+              </a:rPr>
+              <a:t>Project planning sheet (one per pair)</a:t>
             </a:r>
             <a:endParaRPr lang="en-US" sz="1200" dirty="0"/>
           </a:p>
@@ -4080,7 +9043,7 @@
                 <a:ea typeface="Georgia" pitchFamily="34" charset="-122"/>
                 <a:cs typeface="Georgia" pitchFamily="34" charset="-120"/>
               </a:rPr>
-              <a:t>Lesson flow</a:t>
+              <a:t>Vocabulary review</a:t>
             </a:r>
             <a:endParaRPr lang="en-US" sz="1800" dirty="0"/>
           </a:p>
@@ -4089,6 +9052,156 @@
       <p:sp>
         <p:nvSpPr>
           <p:cNvPr id="4" name="Text 2"/>
+          <p:cNvSpPr/>
+          <p:nvPr/>
+        </p:nvSpPr>
+        <p:spPr>
+          <a:xfrm>
+            <a:off x="634901" y="883593"/>
+            <a:ext cx="8102798" cy="937022"/>
+          </a:xfrm>
+          <a:prstGeom prst="rect">
+            <a:avLst/>
+          </a:prstGeom>
+          <a:noFill/>
+          <a:ln/>
+        </p:spPr>
+        <p:txBody>
+          <a:bodyPr wrap="square" lIns="0" tIns="0" rIns="0" bIns="0" rtlCol="0" anchor="t"/>
+          <a:lstStyle/>
+          <a:p>
+            <a:pPr algn="l" marL="342900" indent="-342900">
+              <a:lnSpc>
+                <a:spcPts val="1620"/>
+              </a:lnSpc>
+              <a:spcAft>
+                <a:spcPts val="300"/>
+              </a:spcAft>
+              <a:buSzPct val="100000"/>
+              <a:buChar char="•"/>
+            </a:pPr>
+            <a:r>
+              <a:rPr lang="en-US" sz="1200" i="1" dirty="0">
+                <a:solidFill>
+                  <a:srgbClr val="1C2833"/>
+                </a:solidFill>
+                <a:latin typeface="Arial" pitchFamily="34" charset="0"/>
+                <a:ea typeface="Arial" pitchFamily="34" charset="-122"/>
+                <a:cs typeface="Arial" pitchFamily="34" charset="-120"/>
+              </a:rPr>
+              <a:t>Lo Shu</a:t>
+            </a:r>
+            <a:pPr algn="l" indent="0" marL="0">
+              <a:lnSpc>
+                <a:spcPts val="1620"/>
+              </a:lnSpc>
+              <a:spcAft>
+                <a:spcPts val="300"/>
+              </a:spcAft>
+              <a:buNone/>
+            </a:pPr>
+            <a:r>
+              <a:rPr lang="en-US" sz="1200" dirty="0">
+                <a:solidFill>
+                  <a:srgbClr val="1C2833"/>
+                </a:solidFill>
+                <a:latin typeface="Arial" pitchFamily="34" charset="0"/>
+                <a:ea typeface="Arial" pitchFamily="34" charset="-122"/>
+                <a:cs typeface="Arial" pitchFamily="34" charset="-120"/>
+              </a:rPr>
+              <a:t> — a Chinese 3×3 magic square attested at least from the </a:t>
+            </a:r>
+            <a:pPr algn="l" indent="0" marL="0">
+              <a:lnSpc>
+                <a:spcPts val="1620"/>
+              </a:lnSpc>
+              <a:spcAft>
+                <a:spcPts val="300"/>
+              </a:spcAft>
+              <a:buNone/>
+            </a:pPr>
+            <a:r>
+              <a:rPr lang="en-US" sz="1200" i="1" dirty="0">
+                <a:solidFill>
+                  <a:srgbClr val="1C2833"/>
+                </a:solidFill>
+                <a:latin typeface="Arial" pitchFamily="34" charset="0"/>
+                <a:ea typeface="Arial" pitchFamily="34" charset="-122"/>
+                <a:cs typeface="Arial" pitchFamily="34" charset="-120"/>
+              </a:rPr>
+              <a:t>Da Dai Liji</a:t>
+            </a:r>
+            <a:pPr algn="l" indent="0" marL="0">
+              <a:lnSpc>
+                <a:spcPts val="1620"/>
+              </a:lnSpc>
+              <a:spcAft>
+                <a:spcPts val="300"/>
+              </a:spcAft>
+              <a:buNone/>
+            </a:pPr>
+            <a:r>
+              <a:rPr lang="en-US" sz="1200" dirty="0">
+                <a:solidFill>
+                  <a:srgbClr val="1C2833"/>
+                </a:solidFill>
+                <a:latin typeface="Arial" pitchFamily="34" charset="0"/>
+                <a:ea typeface="Arial" pitchFamily="34" charset="-122"/>
+                <a:cs typeface="Arial" pitchFamily="34" charset="-120"/>
+              </a:rPr>
+              <a:t> (Han dynasty, ~5th–1st c. BCE) and probably earlier.</a:t>
+            </a:r>
+            <a:endParaRPr lang="en-US" sz="1200" dirty="0"/>
+          </a:p>
+          <a:p>
+            <a:pPr algn="l" marL="342900" indent="-342900">
+              <a:lnSpc>
+                <a:spcPts val="1620"/>
+              </a:lnSpc>
+              <a:spcAft>
+                <a:spcPts val="300"/>
+              </a:spcAft>
+              <a:buSzPct val="100000"/>
+              <a:buChar char="•"/>
+            </a:pPr>
+            <a:r>
+              <a:rPr lang="en-US" sz="1200" i="1" dirty="0">
+                <a:solidFill>
+                  <a:srgbClr val="1C2833"/>
+                </a:solidFill>
+                <a:latin typeface="Arial" pitchFamily="34" charset="0"/>
+                <a:ea typeface="Arial" pitchFamily="34" charset="-122"/>
+                <a:cs typeface="Arial" pitchFamily="34" charset="-120"/>
+              </a:rPr>
+              <a:t>Melencolia I</a:t>
+            </a:r>
+            <a:pPr algn="l" indent="0" marL="0">
+              <a:lnSpc>
+                <a:spcPts val="1620"/>
+              </a:lnSpc>
+              <a:spcAft>
+                <a:spcPts val="300"/>
+              </a:spcAft>
+              <a:buNone/>
+            </a:pPr>
+            <a:r>
+              <a:rPr lang="en-US" sz="1200" dirty="0">
+                <a:solidFill>
+                  <a:srgbClr val="1C2833"/>
+                </a:solidFill>
+                <a:latin typeface="Arial" pitchFamily="34" charset="0"/>
+                <a:ea typeface="Arial" pitchFamily="34" charset="-122"/>
+                <a:cs typeface="Arial" pitchFamily="34" charset="-120"/>
+              </a:rPr>
+              <a:t> — a 1514 engraving by the German artist Albrecht Dürer; its upper-right corner contains a famous 4×4 magic square.</a:t>
+            </a:r>
+            <a:endParaRPr lang="en-US" sz="1200" dirty="0"/>
+          </a:p>
+        </p:txBody>
+      </p:sp>
+      <p:sp>
+        <p:nvSpPr>
+          <p:cNvPr id="5" name="Text 3"/>
           <p:cNvSpPr/>
           <p:nvPr/>
         </p:nvSpPr>
@@ -4238,7 +9351,7 @@
                 <a:ea typeface="Georgia" pitchFamily="34" charset="-122"/>
                 <a:cs typeface="Georgia" pitchFamily="34" charset="-120"/>
               </a:rPr>
-              <a:t>Warm-up (5 min)</a:t>
+              <a:t>Lesson flow</a:t>
             </a:r>
             <a:endParaRPr lang="en-US" sz="1800" dirty="0"/>
           </a:p>
@@ -4247,100 +9360,6 @@
       <p:sp>
         <p:nvSpPr>
           <p:cNvPr id="4" name="Text 2"/>
-          <p:cNvSpPr/>
-          <p:nvPr/>
-        </p:nvSpPr>
-        <p:spPr>
-          <a:xfrm>
-            <a:off x="634901" y="883593"/>
-            <a:ext cx="8102798" cy="281880"/>
-          </a:xfrm>
-          <a:prstGeom prst="rect">
-            <a:avLst/>
-          </a:prstGeom>
-          <a:noFill/>
-          <a:ln/>
-        </p:spPr>
-        <p:txBody>
-          <a:bodyPr wrap="square" lIns="0" tIns="0" rIns="0" bIns="0" rtlCol="0" anchor="t"/>
-          <a:lstStyle/>
-          <a:p>
-            <a:pPr algn="l" marL="342900" indent="-342900">
-              <a:lnSpc>
-                <a:spcPts val="1620"/>
-              </a:lnSpc>
-              <a:spcAft>
-                <a:spcPts val="300"/>
-              </a:spcAft>
-              <a:buSzPct val="100000"/>
-              <a:buChar char="•"/>
-            </a:pPr>
-            <a:r>
-              <a:rPr lang="en-US" sz="1200" i="1" dirty="0">
-                <a:solidFill>
-                  <a:srgbClr val="1C2833"/>
-                </a:solidFill>
-                <a:latin typeface="Arial" pitchFamily="34" charset="0"/>
-                <a:ea typeface="Arial" pitchFamily="34" charset="-122"/>
-                <a:cs typeface="Arial" pitchFamily="34" charset="-120"/>
-              </a:rPr>
-              <a:t>"Magic squares are not a one-culture phenomenon. Today we look at two famous non-Indian examples and compare."</a:t>
-            </a:r>
-            <a:endParaRPr lang="en-US" sz="1200" dirty="0"/>
-          </a:p>
-        </p:txBody>
-      </p:sp>
-      <p:sp>
-        <p:nvSpPr>
-          <p:cNvPr id="5" name="Text 3"/>
-          <p:cNvSpPr/>
-          <p:nvPr/>
-        </p:nvSpPr>
-        <p:spPr>
-          <a:xfrm>
-            <a:off x="406301" y="1254323"/>
-            <a:ext cx="8498026" cy="213271"/>
-          </a:xfrm>
-          <a:prstGeom prst="rect">
-            <a:avLst/>
-          </a:prstGeom>
-          <a:noFill/>
-          <a:ln/>
-        </p:spPr>
-        <p:txBody>
-          <a:bodyPr wrap="square" lIns="0" tIns="0" rIns="0" bIns="0" rtlCol="0" anchor="t"/>
-          <a:lstStyle/>
-          <a:p>
-            <a:pPr algn="l" indent="0" marL="0">
-              <a:lnSpc>
-                <a:spcPts val="1680"/>
-              </a:lnSpc>
-              <a:spcBef>
-                <a:spcPts val="300"/>
-              </a:spcBef>
-              <a:spcAft>
-                <a:spcPts val="300"/>
-              </a:spcAft>
-              <a:buNone/>
-            </a:pPr>
-            <a:r>
-              <a:rPr lang="en-US" sz="1200" dirty="0">
-                <a:solidFill>
-                  <a:srgbClr val="1C2833"/>
-                </a:solidFill>
-                <a:latin typeface="Arial" pitchFamily="34" charset="0"/>
-                <a:ea typeface="Arial" pitchFamily="34" charset="-122"/>
-                <a:cs typeface="Arial" pitchFamily="34" charset="-120"/>
-              </a:rPr>
-              <a:t>– Show both images side by side, briefly. Don't analyse yet.</a:t>
-            </a:r>
-            <a:endParaRPr lang="en-US" sz="1200" dirty="0"/>
-          </a:p>
-        </p:txBody>
-      </p:sp>
-      <p:sp>
-        <p:nvSpPr>
-          <p:cNvPr id="6" name="Text 4"/>
           <p:cNvSpPr/>
           <p:nvPr/>
         </p:nvSpPr>
@@ -4490,7 +9509,7 @@
                 <a:ea typeface="Georgia" pitchFamily="34" charset="-122"/>
                 <a:cs typeface="Georgia" pitchFamily="34" charset="-120"/>
               </a:rPr>
-              <a:t>Activity (15 min) — Project planning</a:t>
+              <a:t>Warm-up (5 min)</a:t>
             </a:r>
             <a:endParaRPr lang="en-US" sz="1800" dirty="0"/>
           </a:p>
@@ -4504,8 +9523,8 @@
         </p:nvSpPr>
         <p:spPr>
           <a:xfrm>
-            <a:off x="406301" y="870942"/>
-            <a:ext cx="8498026" cy="649337"/>
+            <a:off x="634901" y="883593"/>
+            <a:ext cx="8102798" cy="525661"/>
           </a:xfrm>
           <a:prstGeom prst="rect">
             <a:avLst/>
@@ -4517,17 +9536,39 @@
           <a:bodyPr wrap="square" lIns="0" tIns="0" rIns="0" bIns="0" rtlCol="0" anchor="t"/>
           <a:lstStyle/>
           <a:p>
-            <a:pPr algn="l" indent="0" marL="0">
-              <a:lnSpc>
-                <a:spcPts val="1680"/>
-              </a:lnSpc>
-              <a:spcBef>
-                <a:spcPts val="300"/>
-              </a:spcBef>
-              <a:spcAft>
-                <a:spcPts val="300"/>
-              </a:spcAft>
-              <a:buNone/>
+            <a:pPr algn="l" marL="342900" indent="-342900">
+              <a:lnSpc>
+                <a:spcPts val="1620"/>
+              </a:lnSpc>
+              <a:spcAft>
+                <a:spcPts val="300"/>
+              </a:spcAft>
+              <a:buSzPct val="100000"/>
+              <a:buChar char="•"/>
+            </a:pPr>
+            <a:r>
+              <a:rPr lang="en-US" sz="1200" i="1" dirty="0">
+                <a:solidFill>
+                  <a:srgbClr val="1C2833"/>
+                </a:solidFill>
+                <a:latin typeface="Arial" pitchFamily="34" charset="0"/>
+                <a:ea typeface="Arial" pitchFamily="34" charset="-122"/>
+                <a:cs typeface="Arial" pitchFamily="34" charset="-120"/>
+              </a:rPr>
+              <a:t>"Magic squares are not a one-culture phenomenon. Today we look at two famous non-Indian examples and compare."</a:t>
+            </a:r>
+            <a:endParaRPr lang="en-US" sz="1200" dirty="0"/>
+          </a:p>
+          <a:p>
+            <a:pPr algn="l" marL="342900" indent="-342900">
+              <a:lnSpc>
+                <a:spcPts val="1620"/>
+              </a:lnSpc>
+              <a:spcAft>
+                <a:spcPts val="300"/>
+              </a:spcAft>
+              <a:buSzPct val="100000"/>
+              <a:buChar char="•"/>
             </a:pPr>
             <a:r>
               <a:rPr lang="en-US" sz="1200" dirty="0">
@@ -4538,53 +9579,7 @@
                 <a:ea typeface="Arial" pitchFamily="34" charset="-122"/>
                 <a:cs typeface="Arial" pitchFamily="34" charset="-120"/>
               </a:rPr>
-              <a:t>– Use </a:t>
-            </a:r>
-            <a:pPr algn="l" indent="0" marL="0">
-              <a:lnSpc>
-                <a:spcPts val="1680"/>
-              </a:lnSpc>
-              <a:spcBef>
-                <a:spcPts val="300"/>
-              </a:spcBef>
-              <a:spcAft>
-                <a:spcPts val="300"/>
-              </a:spcAft>
-              <a:buNone/>
-            </a:pPr>
-            <a:r>
-              <a:rPr lang="en-US" sz="1200" dirty="0">
-                <a:solidFill>
-                  <a:srgbClr val="1C2833"/>
-                </a:solidFill>
-                <a:latin typeface="Arial" pitchFamily="34" charset="0"/>
-                <a:ea typeface="Arial" pitchFamily="34" charset="-122"/>
-                <a:cs typeface="Arial" pitchFamily="34" charset="-120"/>
-              </a:rPr>
-              <a:t>activities/activity-02-cross-cultural-compare.md</a:t>
-            </a:r>
-            <a:pPr algn="l" indent="0" marL="0">
-              <a:lnSpc>
-                <a:spcPts val="1680"/>
-              </a:lnSpc>
-              <a:spcBef>
-                <a:spcPts val="300"/>
-              </a:spcBef>
-              <a:spcAft>
-                <a:spcPts val="300"/>
-              </a:spcAft>
-              <a:buNone/>
-            </a:pPr>
-            <a:r>
-              <a:rPr lang="en-US" sz="1200" dirty="0">
-                <a:solidFill>
-                  <a:srgbClr val="1C2833"/>
-                </a:solidFill>
-                <a:latin typeface="Arial" pitchFamily="34" charset="0"/>
-                <a:ea typeface="Arial" pitchFamily="34" charset="-122"/>
-                <a:cs typeface="Arial" pitchFamily="34" charset="-120"/>
-              </a:rPr>
-              <a:t> (a side-by-side worksheet). – Pairs commit to their project format (poster / video / written exposition) and one or two key ideas. – Each pair writes a 3-sentence project plan, hands in for teacher review by end of class.</a:t>
+              <a:t>Show both images side by side, briefly. Don't analyse yet.</a:t>
             </a:r>
             <a:endParaRPr lang="en-US" sz="1200" dirty="0"/>
           </a:p>
@@ -4742,7 +9737,7 @@
                 <a:ea typeface="Georgia" pitchFamily="34" charset="-122"/>
                 <a:cs typeface="Georgia" pitchFamily="34" charset="-120"/>
               </a:rPr>
-              <a:t>Wrap-up (5 min)</a:t>
+              <a:t>Core (20 min)</a:t>
             </a:r>
             <a:endParaRPr lang="en-US" sz="1800" dirty="0"/>
           </a:p>
@@ -4756,8 +9751,8 @@
         </p:nvSpPr>
         <p:spPr>
           <a:xfrm>
-            <a:off x="406301" y="870942"/>
-            <a:ext cx="8498026" cy="426541"/>
+            <a:off x="634901" y="883593"/>
+            <a:ext cx="8102798" cy="281880"/>
           </a:xfrm>
           <a:prstGeom prst="rect">
             <a:avLst/>
@@ -4769,6 +9764,52 @@
           <a:bodyPr wrap="square" lIns="0" tIns="0" rIns="0" bIns="0" rtlCol="0" anchor="t"/>
           <a:lstStyle/>
           <a:p>
+            <a:pPr algn="l" marL="342900" indent="-342900">
+              <a:lnSpc>
+                <a:spcPts val="1620"/>
+              </a:lnSpc>
+              <a:spcAft>
+                <a:spcPts val="300"/>
+              </a:spcAft>
+              <a:buSzPct val="100000"/>
+              <a:buChar char="•"/>
+            </a:pPr>
+            <a:r>
+              <a:rPr lang="en-US" sz="1200" b="1" dirty="0">
+                <a:solidFill>
+                  <a:srgbClr val="1C2833"/>
+                </a:solidFill>
+                <a:latin typeface="Arial" pitchFamily="34" charset="0"/>
+                <a:ea typeface="Arial" pitchFamily="34" charset="-122"/>
+                <a:cs typeface="Arial" pitchFamily="34" charset="-120"/>
+              </a:rPr>
+              <a:t>The Lo Shu (China).</a:t>
+            </a:r>
+            <a:endParaRPr lang="en-US" sz="1200" dirty="0"/>
+          </a:p>
+        </p:txBody>
+      </p:sp>
+      <p:sp>
+        <p:nvSpPr>
+          <p:cNvPr id="5" name="Text 3"/>
+          <p:cNvSpPr/>
+          <p:nvPr/>
+        </p:nvSpPr>
+        <p:spPr>
+          <a:xfrm>
+            <a:off x="406301" y="1254323"/>
+            <a:ext cx="8498026" cy="213271"/>
+          </a:xfrm>
+          <a:prstGeom prst="rect">
+            <a:avLst/>
+          </a:prstGeom>
+          <a:noFill/>
+          <a:ln/>
+        </p:spPr>
+        <p:txBody>
+          <a:bodyPr wrap="square" lIns="0" tIns="0" rIns="0" bIns="0" rtlCol="0" anchor="t"/>
+          <a:lstStyle/>
+          <a:p>
             <a:pPr algn="l" indent="0" marL="0">
               <a:lnSpc>
                 <a:spcPts val="1680"/>
@@ -4790,7 +9831,7 @@
                 <a:ea typeface="Arial" pitchFamily="34" charset="-122"/>
                 <a:cs typeface="Arial" pitchFamily="34" charset="-120"/>
               </a:rPr>
-              <a:t>– Two-pair quick share: "Our project is going to be ___ because ___." – Preview Day 9: project work + a brief look at Sudoku.</a:t>
+              <a:t>The 3×3 magic square in Chinese tradition is identical (up to symmetry) to the 3×3 we've been studying:</a:t>
             </a:r>
             <a:endParaRPr lang="en-US" sz="1200" dirty="0"/>
           </a:p>
@@ -4798,7 +9839,7 @@
       </p:sp>
       <p:sp>
         <p:nvSpPr>
-          <p:cNvPr id="5" name="Text 3"/>
+          <p:cNvPr id="6" name="Text 4"/>
           <p:cNvSpPr/>
           <p:nvPr/>
         </p:nvSpPr>
@@ -4948,7 +9989,7 @@
                 <a:ea typeface="Georgia" pitchFamily="34" charset="-122"/>
                 <a:cs typeface="Georgia" pitchFamily="34" charset="-120"/>
               </a:rPr>
-              <a:t>Student-facing content</a:t>
+              <a:t>Core (20 min) (cont.)</a:t>
             </a:r>
             <a:endParaRPr lang="en-US" sz="1800" dirty="0"/>
           </a:p>
@@ -4963,7 +10004,7 @@
         <p:spPr>
           <a:xfrm>
             <a:off x="406301" y="883593"/>
-            <a:ext cx="8331398" cy="2631281"/>
+            <a:ext cx="8331398" cy="1126778"/>
           </a:xfrm>
           <a:prstGeom prst="rect">
             <a:avLst/>
@@ -4992,16 +10033,16 @@
         </p:nvSpPr>
         <p:spPr>
           <a:xfrm>
-            <a:off x="434876" y="883593"/>
-            <a:ext cx="0" cy="2631281"/>
+            <a:off x="430113" y="883593"/>
+            <a:ext cx="0" cy="1126778"/>
           </a:xfrm>
           <a:prstGeom prst="line">
             <a:avLst/>
           </a:prstGeom>
           <a:noFill/>
-          <a:ln w="57150">
+          <a:ln w="47625">
             <a:solidFill>
-              <a:srgbClr val="FE4447"/>
+              <a:srgbClr val="277884"/>
             </a:solidFill>
             <a:prstDash val="solid"/>
           </a:ln>
@@ -5015,8 +10056,8 @@
         </p:nvSpPr>
         <p:spPr>
           <a:xfrm>
-            <a:off x="692051" y="1074093"/>
-            <a:ext cx="7973389" cy="230981"/>
+            <a:off x="631627" y="1010543"/>
+            <a:ext cx="8086939" cy="174575"/>
           </a:xfrm>
           <a:prstGeom prst="rect">
             <a:avLst/>
@@ -5030,7 +10071,217 @@
           <a:p>
             <a:pPr algn="l" indent="0" marL="0">
               <a:lnSpc>
-                <a:spcPts val="1820"/>
+                <a:spcPts val="1375"/>
+              </a:lnSpc>
+              <a:buNone/>
+            </a:pPr>
+            <a:r>
+              <a:rPr lang="en-US" sz="1100" dirty="0">
+                <a:solidFill>
+                  <a:srgbClr val="1C2833"/>
+                </a:solidFill>
+                <a:latin typeface="Courier New" pitchFamily="34" charset="0"/>
+                <a:ea typeface="Courier New" pitchFamily="34" charset="-122"/>
+                <a:cs typeface="Courier New" pitchFamily="34" charset="-120"/>
+              </a:rPr>
+              <a:t>4 | 9 | 2</a:t>
+            </a:r>
+            <a:endParaRPr lang="en-US" sz="1100" dirty="0"/>
+          </a:p>
+        </p:txBody>
+      </p:sp>
+      <p:sp>
+        <p:nvSpPr>
+          <p:cNvPr id="7" name="Text 5"/>
+          <p:cNvSpPr/>
+          <p:nvPr/>
+        </p:nvSpPr>
+        <p:spPr>
+          <a:xfrm>
+            <a:off x="631627" y="1185118"/>
+            <a:ext cx="8086939" cy="174575"/>
+          </a:xfrm>
+          <a:prstGeom prst="rect">
+            <a:avLst/>
+          </a:prstGeom>
+          <a:noFill/>
+          <a:ln/>
+        </p:spPr>
+        <p:txBody>
+          <a:bodyPr wrap="square" lIns="0" tIns="0" rIns="0" bIns="0" rtlCol="0" anchor="t"/>
+          <a:lstStyle/>
+          <a:p>
+            <a:pPr algn="l" indent="0" marL="0">
+              <a:lnSpc>
+                <a:spcPts val="1375"/>
+              </a:lnSpc>
+              <a:buNone/>
+            </a:pPr>
+            <a:r>
+              <a:rPr lang="en-US" sz="1100" dirty="0">
+                <a:solidFill>
+                  <a:srgbClr val="1C2833"/>
+                </a:solidFill>
+                <a:latin typeface="Courier New" pitchFamily="34" charset="0"/>
+                <a:ea typeface="Courier New" pitchFamily="34" charset="-122"/>
+                <a:cs typeface="Courier New" pitchFamily="34" charset="-120"/>
+              </a:rPr>
+              <a:t>---------</a:t>
+            </a:r>
+            <a:endParaRPr lang="en-US" sz="1100" dirty="0"/>
+          </a:p>
+        </p:txBody>
+      </p:sp>
+      <p:sp>
+        <p:nvSpPr>
+          <p:cNvPr id="8" name="Text 6"/>
+          <p:cNvSpPr/>
+          <p:nvPr/>
+        </p:nvSpPr>
+        <p:spPr>
+          <a:xfrm>
+            <a:off x="631627" y="1359694"/>
+            <a:ext cx="8086939" cy="174575"/>
+          </a:xfrm>
+          <a:prstGeom prst="rect">
+            <a:avLst/>
+          </a:prstGeom>
+          <a:noFill/>
+          <a:ln/>
+        </p:spPr>
+        <p:txBody>
+          <a:bodyPr wrap="square" lIns="0" tIns="0" rIns="0" bIns="0" rtlCol="0" anchor="t"/>
+          <a:lstStyle/>
+          <a:p>
+            <a:pPr algn="l" indent="0" marL="0">
+              <a:lnSpc>
+                <a:spcPts val="1375"/>
+              </a:lnSpc>
+              <a:buNone/>
+            </a:pPr>
+            <a:r>
+              <a:rPr lang="en-US" sz="1100" dirty="0">
+                <a:solidFill>
+                  <a:srgbClr val="1C2833"/>
+                </a:solidFill>
+                <a:latin typeface="Courier New" pitchFamily="34" charset="0"/>
+                <a:ea typeface="Courier New" pitchFamily="34" charset="-122"/>
+                <a:cs typeface="Courier New" pitchFamily="34" charset="-120"/>
+              </a:rPr>
+              <a:t>3 | 5 | 7</a:t>
+            </a:r>
+            <a:endParaRPr lang="en-US" sz="1100" dirty="0"/>
+          </a:p>
+        </p:txBody>
+      </p:sp>
+      <p:sp>
+        <p:nvSpPr>
+          <p:cNvPr id="9" name="Text 7"/>
+          <p:cNvSpPr/>
+          <p:nvPr/>
+        </p:nvSpPr>
+        <p:spPr>
+          <a:xfrm>
+            <a:off x="631627" y="1534269"/>
+            <a:ext cx="8086939" cy="174575"/>
+          </a:xfrm>
+          <a:prstGeom prst="rect">
+            <a:avLst/>
+          </a:prstGeom>
+          <a:noFill/>
+          <a:ln/>
+        </p:spPr>
+        <p:txBody>
+          <a:bodyPr wrap="square" lIns="0" tIns="0" rIns="0" bIns="0" rtlCol="0" anchor="t"/>
+          <a:lstStyle/>
+          <a:p>
+            <a:pPr algn="l" indent="0" marL="0">
+              <a:lnSpc>
+                <a:spcPts val="1375"/>
+              </a:lnSpc>
+              <a:buNone/>
+            </a:pPr>
+            <a:r>
+              <a:rPr lang="en-US" sz="1100" dirty="0">
+                <a:solidFill>
+                  <a:srgbClr val="1C2833"/>
+                </a:solidFill>
+                <a:latin typeface="Courier New" pitchFamily="34" charset="0"/>
+                <a:ea typeface="Courier New" pitchFamily="34" charset="-122"/>
+                <a:cs typeface="Courier New" pitchFamily="34" charset="-120"/>
+              </a:rPr>
+              <a:t>---------</a:t>
+            </a:r>
+            <a:endParaRPr lang="en-US" sz="1100" dirty="0"/>
+          </a:p>
+        </p:txBody>
+      </p:sp>
+      <p:sp>
+        <p:nvSpPr>
+          <p:cNvPr id="10" name="Text 8"/>
+          <p:cNvSpPr/>
+          <p:nvPr/>
+        </p:nvSpPr>
+        <p:spPr>
+          <a:xfrm>
+            <a:off x="631627" y="1708845"/>
+            <a:ext cx="8086939" cy="174575"/>
+          </a:xfrm>
+          <a:prstGeom prst="rect">
+            <a:avLst/>
+          </a:prstGeom>
+          <a:noFill/>
+          <a:ln/>
+        </p:spPr>
+        <p:txBody>
+          <a:bodyPr wrap="square" lIns="0" tIns="0" rIns="0" bIns="0" rtlCol="0" anchor="t"/>
+          <a:lstStyle/>
+          <a:p>
+            <a:pPr algn="l" indent="0" marL="0">
+              <a:lnSpc>
+                <a:spcPts val="1375"/>
+              </a:lnSpc>
+              <a:buNone/>
+            </a:pPr>
+            <a:r>
+              <a:rPr lang="en-US" sz="1100" dirty="0">
+                <a:solidFill>
+                  <a:srgbClr val="1C2833"/>
+                </a:solidFill>
+                <a:latin typeface="Courier New" pitchFamily="34" charset="0"/>
+                <a:ea typeface="Courier New" pitchFamily="34" charset="-122"/>
+                <a:cs typeface="Courier New" pitchFamily="34" charset="-120"/>
+              </a:rPr>
+              <a:t>8 | 1 | 6</a:t>
+            </a:r>
+            <a:endParaRPr lang="en-US" sz="1100" dirty="0"/>
+          </a:p>
+        </p:txBody>
+      </p:sp>
+      <p:sp>
+        <p:nvSpPr>
+          <p:cNvPr id="11" name="Text 9"/>
+          <p:cNvSpPr/>
+          <p:nvPr/>
+        </p:nvSpPr>
+        <p:spPr>
+          <a:xfrm>
+            <a:off x="406301" y="2099221"/>
+            <a:ext cx="8498026" cy="213271"/>
+          </a:xfrm>
+          <a:prstGeom prst="rect">
+            <a:avLst/>
+          </a:prstGeom>
+          <a:noFill/>
+          <a:ln/>
+        </p:spPr>
+        <p:txBody>
+          <a:bodyPr wrap="square" lIns="0" tIns="0" rIns="0" bIns="0" rtlCol="0" anchor="t"/>
+          <a:lstStyle/>
+          <a:p>
+            <a:pPr algn="l" indent="0" marL="0">
+              <a:lnSpc>
+                <a:spcPts val="1680"/>
               </a:lnSpc>
               <a:spcBef>
                 <a:spcPts val="300"/>
@@ -5041,305 +10292,23 @@
               <a:buNone/>
             </a:pPr>
             <a:r>
-              <a:rPr lang="en-US" sz="1300" b="1" i="1" dirty="0">
-                <a:solidFill>
-                  <a:srgbClr val="1C2833"/>
-                </a:solidFill>
-                <a:latin typeface="Georgia" pitchFamily="34" charset="0"/>
-                <a:ea typeface="Georgia" pitchFamily="34" charset="-122"/>
-                <a:cs typeface="Georgia" pitchFamily="34" charset="-120"/>
-              </a:rPr>
-              <a:t>Magic squares across cultures.</a:t>
-            </a:r>
-            <a:endParaRPr lang="en-US" sz="1300" dirty="0"/>
-          </a:p>
-        </p:txBody>
-      </p:sp>
-      <p:sp>
-        <p:nvSpPr>
-          <p:cNvPr id="7" name="Text 5"/>
-          <p:cNvSpPr/>
-          <p:nvPr/>
-        </p:nvSpPr>
-        <p:spPr>
-          <a:xfrm>
-            <a:off x="692051" y="1343174"/>
-            <a:ext cx="7973389" cy="750094"/>
-          </a:xfrm>
-          <a:prstGeom prst="rect">
-            <a:avLst/>
-          </a:prstGeom>
-          <a:noFill/>
-          <a:ln/>
-        </p:spPr>
-        <p:txBody>
-          <a:bodyPr wrap="square" lIns="0" tIns="0" rIns="0" bIns="0" rtlCol="0" anchor="t"/>
-          <a:lstStyle/>
-          <a:p>
-            <a:pPr algn="l" indent="0" marL="0">
-              <a:lnSpc>
-                <a:spcPts val="1820"/>
-              </a:lnSpc>
-              <a:spcBef>
-                <a:spcPts val="300"/>
-              </a:spcBef>
-              <a:spcAft>
-                <a:spcPts val="300"/>
-              </a:spcAft>
-              <a:buNone/>
-            </a:pPr>
-            <a:r>
-              <a:rPr lang="en-US" sz="1300" dirty="0">
-                <a:solidFill>
-                  <a:srgbClr val="1C2833"/>
-                </a:solidFill>
-                <a:latin typeface="Georgia" pitchFamily="34" charset="0"/>
-                <a:ea typeface="Georgia" pitchFamily="34" charset="-122"/>
-                <a:cs typeface="Georgia" pitchFamily="34" charset="-120"/>
-              </a:rPr>
-              <a:t>``</a:t>
-            </a:r>
-            <a:pPr algn="l" indent="0" marL="0">
-              <a:lnSpc>
-                <a:spcPts val="1820"/>
-              </a:lnSpc>
-              <a:spcBef>
-                <a:spcPts val="300"/>
-              </a:spcBef>
-              <a:spcAft>
-                <a:spcPts val="300"/>
-              </a:spcAft>
-              <a:buNone/>
-            </a:pPr>
-            <a:r>
-              <a:rPr lang="en-US" sz="1300" i="1" dirty="0">
-                <a:solidFill>
-                  <a:srgbClr val="1C2833"/>
-                </a:solidFill>
-                <a:latin typeface="Georgia" pitchFamily="34" charset="0"/>
-                <a:ea typeface="Georgia" pitchFamily="34" charset="-122"/>
-                <a:cs typeface="Georgia" pitchFamily="34" charset="-120"/>
-              </a:rPr>
-              <a:t> Lo Shu (China, ~5th c. BCE) Dürer (Germany, 1514 CE) 4 | 9 | 2 16 | 3 | 2 | 13 --------- ---------------- 3 | 5 | 7 5 | 10 | 11 | 8 --------- ---------------- 8 | 1 | 6 9 | 6 | 7 | 12 ---------------- 4 | 15 | 14 | 1</a:t>
-            </a:r>
-            <a:pPr algn="l" indent="0" marL="0">
-              <a:lnSpc>
-                <a:spcPts val="1820"/>
-              </a:lnSpc>
-              <a:spcBef>
-                <a:spcPts val="300"/>
-              </a:spcBef>
-              <a:spcAft>
-                <a:spcPts val="300"/>
-              </a:spcAft>
-              <a:buNone/>
-            </a:pPr>
-            <a:r>
-              <a:rPr lang="en-US" sz="1300" dirty="0">
-                <a:solidFill>
-                  <a:srgbClr val="1C2833"/>
-                </a:solidFill>
-                <a:latin typeface="Georgia" pitchFamily="34" charset="0"/>
-                <a:ea typeface="Georgia" pitchFamily="34" charset="-122"/>
-                <a:cs typeface="Georgia" pitchFamily="34" charset="-120"/>
-              </a:rPr>
-              <a:t>``</a:t>
-            </a:r>
-            <a:endParaRPr lang="en-US" sz="1300" dirty="0"/>
-          </a:p>
-        </p:txBody>
-      </p:sp>
-      <p:sp>
-        <p:nvSpPr>
-          <p:cNvPr id="8" name="Text 6"/>
-          <p:cNvSpPr/>
-          <p:nvPr/>
-        </p:nvSpPr>
-        <p:spPr>
-          <a:xfrm>
-            <a:off x="692051" y="2131368"/>
-            <a:ext cx="7973389" cy="461963"/>
-          </a:xfrm>
-          <a:prstGeom prst="rect">
-            <a:avLst/>
-          </a:prstGeom>
-          <a:noFill/>
-          <a:ln/>
-        </p:spPr>
-        <p:txBody>
-          <a:bodyPr wrap="square" lIns="0" tIns="0" rIns="0" bIns="0" rtlCol="0" anchor="t"/>
-          <a:lstStyle/>
-          <a:p>
-            <a:pPr algn="l" indent="0" marL="0">
-              <a:lnSpc>
-                <a:spcPts val="1820"/>
-              </a:lnSpc>
-              <a:spcBef>
-                <a:spcPts val="300"/>
-              </a:spcBef>
-              <a:spcAft>
-                <a:spcPts val="300"/>
-              </a:spcAft>
-              <a:buNone/>
-            </a:pPr>
-            <a:r>
-              <a:rPr lang="en-US" sz="1300" dirty="0">
-                <a:solidFill>
-                  <a:srgbClr val="1C2833"/>
-                </a:solidFill>
-                <a:latin typeface="Georgia" pitchFamily="34" charset="0"/>
-                <a:ea typeface="Georgia" pitchFamily="34" charset="-122"/>
-                <a:cs typeface="Georgia" pitchFamily="34" charset="-120"/>
-              </a:rPr>
-              <a:t>The Lo Shu 3×3 is the same square as our Day-1 example (up to symmetry). The Dürer 4×4 shares the </a:t>
-            </a:r>
-            <a:pPr algn="l" indent="0" marL="0">
-              <a:lnSpc>
-                <a:spcPts val="1820"/>
-              </a:lnSpc>
-              <a:spcBef>
-                <a:spcPts val="300"/>
-              </a:spcBef>
-              <a:spcAft>
-                <a:spcPts val="300"/>
-              </a:spcAft>
-              <a:buNone/>
-            </a:pPr>
-            <a:r>
-              <a:rPr lang="en-US" sz="1300" b="1" i="1" dirty="0">
-                <a:solidFill>
-                  <a:srgbClr val="1C2833"/>
-                </a:solidFill>
-                <a:latin typeface="Georgia" pitchFamily="34" charset="0"/>
-                <a:ea typeface="Georgia" pitchFamily="34" charset="-122"/>
-                <a:cs typeface="Georgia" pitchFamily="34" charset="-120"/>
-              </a:rPr>
-              <a:t>panel-magic</a:t>
-            </a:r>
-            <a:pPr algn="l" indent="0" marL="0">
-              <a:lnSpc>
-                <a:spcPts val="1820"/>
-              </a:lnSpc>
-              <a:spcBef>
-                <a:spcPts val="300"/>
-              </a:spcBef>
-              <a:spcAft>
-                <a:spcPts val="300"/>
-              </a:spcAft>
-              <a:buNone/>
-            </a:pPr>
-            <a:r>
-              <a:rPr lang="en-US" sz="1300" dirty="0">
-                <a:solidFill>
-                  <a:srgbClr val="1C2833"/>
-                </a:solidFill>
-                <a:latin typeface="Georgia" pitchFamily="34" charset="0"/>
-                <a:ea typeface="Georgia" pitchFamily="34" charset="-122"/>
-                <a:cs typeface="Georgia" pitchFamily="34" charset="-120"/>
-              </a:rPr>
-              <a:t> property with the Khajuraho square (~10th–11th c. CE) — every 2×2 panel sums to 34.</a:t>
-            </a:r>
-            <a:endParaRPr lang="en-US" sz="1300" dirty="0"/>
-          </a:p>
-        </p:txBody>
-      </p:sp>
-      <p:sp>
-        <p:nvSpPr>
-          <p:cNvPr id="9" name="Text 7"/>
-          <p:cNvSpPr/>
-          <p:nvPr/>
-        </p:nvSpPr>
-        <p:spPr>
-          <a:xfrm>
-            <a:off x="692051" y="2631430"/>
-            <a:ext cx="7973389" cy="692944"/>
-          </a:xfrm>
-          <a:prstGeom prst="rect">
-            <a:avLst/>
-          </a:prstGeom>
-          <a:noFill/>
-          <a:ln/>
-        </p:spPr>
-        <p:txBody>
-          <a:bodyPr wrap="square" lIns="0" tIns="0" rIns="0" bIns="0" rtlCol="0" anchor="t"/>
-          <a:lstStyle/>
-          <a:p>
-            <a:pPr algn="l" indent="0" marL="0">
-              <a:lnSpc>
-                <a:spcPts val="1820"/>
-              </a:lnSpc>
-              <a:spcBef>
-                <a:spcPts val="300"/>
-              </a:spcBef>
-              <a:spcAft>
-                <a:spcPts val="300"/>
-              </a:spcAft>
-              <a:buNone/>
-            </a:pPr>
-            <a:r>
-              <a:rPr lang="en-US" sz="1300" dirty="0">
-                <a:solidFill>
-                  <a:srgbClr val="1C2833"/>
-                </a:solidFill>
-                <a:latin typeface="Georgia" pitchFamily="34" charset="0"/>
-                <a:ea typeface="Georgia" pitchFamily="34" charset="-122"/>
-                <a:cs typeface="Georgia" pitchFamily="34" charset="-120"/>
-              </a:rPr>
-              <a:t>Multiple cultures arrived at magic squares: China (~5th c. BCE earliest documented), India (Khajuraho ~10th c. CE, Nārāyaṇa's </a:t>
-            </a:r>
-            <a:pPr algn="l" indent="0" marL="0">
-              <a:lnSpc>
-                <a:spcPts val="1820"/>
-              </a:lnSpc>
-              <a:spcBef>
-                <a:spcPts val="300"/>
-              </a:spcBef>
-              <a:spcAft>
-                <a:spcPts val="300"/>
-              </a:spcAft>
-              <a:buNone/>
-            </a:pPr>
-            <a:r>
-              <a:rPr lang="en-US" sz="1300" i="1" dirty="0">
-                <a:solidFill>
-                  <a:srgbClr val="1C2833"/>
-                </a:solidFill>
-                <a:latin typeface="Georgia" pitchFamily="34" charset="0"/>
-                <a:ea typeface="Georgia" pitchFamily="34" charset="-122"/>
-                <a:cs typeface="Georgia" pitchFamily="34" charset="-120"/>
-              </a:rPr>
-              <a:t>Bhadragaṇita</a:t>
-            </a:r>
-            <a:pPr algn="l" indent="0" marL="0">
-              <a:lnSpc>
-                <a:spcPts val="1820"/>
-              </a:lnSpc>
-              <a:spcBef>
-                <a:spcPts val="300"/>
-              </a:spcBef>
-              <a:spcAft>
-                <a:spcPts val="300"/>
-              </a:spcAft>
-              <a:buNone/>
-            </a:pPr>
-            <a:r>
-              <a:rPr lang="en-US" sz="1300" dirty="0">
-                <a:solidFill>
-                  <a:srgbClr val="1C2833"/>
-                </a:solidFill>
-                <a:latin typeface="Georgia" pitchFamily="34" charset="0"/>
-                <a:ea typeface="Georgia" pitchFamily="34" charset="-122"/>
-                <a:cs typeface="Georgia" pitchFamily="34" charset="-120"/>
-              </a:rPr>
-              <a:t> 1356 CE), the Islamic world (~11th c. CE on), and Europe (~14th c. CE on). No clean single origin.</a:t>
-            </a:r>
-            <a:endParaRPr lang="en-US" sz="1300" dirty="0"/>
-          </a:p>
-        </p:txBody>
-      </p:sp>
-      <p:sp>
-        <p:nvSpPr>
-          <p:cNvPr id="10" name="Text 8"/>
+              <a:rPr lang="en-US" sz="1200" dirty="0">
+                <a:solidFill>
+                  <a:srgbClr val="1C2833"/>
+                </a:solidFill>
+                <a:latin typeface="Arial" pitchFamily="34" charset="0"/>
+                <a:ea typeface="Arial" pitchFamily="34" charset="-122"/>
+                <a:cs typeface="Arial" pitchFamily="34" charset="-120"/>
+              </a:rPr>
+              <a:t>Magic constant: 15 (same as our Day-1 square).</a:t>
+            </a:r>
+            <a:endParaRPr lang="en-US" sz="1200" dirty="0"/>
+          </a:p>
+        </p:txBody>
+      </p:sp>
+      <p:sp>
+        <p:nvSpPr>
+          <p:cNvPr id="12" name="Text 10"/>
           <p:cNvSpPr/>
           <p:nvPr/>
         </p:nvSpPr>
@@ -5489,7 +10458,7 @@
                 <a:ea typeface="Georgia" pitchFamily="34" charset="-122"/>
                 <a:cs typeface="Georgia" pitchFamily="34" charset="-120"/>
               </a:rPr>
-              <a:t>Homework</a:t>
+              <a:t>Core (20 min) (cont.)</a:t>
             </a:r>
             <a:endParaRPr lang="en-US" sz="1800" dirty="0"/>
           </a:p>
@@ -5504,6 +10473,169 @@
         <p:spPr>
           <a:xfrm>
             <a:off x="406301" y="870942"/>
+            <a:ext cx="8498026" cy="639812"/>
+          </a:xfrm>
+          <a:prstGeom prst="rect">
+            <a:avLst/>
+          </a:prstGeom>
+          <a:noFill/>
+          <a:ln/>
+        </p:spPr>
+        <p:txBody>
+          <a:bodyPr wrap="square" lIns="0" tIns="0" rIns="0" bIns="0" rtlCol="0" anchor="t"/>
+          <a:lstStyle/>
+          <a:p>
+            <a:pPr algn="l" indent="0" marL="0">
+              <a:lnSpc>
+                <a:spcPts val="1680"/>
+              </a:lnSpc>
+              <a:spcBef>
+                <a:spcPts val="300"/>
+              </a:spcBef>
+              <a:spcAft>
+                <a:spcPts val="300"/>
+              </a:spcAft>
+              <a:buNone/>
+            </a:pPr>
+            <a:r>
+              <a:rPr lang="en-US" sz="1200" b="1" dirty="0">
+                <a:solidFill>
+                  <a:srgbClr val="1C2833"/>
+                </a:solidFill>
+                <a:latin typeface="Arial" pitchFamily="34" charset="0"/>
+                <a:ea typeface="Arial" pitchFamily="34" charset="-122"/>
+                <a:cs typeface="Arial" pitchFamily="34" charset="-120"/>
+              </a:rPr>
+              <a:t>The legend:</a:t>
+            </a:r>
+            <a:pPr algn="l" indent="0" marL="0">
+              <a:lnSpc>
+                <a:spcPts val="1680"/>
+              </a:lnSpc>
+              <a:spcBef>
+                <a:spcPts val="300"/>
+              </a:spcBef>
+              <a:spcAft>
+                <a:spcPts val="300"/>
+              </a:spcAft>
+              <a:buNone/>
+            </a:pPr>
+            <a:r>
+              <a:rPr lang="en-US" sz="1200" dirty="0">
+                <a:solidFill>
+                  <a:srgbClr val="1C2833"/>
+                </a:solidFill>
+                <a:latin typeface="Arial" pitchFamily="34" charset="0"/>
+                <a:ea typeface="Arial" pitchFamily="34" charset="-122"/>
+                <a:cs typeface="Arial" pitchFamily="34" charset="-120"/>
+              </a:rPr>
+              <a:t> Emperor Yu (legendary, ~2000 BCE attribution) saw the pattern on the shell of a turtle emerging from the Lo river. The earliest </a:t>
+            </a:r>
+            <a:pPr algn="l" indent="0" marL="0">
+              <a:lnSpc>
+                <a:spcPts val="1680"/>
+              </a:lnSpc>
+              <a:spcBef>
+                <a:spcPts val="300"/>
+              </a:spcBef>
+              <a:spcAft>
+                <a:spcPts val="300"/>
+              </a:spcAft>
+              <a:buNone/>
+            </a:pPr>
+            <a:r>
+              <a:rPr lang="en-US" sz="1200" i="1" dirty="0">
+                <a:solidFill>
+                  <a:srgbClr val="1C2833"/>
+                </a:solidFill>
+                <a:latin typeface="Arial" pitchFamily="34" charset="0"/>
+                <a:ea typeface="Arial" pitchFamily="34" charset="-122"/>
+                <a:cs typeface="Arial" pitchFamily="34" charset="-120"/>
+              </a:rPr>
+              <a:t>documented</a:t>
+            </a:r>
+            <a:pPr algn="l" indent="0" marL="0">
+              <a:lnSpc>
+                <a:spcPts val="1680"/>
+              </a:lnSpc>
+              <a:spcBef>
+                <a:spcPts val="300"/>
+              </a:spcBef>
+              <a:spcAft>
+                <a:spcPts val="300"/>
+              </a:spcAft>
+              <a:buNone/>
+            </a:pPr>
+            <a:r>
+              <a:rPr lang="en-US" sz="1200" dirty="0">
+                <a:solidFill>
+                  <a:srgbClr val="1C2833"/>
+                </a:solidFill>
+                <a:latin typeface="Arial" pitchFamily="34" charset="0"/>
+                <a:ea typeface="Arial" pitchFamily="34" charset="-122"/>
+                <a:cs typeface="Arial" pitchFamily="34" charset="-120"/>
+              </a:rPr>
+              <a:t> appearance in a Chinese text is the </a:t>
+            </a:r>
+            <a:pPr algn="l" indent="0" marL="0">
+              <a:lnSpc>
+                <a:spcPts val="1680"/>
+              </a:lnSpc>
+              <a:spcBef>
+                <a:spcPts val="300"/>
+              </a:spcBef>
+              <a:spcAft>
+                <a:spcPts val="300"/>
+              </a:spcAft>
+              <a:buNone/>
+            </a:pPr>
+            <a:r>
+              <a:rPr lang="en-US" sz="1200" i="1" dirty="0">
+                <a:solidFill>
+                  <a:srgbClr val="1C2833"/>
+                </a:solidFill>
+                <a:latin typeface="Arial" pitchFamily="34" charset="0"/>
+                <a:ea typeface="Arial" pitchFamily="34" charset="-122"/>
+                <a:cs typeface="Arial" pitchFamily="34" charset="-120"/>
+              </a:rPr>
+              <a:t>Da Dai Liji</a:t>
+            </a:r>
+            <a:pPr algn="l" indent="0" marL="0">
+              <a:lnSpc>
+                <a:spcPts val="1680"/>
+              </a:lnSpc>
+              <a:spcBef>
+                <a:spcPts val="300"/>
+              </a:spcBef>
+              <a:spcAft>
+                <a:spcPts val="300"/>
+              </a:spcAft>
+              <a:buNone/>
+            </a:pPr>
+            <a:r>
+              <a:rPr lang="en-US" sz="1200" dirty="0">
+                <a:solidFill>
+                  <a:srgbClr val="1C2833"/>
+                </a:solidFill>
+                <a:latin typeface="Arial" pitchFamily="34" charset="0"/>
+                <a:ea typeface="Arial" pitchFamily="34" charset="-122"/>
+                <a:cs typeface="Arial" pitchFamily="34" charset="-120"/>
+              </a:rPr>
+              <a:t> (Han dynasty, roughly 5th–1st c. BCE). Treat the legend as a story; the documented record is the historical evidence.</a:t>
+            </a:r>
+            <a:endParaRPr lang="en-US" sz="1200" dirty="0"/>
+          </a:p>
+        </p:txBody>
+      </p:sp>
+      <p:sp>
+        <p:nvSpPr>
+          <p:cNvPr id="5" name="Text 3"/>
+          <p:cNvSpPr/>
+          <p:nvPr/>
+        </p:nvSpPr>
+        <p:spPr>
+          <a:xfrm>
+            <a:off x="406301" y="1586954"/>
             <a:ext cx="8498026" cy="426541"/>
           </a:xfrm>
           <a:prstGeom prst="rect">
@@ -5529,15 +10661,15 @@
               <a:buNone/>
             </a:pPr>
             <a:r>
-              <a:rPr lang="en-US" sz="1200" dirty="0">
-                <a:solidFill>
-                  <a:srgbClr val="1C2833"/>
-                </a:solidFill>
-                <a:latin typeface="Arial" pitchFamily="34" charset="0"/>
-                <a:ea typeface="Arial" pitchFamily="34" charset="-122"/>
-                <a:cs typeface="Arial" pitchFamily="34" charset="-120"/>
-              </a:rPr>
-              <a:t>– Choose one of the three squares we've seen this fortnight (Day-1 / Khajuraho / Dürer). Verify its magic constant on a fresh piece of paper from scratch. Note one feature you find interesting.</a:t>
+              <a:rPr lang="en-US" sz="1200" i="1" dirty="0">
+                <a:solidFill>
+                  <a:srgbClr val="1C2833"/>
+                </a:solidFill>
+                <a:latin typeface="Arial" pitchFamily="34" charset="0"/>
+                <a:ea typeface="Arial" pitchFamily="34" charset="-122"/>
+                <a:cs typeface="Arial" pitchFamily="34" charset="-120"/>
+              </a:rPr>
+              <a:t>"This is the same square — up to symmetry — as the one we built on Day 1. Two cultures arrived at the same arrangement independently, separated by huge distances."</a:t>
             </a:r>
             <a:endParaRPr lang="en-US" sz="1200" dirty="0"/>
           </a:p>
@@ -5545,7 +10677,7 @@
       </p:sp>
       <p:sp>
         <p:nvSpPr>
-          <p:cNvPr id="5" name="Text 3"/>
+          <p:cNvPr id="6" name="Text 4"/>
           <p:cNvSpPr/>
           <p:nvPr/>
         </p:nvSpPr>
